--- a/Analiza Teoretyczna Metryki VoG.pptx
+++ b/Analiza Teoretyczna Metryki VoG.pptx
@@ -3,14 +3,21 @@
 <p:presentation xmlns:a="http://schemas.openxmlformats.org/drawingml/2006/main" xmlns:r="http://schemas.openxmlformats.org/officeDocument/2006/relationships" xmlns:p="http://schemas.openxmlformats.org/presentationml/2006/main" saveSubsetFonts="1">
   <p:sldMasterIdLst>
     <p:sldMasterId id="2147483648" r:id="rId1"/>
+    <p:sldMasterId id="2147483661" r:id="rId2"/>
   </p:sldMasterIdLst>
   <p:sldIdLst>
-    <p:sldId id="256" r:id="rId2"/>
-    <p:sldId id="257" r:id="rId3"/>
-    <p:sldId id="258" r:id="rId4"/>
-    <p:sldId id="259" r:id="rId5"/>
-    <p:sldId id="260" r:id="rId6"/>
-    <p:sldId id="261" r:id="rId7"/>
+    <p:sldId id="256" r:id="rId3"/>
+    <p:sldId id="262" r:id="rId4"/>
+    <p:sldId id="257" r:id="rId5"/>
+    <p:sldId id="258" r:id="rId6"/>
+    <p:sldId id="259" r:id="rId7"/>
+    <p:sldId id="263" r:id="rId8"/>
+    <p:sldId id="264" r:id="rId9"/>
+    <p:sldId id="266" r:id="rId10"/>
+    <p:sldId id="267" r:id="rId11"/>
+    <p:sldId id="265" r:id="rId12"/>
+    <p:sldId id="260" r:id="rId13"/>
+    <p:sldId id="261" r:id="rId14"/>
   </p:sldIdLst>
   <p:sldSz cx="12192000" cy="6858000"/>
   <p:notesSz cx="6858000" cy="9144000"/>
@@ -109,6 +116,11 @@
       </a:defRPr>
     </a:lvl9pPr>
   </p:defaultTextStyle>
+  <p:extLst>
+    <p:ext uri="{EFAFB233-063F-42B5-8137-9DF3F51BA10A}">
+      <p15:sldGuideLst xmlns:p15="http://schemas.microsoft.com/office/powerpoint/2012/main"/>
+    </p:ext>
+  </p:extLst>
 </p:presentation>
 </file>
 
@@ -936,6 +948,1630 @@
 </p:sldLayout>
 </file>
 
+<file path=ppt/slideLayouts/slideLayout13.xml><?xml version="1.0" encoding="utf-8"?>
+<p:sldLayout xmlns:a="http://schemas.openxmlformats.org/drawingml/2006/main" xmlns:r="http://schemas.openxmlformats.org/officeDocument/2006/relationships" xmlns:p="http://schemas.openxmlformats.org/presentationml/2006/main" type="title" preserve="1">
+  <p:cSld name="Slajd tytułowy">
+    <p:spTree>
+      <p:nvGrpSpPr>
+        <p:cNvPr id="1" name=""/>
+        <p:cNvGrpSpPr/>
+        <p:nvPr/>
+      </p:nvGrpSpPr>
+      <p:grpSpPr>
+        <a:xfrm>
+          <a:off x="0" y="0"/>
+          <a:ext cx="0" cy="0"/>
+          <a:chOff x="0" y="0"/>
+          <a:chExt cx="0" cy="0"/>
+        </a:xfrm>
+      </p:grpSpPr>
+      <p:sp>
+        <p:nvSpPr>
+          <p:cNvPr id="2" name="Tytuł 1">
+            <a:extLst>
+              <a:ext uri="{FF2B5EF4-FFF2-40B4-BE49-F238E27FC236}">
+                <a16:creationId xmlns:a16="http://schemas.microsoft.com/office/drawing/2014/main" id="{7FD1CFC5-9E64-E27A-1E32-32C408CAC42C}"/>
+              </a:ext>
+            </a:extLst>
+          </p:cNvPr>
+          <p:cNvSpPr>
+            <a:spLocks noGrp="1"/>
+          </p:cNvSpPr>
+          <p:nvPr>
+            <p:ph type="ctrTitle"/>
+          </p:nvPr>
+        </p:nvSpPr>
+        <p:spPr>
+          <a:xfrm>
+            <a:off x="1524000" y="1122363"/>
+            <a:ext cx="9144000" cy="2387600"/>
+          </a:xfrm>
+        </p:spPr>
+        <p:txBody>
+          <a:bodyPr anchor="b"/>
+          <a:lstStyle>
+            <a:lvl1pPr algn="ctr">
+              <a:defRPr sz="6000"/>
+            </a:lvl1pPr>
+          </a:lstStyle>
+          <a:p>
+            <a:r>
+              <a:rPr lang="pl-PL"/>
+              <a:t>Kliknij, aby edytować styl</a:t>
+            </a:r>
+          </a:p>
+        </p:txBody>
+      </p:sp>
+      <p:sp>
+        <p:nvSpPr>
+          <p:cNvPr id="3" name="Podtytuł 2">
+            <a:extLst>
+              <a:ext uri="{FF2B5EF4-FFF2-40B4-BE49-F238E27FC236}">
+                <a16:creationId xmlns:a16="http://schemas.microsoft.com/office/drawing/2014/main" id="{27884E63-0389-7568-2ED4-1C5004D2F483}"/>
+              </a:ext>
+            </a:extLst>
+          </p:cNvPr>
+          <p:cNvSpPr>
+            <a:spLocks noGrp="1"/>
+          </p:cNvSpPr>
+          <p:nvPr>
+            <p:ph type="subTitle" idx="1"/>
+          </p:nvPr>
+        </p:nvSpPr>
+        <p:spPr>
+          <a:xfrm>
+            <a:off x="1524000" y="3602038"/>
+            <a:ext cx="9144000" cy="1655762"/>
+          </a:xfrm>
+        </p:spPr>
+        <p:txBody>
+          <a:bodyPr/>
+          <a:lstStyle>
+            <a:lvl1pPr marL="0" indent="0" algn="ctr">
+              <a:buNone/>
+              <a:defRPr sz="2400"/>
+            </a:lvl1pPr>
+            <a:lvl2pPr marL="457200" indent="0" algn="ctr">
+              <a:buNone/>
+              <a:defRPr sz="2000"/>
+            </a:lvl2pPr>
+            <a:lvl3pPr marL="914400" indent="0" algn="ctr">
+              <a:buNone/>
+              <a:defRPr sz="1800"/>
+            </a:lvl3pPr>
+            <a:lvl4pPr marL="1371600" indent="0" algn="ctr">
+              <a:buNone/>
+              <a:defRPr sz="1600"/>
+            </a:lvl4pPr>
+            <a:lvl5pPr marL="1828800" indent="0" algn="ctr">
+              <a:buNone/>
+              <a:defRPr sz="1600"/>
+            </a:lvl5pPr>
+            <a:lvl6pPr marL="2286000" indent="0" algn="ctr">
+              <a:buNone/>
+              <a:defRPr sz="1600"/>
+            </a:lvl6pPr>
+            <a:lvl7pPr marL="2743200" indent="0" algn="ctr">
+              <a:buNone/>
+              <a:defRPr sz="1600"/>
+            </a:lvl7pPr>
+            <a:lvl8pPr marL="3200400" indent="0" algn="ctr">
+              <a:buNone/>
+              <a:defRPr sz="1600"/>
+            </a:lvl8pPr>
+            <a:lvl9pPr marL="3657600" indent="0" algn="ctr">
+              <a:buNone/>
+              <a:defRPr sz="1600"/>
+            </a:lvl9pPr>
+          </a:lstStyle>
+          <a:p>
+            <a:r>
+              <a:rPr lang="pl-PL"/>
+              <a:t>Kliknij, aby edytować styl wzorca podtytułu</a:t>
+            </a:r>
+          </a:p>
+        </p:txBody>
+      </p:sp>
+      <p:sp>
+        <p:nvSpPr>
+          <p:cNvPr id="4" name="Symbol zastępczy daty 3">
+            <a:extLst>
+              <a:ext uri="{FF2B5EF4-FFF2-40B4-BE49-F238E27FC236}">
+                <a16:creationId xmlns:a16="http://schemas.microsoft.com/office/drawing/2014/main" id="{62926A95-13D0-3BBB-A157-67DA06AEB06B}"/>
+              </a:ext>
+            </a:extLst>
+          </p:cNvPr>
+          <p:cNvSpPr>
+            <a:spLocks noGrp="1"/>
+          </p:cNvSpPr>
+          <p:nvPr>
+            <p:ph type="dt" sz="half" idx="10"/>
+          </p:nvPr>
+        </p:nvSpPr>
+        <p:spPr/>
+        <p:txBody>
+          <a:bodyPr/>
+          <a:lstStyle/>
+          <a:p>
+            <a:fld id="{E180F3EB-CED7-43F4-9E23-4BCBF0141284}" type="datetimeFigureOut">
+              <a:rPr lang="pl-PL" smtClean="0"/>
+              <a:t>26.03.2026</a:t>
+            </a:fld>
+            <a:endParaRPr lang="pl-PL"/>
+          </a:p>
+        </p:txBody>
+      </p:sp>
+      <p:sp>
+        <p:nvSpPr>
+          <p:cNvPr id="5" name="Symbol zastępczy stopki 4">
+            <a:extLst>
+              <a:ext uri="{FF2B5EF4-FFF2-40B4-BE49-F238E27FC236}">
+                <a16:creationId xmlns:a16="http://schemas.microsoft.com/office/drawing/2014/main" id="{8FF6FE0B-7809-B06E-BF9B-AA73B474E486}"/>
+              </a:ext>
+            </a:extLst>
+          </p:cNvPr>
+          <p:cNvSpPr>
+            <a:spLocks noGrp="1"/>
+          </p:cNvSpPr>
+          <p:nvPr>
+            <p:ph type="ftr" sz="quarter" idx="11"/>
+          </p:nvPr>
+        </p:nvSpPr>
+        <p:spPr/>
+        <p:txBody>
+          <a:bodyPr/>
+          <a:lstStyle/>
+          <a:p>
+            <a:endParaRPr lang="pl-PL"/>
+          </a:p>
+        </p:txBody>
+      </p:sp>
+      <p:sp>
+        <p:nvSpPr>
+          <p:cNvPr id="6" name="Symbol zastępczy numeru slajdu 5">
+            <a:extLst>
+              <a:ext uri="{FF2B5EF4-FFF2-40B4-BE49-F238E27FC236}">
+                <a16:creationId xmlns:a16="http://schemas.microsoft.com/office/drawing/2014/main" id="{E1446C57-748E-8A7D-18A2-93A4B5239F3E}"/>
+              </a:ext>
+            </a:extLst>
+          </p:cNvPr>
+          <p:cNvSpPr>
+            <a:spLocks noGrp="1"/>
+          </p:cNvSpPr>
+          <p:nvPr>
+            <p:ph type="sldNum" sz="quarter" idx="12"/>
+          </p:nvPr>
+        </p:nvSpPr>
+        <p:spPr/>
+        <p:txBody>
+          <a:bodyPr/>
+          <a:lstStyle/>
+          <a:p>
+            <a:fld id="{A08A34F4-C42B-42CF-851B-67FCC4F4CC97}" type="slidenum">
+              <a:rPr lang="pl-PL" smtClean="0"/>
+              <a:t>‹#›</a:t>
+            </a:fld>
+            <a:endParaRPr lang="pl-PL"/>
+          </a:p>
+        </p:txBody>
+      </p:sp>
+    </p:spTree>
+    <p:extLst>
+      <p:ext uri="{BB962C8B-B14F-4D97-AF65-F5344CB8AC3E}">
+        <p14:creationId xmlns:p14="http://schemas.microsoft.com/office/powerpoint/2010/main" val="125934353"/>
+      </p:ext>
+    </p:extLst>
+  </p:cSld>
+  <p:clrMapOvr>
+    <a:masterClrMapping/>
+  </p:clrMapOvr>
+</p:sldLayout>
+</file>
+
+<file path=ppt/slideLayouts/slideLayout14.xml><?xml version="1.0" encoding="utf-8"?>
+<p:sldLayout xmlns:a="http://schemas.openxmlformats.org/drawingml/2006/main" xmlns:r="http://schemas.openxmlformats.org/officeDocument/2006/relationships" xmlns:p="http://schemas.openxmlformats.org/presentationml/2006/main" type="obj" preserve="1">
+  <p:cSld name="Tytuł i zawartość">
+    <p:spTree>
+      <p:nvGrpSpPr>
+        <p:cNvPr id="1" name=""/>
+        <p:cNvGrpSpPr/>
+        <p:nvPr/>
+      </p:nvGrpSpPr>
+      <p:grpSpPr>
+        <a:xfrm>
+          <a:off x="0" y="0"/>
+          <a:ext cx="0" cy="0"/>
+          <a:chOff x="0" y="0"/>
+          <a:chExt cx="0" cy="0"/>
+        </a:xfrm>
+      </p:grpSpPr>
+      <p:sp>
+        <p:nvSpPr>
+          <p:cNvPr id="2" name="Tytuł 1">
+            <a:extLst>
+              <a:ext uri="{FF2B5EF4-FFF2-40B4-BE49-F238E27FC236}">
+                <a16:creationId xmlns:a16="http://schemas.microsoft.com/office/drawing/2014/main" id="{4883A830-F5E7-304D-AC6F-A5ABDD1D617F}"/>
+              </a:ext>
+            </a:extLst>
+          </p:cNvPr>
+          <p:cNvSpPr>
+            <a:spLocks noGrp="1"/>
+          </p:cNvSpPr>
+          <p:nvPr>
+            <p:ph type="title"/>
+          </p:nvPr>
+        </p:nvSpPr>
+        <p:spPr/>
+        <p:txBody>
+          <a:bodyPr/>
+          <a:lstStyle/>
+          <a:p>
+            <a:r>
+              <a:rPr lang="pl-PL"/>
+              <a:t>Kliknij, aby edytować styl</a:t>
+            </a:r>
+          </a:p>
+        </p:txBody>
+      </p:sp>
+      <p:sp>
+        <p:nvSpPr>
+          <p:cNvPr id="3" name="Symbol zastępczy zawartości 2">
+            <a:extLst>
+              <a:ext uri="{FF2B5EF4-FFF2-40B4-BE49-F238E27FC236}">
+                <a16:creationId xmlns:a16="http://schemas.microsoft.com/office/drawing/2014/main" id="{216066B8-6B39-4C0F-D392-20F9D18A2007}"/>
+              </a:ext>
+            </a:extLst>
+          </p:cNvPr>
+          <p:cNvSpPr>
+            <a:spLocks noGrp="1"/>
+          </p:cNvSpPr>
+          <p:nvPr>
+            <p:ph idx="1"/>
+          </p:nvPr>
+        </p:nvSpPr>
+        <p:spPr/>
+        <p:txBody>
+          <a:bodyPr/>
+          <a:lstStyle/>
+          <a:p>
+            <a:pPr lvl="0"/>
+            <a:r>
+              <a:rPr lang="pl-PL"/>
+              <a:t>Kliknij, aby edytować style wzorca tekstu</a:t>
+            </a:r>
+          </a:p>
+          <a:p>
+            <a:pPr lvl="1"/>
+            <a:r>
+              <a:rPr lang="pl-PL"/>
+              <a:t>Drugi poziom</a:t>
+            </a:r>
+          </a:p>
+          <a:p>
+            <a:pPr lvl="2"/>
+            <a:r>
+              <a:rPr lang="pl-PL"/>
+              <a:t>Trzeci poziom</a:t>
+            </a:r>
+          </a:p>
+          <a:p>
+            <a:pPr lvl="3"/>
+            <a:r>
+              <a:rPr lang="pl-PL"/>
+              <a:t>Czwarty poziom</a:t>
+            </a:r>
+          </a:p>
+          <a:p>
+            <a:pPr lvl="4"/>
+            <a:r>
+              <a:rPr lang="pl-PL"/>
+              <a:t>Piąty poziom</a:t>
+            </a:r>
+          </a:p>
+        </p:txBody>
+      </p:sp>
+      <p:sp>
+        <p:nvSpPr>
+          <p:cNvPr id="4" name="Symbol zastępczy daty 3">
+            <a:extLst>
+              <a:ext uri="{FF2B5EF4-FFF2-40B4-BE49-F238E27FC236}">
+                <a16:creationId xmlns:a16="http://schemas.microsoft.com/office/drawing/2014/main" id="{FB8756EB-C816-1265-B18E-FD76C71FF2E9}"/>
+              </a:ext>
+            </a:extLst>
+          </p:cNvPr>
+          <p:cNvSpPr>
+            <a:spLocks noGrp="1"/>
+          </p:cNvSpPr>
+          <p:nvPr>
+            <p:ph type="dt" sz="half" idx="10"/>
+          </p:nvPr>
+        </p:nvSpPr>
+        <p:spPr/>
+        <p:txBody>
+          <a:bodyPr/>
+          <a:lstStyle/>
+          <a:p>
+            <a:fld id="{E180F3EB-CED7-43F4-9E23-4BCBF0141284}" type="datetimeFigureOut">
+              <a:rPr lang="pl-PL" smtClean="0"/>
+              <a:t>26.03.2026</a:t>
+            </a:fld>
+            <a:endParaRPr lang="pl-PL"/>
+          </a:p>
+        </p:txBody>
+      </p:sp>
+      <p:sp>
+        <p:nvSpPr>
+          <p:cNvPr id="5" name="Symbol zastępczy stopki 4">
+            <a:extLst>
+              <a:ext uri="{FF2B5EF4-FFF2-40B4-BE49-F238E27FC236}">
+                <a16:creationId xmlns:a16="http://schemas.microsoft.com/office/drawing/2014/main" id="{E2B04D89-5C7C-4268-A58E-5469E2A06B24}"/>
+              </a:ext>
+            </a:extLst>
+          </p:cNvPr>
+          <p:cNvSpPr>
+            <a:spLocks noGrp="1"/>
+          </p:cNvSpPr>
+          <p:nvPr>
+            <p:ph type="ftr" sz="quarter" idx="11"/>
+          </p:nvPr>
+        </p:nvSpPr>
+        <p:spPr/>
+        <p:txBody>
+          <a:bodyPr/>
+          <a:lstStyle/>
+          <a:p>
+            <a:endParaRPr lang="pl-PL"/>
+          </a:p>
+        </p:txBody>
+      </p:sp>
+      <p:sp>
+        <p:nvSpPr>
+          <p:cNvPr id="6" name="Symbol zastępczy numeru slajdu 5">
+            <a:extLst>
+              <a:ext uri="{FF2B5EF4-FFF2-40B4-BE49-F238E27FC236}">
+                <a16:creationId xmlns:a16="http://schemas.microsoft.com/office/drawing/2014/main" id="{2F2CECC8-6EB9-C054-E60C-64C4F9C4794F}"/>
+              </a:ext>
+            </a:extLst>
+          </p:cNvPr>
+          <p:cNvSpPr>
+            <a:spLocks noGrp="1"/>
+          </p:cNvSpPr>
+          <p:nvPr>
+            <p:ph type="sldNum" sz="quarter" idx="12"/>
+          </p:nvPr>
+        </p:nvSpPr>
+        <p:spPr/>
+        <p:txBody>
+          <a:bodyPr/>
+          <a:lstStyle/>
+          <a:p>
+            <a:fld id="{A08A34F4-C42B-42CF-851B-67FCC4F4CC97}" type="slidenum">
+              <a:rPr lang="pl-PL" smtClean="0"/>
+              <a:t>‹#›</a:t>
+            </a:fld>
+            <a:endParaRPr lang="pl-PL"/>
+          </a:p>
+        </p:txBody>
+      </p:sp>
+    </p:spTree>
+    <p:extLst>
+      <p:ext uri="{BB962C8B-B14F-4D97-AF65-F5344CB8AC3E}">
+        <p14:creationId xmlns:p14="http://schemas.microsoft.com/office/powerpoint/2010/main" val="3261017178"/>
+      </p:ext>
+    </p:extLst>
+  </p:cSld>
+  <p:clrMapOvr>
+    <a:masterClrMapping/>
+  </p:clrMapOvr>
+</p:sldLayout>
+</file>
+
+<file path=ppt/slideLayouts/slideLayout15.xml><?xml version="1.0" encoding="utf-8"?>
+<p:sldLayout xmlns:a="http://schemas.openxmlformats.org/drawingml/2006/main" xmlns:r="http://schemas.openxmlformats.org/officeDocument/2006/relationships" xmlns:p="http://schemas.openxmlformats.org/presentationml/2006/main" type="secHead" preserve="1">
+  <p:cSld name="Nagłówek sekcji">
+    <p:spTree>
+      <p:nvGrpSpPr>
+        <p:cNvPr id="1" name=""/>
+        <p:cNvGrpSpPr/>
+        <p:nvPr/>
+      </p:nvGrpSpPr>
+      <p:grpSpPr>
+        <a:xfrm>
+          <a:off x="0" y="0"/>
+          <a:ext cx="0" cy="0"/>
+          <a:chOff x="0" y="0"/>
+          <a:chExt cx="0" cy="0"/>
+        </a:xfrm>
+      </p:grpSpPr>
+      <p:sp>
+        <p:nvSpPr>
+          <p:cNvPr id="2" name="Tytuł 1">
+            <a:extLst>
+              <a:ext uri="{FF2B5EF4-FFF2-40B4-BE49-F238E27FC236}">
+                <a16:creationId xmlns:a16="http://schemas.microsoft.com/office/drawing/2014/main" id="{7E1A055B-20EC-58C5-74AD-E45DFE60DB6A}"/>
+              </a:ext>
+            </a:extLst>
+          </p:cNvPr>
+          <p:cNvSpPr>
+            <a:spLocks noGrp="1"/>
+          </p:cNvSpPr>
+          <p:nvPr>
+            <p:ph type="title"/>
+          </p:nvPr>
+        </p:nvSpPr>
+        <p:spPr>
+          <a:xfrm>
+            <a:off x="831850" y="1709738"/>
+            <a:ext cx="10515600" cy="2852737"/>
+          </a:xfrm>
+        </p:spPr>
+        <p:txBody>
+          <a:bodyPr anchor="b"/>
+          <a:lstStyle>
+            <a:lvl1pPr>
+              <a:defRPr sz="6000"/>
+            </a:lvl1pPr>
+          </a:lstStyle>
+          <a:p>
+            <a:r>
+              <a:rPr lang="pl-PL"/>
+              <a:t>Kliknij, aby edytować styl</a:t>
+            </a:r>
+          </a:p>
+        </p:txBody>
+      </p:sp>
+      <p:sp>
+        <p:nvSpPr>
+          <p:cNvPr id="3" name="Symbol zastępczy tekstu 2">
+            <a:extLst>
+              <a:ext uri="{FF2B5EF4-FFF2-40B4-BE49-F238E27FC236}">
+                <a16:creationId xmlns:a16="http://schemas.microsoft.com/office/drawing/2014/main" id="{1BE87AFA-F0FD-0431-124E-F9F6324FD828}"/>
+              </a:ext>
+            </a:extLst>
+          </p:cNvPr>
+          <p:cNvSpPr>
+            <a:spLocks noGrp="1"/>
+          </p:cNvSpPr>
+          <p:nvPr>
+            <p:ph type="body" idx="1"/>
+          </p:nvPr>
+        </p:nvSpPr>
+        <p:spPr>
+          <a:xfrm>
+            <a:off x="831850" y="4589463"/>
+            <a:ext cx="10515600" cy="1500187"/>
+          </a:xfrm>
+        </p:spPr>
+        <p:txBody>
+          <a:bodyPr/>
+          <a:lstStyle>
+            <a:lvl1pPr marL="0" indent="0">
+              <a:buNone/>
+              <a:defRPr sz="2400">
+                <a:solidFill>
+                  <a:schemeClr val="tx1">
+                    <a:tint val="82000"/>
+                  </a:schemeClr>
+                </a:solidFill>
+              </a:defRPr>
+            </a:lvl1pPr>
+            <a:lvl2pPr marL="457200" indent="0">
+              <a:buNone/>
+              <a:defRPr sz="2000">
+                <a:solidFill>
+                  <a:schemeClr val="tx1">
+                    <a:tint val="82000"/>
+                  </a:schemeClr>
+                </a:solidFill>
+              </a:defRPr>
+            </a:lvl2pPr>
+            <a:lvl3pPr marL="914400" indent="0">
+              <a:buNone/>
+              <a:defRPr sz="1800">
+                <a:solidFill>
+                  <a:schemeClr val="tx1">
+                    <a:tint val="82000"/>
+                  </a:schemeClr>
+                </a:solidFill>
+              </a:defRPr>
+            </a:lvl3pPr>
+            <a:lvl4pPr marL="1371600" indent="0">
+              <a:buNone/>
+              <a:defRPr sz="1600">
+                <a:solidFill>
+                  <a:schemeClr val="tx1">
+                    <a:tint val="82000"/>
+                  </a:schemeClr>
+                </a:solidFill>
+              </a:defRPr>
+            </a:lvl4pPr>
+            <a:lvl5pPr marL="1828800" indent="0">
+              <a:buNone/>
+              <a:defRPr sz="1600">
+                <a:solidFill>
+                  <a:schemeClr val="tx1">
+                    <a:tint val="82000"/>
+                  </a:schemeClr>
+                </a:solidFill>
+              </a:defRPr>
+            </a:lvl5pPr>
+            <a:lvl6pPr marL="2286000" indent="0">
+              <a:buNone/>
+              <a:defRPr sz="1600">
+                <a:solidFill>
+                  <a:schemeClr val="tx1">
+                    <a:tint val="82000"/>
+                  </a:schemeClr>
+                </a:solidFill>
+              </a:defRPr>
+            </a:lvl6pPr>
+            <a:lvl7pPr marL="2743200" indent="0">
+              <a:buNone/>
+              <a:defRPr sz="1600">
+                <a:solidFill>
+                  <a:schemeClr val="tx1">
+                    <a:tint val="82000"/>
+                  </a:schemeClr>
+                </a:solidFill>
+              </a:defRPr>
+            </a:lvl7pPr>
+            <a:lvl8pPr marL="3200400" indent="0">
+              <a:buNone/>
+              <a:defRPr sz="1600">
+                <a:solidFill>
+                  <a:schemeClr val="tx1">
+                    <a:tint val="82000"/>
+                  </a:schemeClr>
+                </a:solidFill>
+              </a:defRPr>
+            </a:lvl8pPr>
+            <a:lvl9pPr marL="3657600" indent="0">
+              <a:buNone/>
+              <a:defRPr sz="1600">
+                <a:solidFill>
+                  <a:schemeClr val="tx1">
+                    <a:tint val="82000"/>
+                  </a:schemeClr>
+                </a:solidFill>
+              </a:defRPr>
+            </a:lvl9pPr>
+          </a:lstStyle>
+          <a:p>
+            <a:pPr lvl="0"/>
+            <a:r>
+              <a:rPr lang="pl-PL"/>
+              <a:t>Kliknij, aby edytować style wzorca tekstu</a:t>
+            </a:r>
+          </a:p>
+        </p:txBody>
+      </p:sp>
+      <p:sp>
+        <p:nvSpPr>
+          <p:cNvPr id="4" name="Symbol zastępczy daty 3">
+            <a:extLst>
+              <a:ext uri="{FF2B5EF4-FFF2-40B4-BE49-F238E27FC236}">
+                <a16:creationId xmlns:a16="http://schemas.microsoft.com/office/drawing/2014/main" id="{4C7F2822-C1B5-618E-D138-D9F7FA2661A7}"/>
+              </a:ext>
+            </a:extLst>
+          </p:cNvPr>
+          <p:cNvSpPr>
+            <a:spLocks noGrp="1"/>
+          </p:cNvSpPr>
+          <p:nvPr>
+            <p:ph type="dt" sz="half" idx="10"/>
+          </p:nvPr>
+        </p:nvSpPr>
+        <p:spPr/>
+        <p:txBody>
+          <a:bodyPr/>
+          <a:lstStyle/>
+          <a:p>
+            <a:fld id="{E180F3EB-CED7-43F4-9E23-4BCBF0141284}" type="datetimeFigureOut">
+              <a:rPr lang="pl-PL" smtClean="0"/>
+              <a:t>26.03.2026</a:t>
+            </a:fld>
+            <a:endParaRPr lang="pl-PL"/>
+          </a:p>
+        </p:txBody>
+      </p:sp>
+      <p:sp>
+        <p:nvSpPr>
+          <p:cNvPr id="5" name="Symbol zastępczy stopki 4">
+            <a:extLst>
+              <a:ext uri="{FF2B5EF4-FFF2-40B4-BE49-F238E27FC236}">
+                <a16:creationId xmlns:a16="http://schemas.microsoft.com/office/drawing/2014/main" id="{804C9AD9-942B-2D33-3333-8BB3457545DE}"/>
+              </a:ext>
+            </a:extLst>
+          </p:cNvPr>
+          <p:cNvSpPr>
+            <a:spLocks noGrp="1"/>
+          </p:cNvSpPr>
+          <p:nvPr>
+            <p:ph type="ftr" sz="quarter" idx="11"/>
+          </p:nvPr>
+        </p:nvSpPr>
+        <p:spPr/>
+        <p:txBody>
+          <a:bodyPr/>
+          <a:lstStyle/>
+          <a:p>
+            <a:endParaRPr lang="pl-PL"/>
+          </a:p>
+        </p:txBody>
+      </p:sp>
+      <p:sp>
+        <p:nvSpPr>
+          <p:cNvPr id="6" name="Symbol zastępczy numeru slajdu 5">
+            <a:extLst>
+              <a:ext uri="{FF2B5EF4-FFF2-40B4-BE49-F238E27FC236}">
+                <a16:creationId xmlns:a16="http://schemas.microsoft.com/office/drawing/2014/main" id="{E1F1EFBB-4B28-B20B-22AA-385FBA81D2FD}"/>
+              </a:ext>
+            </a:extLst>
+          </p:cNvPr>
+          <p:cNvSpPr>
+            <a:spLocks noGrp="1"/>
+          </p:cNvSpPr>
+          <p:nvPr>
+            <p:ph type="sldNum" sz="quarter" idx="12"/>
+          </p:nvPr>
+        </p:nvSpPr>
+        <p:spPr/>
+        <p:txBody>
+          <a:bodyPr/>
+          <a:lstStyle/>
+          <a:p>
+            <a:fld id="{A08A34F4-C42B-42CF-851B-67FCC4F4CC97}" type="slidenum">
+              <a:rPr lang="pl-PL" smtClean="0"/>
+              <a:t>‹#›</a:t>
+            </a:fld>
+            <a:endParaRPr lang="pl-PL"/>
+          </a:p>
+        </p:txBody>
+      </p:sp>
+    </p:spTree>
+    <p:extLst>
+      <p:ext uri="{BB962C8B-B14F-4D97-AF65-F5344CB8AC3E}">
+        <p14:creationId xmlns:p14="http://schemas.microsoft.com/office/powerpoint/2010/main" val="998101078"/>
+      </p:ext>
+    </p:extLst>
+  </p:cSld>
+  <p:clrMapOvr>
+    <a:masterClrMapping/>
+  </p:clrMapOvr>
+</p:sldLayout>
+</file>
+
+<file path=ppt/slideLayouts/slideLayout16.xml><?xml version="1.0" encoding="utf-8"?>
+<p:sldLayout xmlns:a="http://schemas.openxmlformats.org/drawingml/2006/main" xmlns:r="http://schemas.openxmlformats.org/officeDocument/2006/relationships" xmlns:p="http://schemas.openxmlformats.org/presentationml/2006/main" type="twoObj" preserve="1">
+  <p:cSld name="Dwa elementy zawartości">
+    <p:spTree>
+      <p:nvGrpSpPr>
+        <p:cNvPr id="1" name=""/>
+        <p:cNvGrpSpPr/>
+        <p:nvPr/>
+      </p:nvGrpSpPr>
+      <p:grpSpPr>
+        <a:xfrm>
+          <a:off x="0" y="0"/>
+          <a:ext cx="0" cy="0"/>
+          <a:chOff x="0" y="0"/>
+          <a:chExt cx="0" cy="0"/>
+        </a:xfrm>
+      </p:grpSpPr>
+      <p:sp>
+        <p:nvSpPr>
+          <p:cNvPr id="2" name="Tytuł 1">
+            <a:extLst>
+              <a:ext uri="{FF2B5EF4-FFF2-40B4-BE49-F238E27FC236}">
+                <a16:creationId xmlns:a16="http://schemas.microsoft.com/office/drawing/2014/main" id="{9A8D0624-34B7-32BC-7E24-5420EAC0CD38}"/>
+              </a:ext>
+            </a:extLst>
+          </p:cNvPr>
+          <p:cNvSpPr>
+            <a:spLocks noGrp="1"/>
+          </p:cNvSpPr>
+          <p:nvPr>
+            <p:ph type="title"/>
+          </p:nvPr>
+        </p:nvSpPr>
+        <p:spPr/>
+        <p:txBody>
+          <a:bodyPr/>
+          <a:lstStyle/>
+          <a:p>
+            <a:r>
+              <a:rPr lang="pl-PL"/>
+              <a:t>Kliknij, aby edytować styl</a:t>
+            </a:r>
+          </a:p>
+        </p:txBody>
+      </p:sp>
+      <p:sp>
+        <p:nvSpPr>
+          <p:cNvPr id="3" name="Symbol zastępczy zawartości 2">
+            <a:extLst>
+              <a:ext uri="{FF2B5EF4-FFF2-40B4-BE49-F238E27FC236}">
+                <a16:creationId xmlns:a16="http://schemas.microsoft.com/office/drawing/2014/main" id="{6FF0CA34-F481-32C8-B979-AAAFF442A488}"/>
+              </a:ext>
+            </a:extLst>
+          </p:cNvPr>
+          <p:cNvSpPr>
+            <a:spLocks noGrp="1"/>
+          </p:cNvSpPr>
+          <p:nvPr>
+            <p:ph sz="half" idx="1"/>
+          </p:nvPr>
+        </p:nvSpPr>
+        <p:spPr>
+          <a:xfrm>
+            <a:off x="838200" y="1825625"/>
+            <a:ext cx="5181600" cy="4351338"/>
+          </a:xfrm>
+        </p:spPr>
+        <p:txBody>
+          <a:bodyPr/>
+          <a:lstStyle/>
+          <a:p>
+            <a:pPr lvl="0"/>
+            <a:r>
+              <a:rPr lang="pl-PL"/>
+              <a:t>Kliknij, aby edytować style wzorca tekstu</a:t>
+            </a:r>
+          </a:p>
+          <a:p>
+            <a:pPr lvl="1"/>
+            <a:r>
+              <a:rPr lang="pl-PL"/>
+              <a:t>Drugi poziom</a:t>
+            </a:r>
+          </a:p>
+          <a:p>
+            <a:pPr lvl="2"/>
+            <a:r>
+              <a:rPr lang="pl-PL"/>
+              <a:t>Trzeci poziom</a:t>
+            </a:r>
+          </a:p>
+          <a:p>
+            <a:pPr lvl="3"/>
+            <a:r>
+              <a:rPr lang="pl-PL"/>
+              <a:t>Czwarty poziom</a:t>
+            </a:r>
+          </a:p>
+          <a:p>
+            <a:pPr lvl="4"/>
+            <a:r>
+              <a:rPr lang="pl-PL"/>
+              <a:t>Piąty poziom</a:t>
+            </a:r>
+          </a:p>
+        </p:txBody>
+      </p:sp>
+      <p:sp>
+        <p:nvSpPr>
+          <p:cNvPr id="4" name="Symbol zastępczy zawartości 3">
+            <a:extLst>
+              <a:ext uri="{FF2B5EF4-FFF2-40B4-BE49-F238E27FC236}">
+                <a16:creationId xmlns:a16="http://schemas.microsoft.com/office/drawing/2014/main" id="{A17EB1EB-62B8-9514-B885-3942088B5040}"/>
+              </a:ext>
+            </a:extLst>
+          </p:cNvPr>
+          <p:cNvSpPr>
+            <a:spLocks noGrp="1"/>
+          </p:cNvSpPr>
+          <p:nvPr>
+            <p:ph sz="half" idx="2"/>
+          </p:nvPr>
+        </p:nvSpPr>
+        <p:spPr>
+          <a:xfrm>
+            <a:off x="6172200" y="1825625"/>
+            <a:ext cx="5181600" cy="4351338"/>
+          </a:xfrm>
+        </p:spPr>
+        <p:txBody>
+          <a:bodyPr/>
+          <a:lstStyle/>
+          <a:p>
+            <a:pPr lvl="0"/>
+            <a:r>
+              <a:rPr lang="pl-PL"/>
+              <a:t>Kliknij, aby edytować style wzorca tekstu</a:t>
+            </a:r>
+          </a:p>
+          <a:p>
+            <a:pPr lvl="1"/>
+            <a:r>
+              <a:rPr lang="pl-PL"/>
+              <a:t>Drugi poziom</a:t>
+            </a:r>
+          </a:p>
+          <a:p>
+            <a:pPr lvl="2"/>
+            <a:r>
+              <a:rPr lang="pl-PL"/>
+              <a:t>Trzeci poziom</a:t>
+            </a:r>
+          </a:p>
+          <a:p>
+            <a:pPr lvl="3"/>
+            <a:r>
+              <a:rPr lang="pl-PL"/>
+              <a:t>Czwarty poziom</a:t>
+            </a:r>
+          </a:p>
+          <a:p>
+            <a:pPr lvl="4"/>
+            <a:r>
+              <a:rPr lang="pl-PL"/>
+              <a:t>Piąty poziom</a:t>
+            </a:r>
+          </a:p>
+        </p:txBody>
+      </p:sp>
+      <p:sp>
+        <p:nvSpPr>
+          <p:cNvPr id="5" name="Symbol zastępczy daty 4">
+            <a:extLst>
+              <a:ext uri="{FF2B5EF4-FFF2-40B4-BE49-F238E27FC236}">
+                <a16:creationId xmlns:a16="http://schemas.microsoft.com/office/drawing/2014/main" id="{C04DC51F-48EA-CE52-9BA5-258C9B2D2A24}"/>
+              </a:ext>
+            </a:extLst>
+          </p:cNvPr>
+          <p:cNvSpPr>
+            <a:spLocks noGrp="1"/>
+          </p:cNvSpPr>
+          <p:nvPr>
+            <p:ph type="dt" sz="half" idx="10"/>
+          </p:nvPr>
+        </p:nvSpPr>
+        <p:spPr/>
+        <p:txBody>
+          <a:bodyPr/>
+          <a:lstStyle/>
+          <a:p>
+            <a:fld id="{E180F3EB-CED7-43F4-9E23-4BCBF0141284}" type="datetimeFigureOut">
+              <a:rPr lang="pl-PL" smtClean="0"/>
+              <a:t>26.03.2026</a:t>
+            </a:fld>
+            <a:endParaRPr lang="pl-PL"/>
+          </a:p>
+        </p:txBody>
+      </p:sp>
+      <p:sp>
+        <p:nvSpPr>
+          <p:cNvPr id="6" name="Symbol zastępczy stopki 5">
+            <a:extLst>
+              <a:ext uri="{FF2B5EF4-FFF2-40B4-BE49-F238E27FC236}">
+                <a16:creationId xmlns:a16="http://schemas.microsoft.com/office/drawing/2014/main" id="{AEF50050-A12F-26E1-FDFD-AA6B36B3C341}"/>
+              </a:ext>
+            </a:extLst>
+          </p:cNvPr>
+          <p:cNvSpPr>
+            <a:spLocks noGrp="1"/>
+          </p:cNvSpPr>
+          <p:nvPr>
+            <p:ph type="ftr" sz="quarter" idx="11"/>
+          </p:nvPr>
+        </p:nvSpPr>
+        <p:spPr/>
+        <p:txBody>
+          <a:bodyPr/>
+          <a:lstStyle/>
+          <a:p>
+            <a:endParaRPr lang="pl-PL"/>
+          </a:p>
+        </p:txBody>
+      </p:sp>
+      <p:sp>
+        <p:nvSpPr>
+          <p:cNvPr id="7" name="Symbol zastępczy numeru slajdu 6">
+            <a:extLst>
+              <a:ext uri="{FF2B5EF4-FFF2-40B4-BE49-F238E27FC236}">
+                <a16:creationId xmlns:a16="http://schemas.microsoft.com/office/drawing/2014/main" id="{3030B17C-1D65-42FE-492E-CB202AA1DBEF}"/>
+              </a:ext>
+            </a:extLst>
+          </p:cNvPr>
+          <p:cNvSpPr>
+            <a:spLocks noGrp="1"/>
+          </p:cNvSpPr>
+          <p:nvPr>
+            <p:ph type="sldNum" sz="quarter" idx="12"/>
+          </p:nvPr>
+        </p:nvSpPr>
+        <p:spPr/>
+        <p:txBody>
+          <a:bodyPr/>
+          <a:lstStyle/>
+          <a:p>
+            <a:fld id="{A08A34F4-C42B-42CF-851B-67FCC4F4CC97}" type="slidenum">
+              <a:rPr lang="pl-PL" smtClean="0"/>
+              <a:t>‹#›</a:t>
+            </a:fld>
+            <a:endParaRPr lang="pl-PL"/>
+          </a:p>
+        </p:txBody>
+      </p:sp>
+    </p:spTree>
+    <p:extLst>
+      <p:ext uri="{BB962C8B-B14F-4D97-AF65-F5344CB8AC3E}">
+        <p14:creationId xmlns:p14="http://schemas.microsoft.com/office/powerpoint/2010/main" val="697299095"/>
+      </p:ext>
+    </p:extLst>
+  </p:cSld>
+  <p:clrMapOvr>
+    <a:masterClrMapping/>
+  </p:clrMapOvr>
+</p:sldLayout>
+</file>
+
+<file path=ppt/slideLayouts/slideLayout17.xml><?xml version="1.0" encoding="utf-8"?>
+<p:sldLayout xmlns:a="http://schemas.openxmlformats.org/drawingml/2006/main" xmlns:r="http://schemas.openxmlformats.org/officeDocument/2006/relationships" xmlns:p="http://schemas.openxmlformats.org/presentationml/2006/main" type="twoTxTwoObj" preserve="1">
+  <p:cSld name="Porównanie">
+    <p:spTree>
+      <p:nvGrpSpPr>
+        <p:cNvPr id="1" name=""/>
+        <p:cNvGrpSpPr/>
+        <p:nvPr/>
+      </p:nvGrpSpPr>
+      <p:grpSpPr>
+        <a:xfrm>
+          <a:off x="0" y="0"/>
+          <a:ext cx="0" cy="0"/>
+          <a:chOff x="0" y="0"/>
+          <a:chExt cx="0" cy="0"/>
+        </a:xfrm>
+      </p:grpSpPr>
+      <p:sp>
+        <p:nvSpPr>
+          <p:cNvPr id="2" name="Tytuł 1">
+            <a:extLst>
+              <a:ext uri="{FF2B5EF4-FFF2-40B4-BE49-F238E27FC236}">
+                <a16:creationId xmlns:a16="http://schemas.microsoft.com/office/drawing/2014/main" id="{611657D2-4080-4B3E-1EF2-74D7499F08B2}"/>
+              </a:ext>
+            </a:extLst>
+          </p:cNvPr>
+          <p:cNvSpPr>
+            <a:spLocks noGrp="1"/>
+          </p:cNvSpPr>
+          <p:nvPr>
+            <p:ph type="title"/>
+          </p:nvPr>
+        </p:nvSpPr>
+        <p:spPr>
+          <a:xfrm>
+            <a:off x="839788" y="365125"/>
+            <a:ext cx="10515600" cy="1325563"/>
+          </a:xfrm>
+        </p:spPr>
+        <p:txBody>
+          <a:bodyPr/>
+          <a:lstStyle/>
+          <a:p>
+            <a:r>
+              <a:rPr lang="pl-PL"/>
+              <a:t>Kliknij, aby edytować styl</a:t>
+            </a:r>
+          </a:p>
+        </p:txBody>
+      </p:sp>
+      <p:sp>
+        <p:nvSpPr>
+          <p:cNvPr id="3" name="Symbol zastępczy tekstu 2">
+            <a:extLst>
+              <a:ext uri="{FF2B5EF4-FFF2-40B4-BE49-F238E27FC236}">
+                <a16:creationId xmlns:a16="http://schemas.microsoft.com/office/drawing/2014/main" id="{B5D422CB-E4D1-4D50-02F5-A67A0E48B840}"/>
+              </a:ext>
+            </a:extLst>
+          </p:cNvPr>
+          <p:cNvSpPr>
+            <a:spLocks noGrp="1"/>
+          </p:cNvSpPr>
+          <p:nvPr>
+            <p:ph type="body" idx="1"/>
+          </p:nvPr>
+        </p:nvSpPr>
+        <p:spPr>
+          <a:xfrm>
+            <a:off x="839788" y="1681163"/>
+            <a:ext cx="5157787" cy="823912"/>
+          </a:xfrm>
+        </p:spPr>
+        <p:txBody>
+          <a:bodyPr anchor="b"/>
+          <a:lstStyle>
+            <a:lvl1pPr marL="0" indent="0">
+              <a:buNone/>
+              <a:defRPr sz="2400" b="1"/>
+            </a:lvl1pPr>
+            <a:lvl2pPr marL="457200" indent="0">
+              <a:buNone/>
+              <a:defRPr sz="2000" b="1"/>
+            </a:lvl2pPr>
+            <a:lvl3pPr marL="914400" indent="0">
+              <a:buNone/>
+              <a:defRPr sz="1800" b="1"/>
+            </a:lvl3pPr>
+            <a:lvl4pPr marL="1371600" indent="0">
+              <a:buNone/>
+              <a:defRPr sz="1600" b="1"/>
+            </a:lvl4pPr>
+            <a:lvl5pPr marL="1828800" indent="0">
+              <a:buNone/>
+              <a:defRPr sz="1600" b="1"/>
+            </a:lvl5pPr>
+            <a:lvl6pPr marL="2286000" indent="0">
+              <a:buNone/>
+              <a:defRPr sz="1600" b="1"/>
+            </a:lvl6pPr>
+            <a:lvl7pPr marL="2743200" indent="0">
+              <a:buNone/>
+              <a:defRPr sz="1600" b="1"/>
+            </a:lvl7pPr>
+            <a:lvl8pPr marL="3200400" indent="0">
+              <a:buNone/>
+              <a:defRPr sz="1600" b="1"/>
+            </a:lvl8pPr>
+            <a:lvl9pPr marL="3657600" indent="0">
+              <a:buNone/>
+              <a:defRPr sz="1600" b="1"/>
+            </a:lvl9pPr>
+          </a:lstStyle>
+          <a:p>
+            <a:pPr lvl="0"/>
+            <a:r>
+              <a:rPr lang="pl-PL"/>
+              <a:t>Kliknij, aby edytować style wzorca tekstu</a:t>
+            </a:r>
+          </a:p>
+        </p:txBody>
+      </p:sp>
+      <p:sp>
+        <p:nvSpPr>
+          <p:cNvPr id="4" name="Symbol zastępczy zawartości 3">
+            <a:extLst>
+              <a:ext uri="{FF2B5EF4-FFF2-40B4-BE49-F238E27FC236}">
+                <a16:creationId xmlns:a16="http://schemas.microsoft.com/office/drawing/2014/main" id="{DCEB2E59-D55A-3A6E-B6EE-11D4CFF3DE71}"/>
+              </a:ext>
+            </a:extLst>
+          </p:cNvPr>
+          <p:cNvSpPr>
+            <a:spLocks noGrp="1"/>
+          </p:cNvSpPr>
+          <p:nvPr>
+            <p:ph sz="half" idx="2"/>
+          </p:nvPr>
+        </p:nvSpPr>
+        <p:spPr>
+          <a:xfrm>
+            <a:off x="839788" y="2505075"/>
+            <a:ext cx="5157787" cy="3684588"/>
+          </a:xfrm>
+        </p:spPr>
+        <p:txBody>
+          <a:bodyPr/>
+          <a:lstStyle/>
+          <a:p>
+            <a:pPr lvl="0"/>
+            <a:r>
+              <a:rPr lang="pl-PL"/>
+              <a:t>Kliknij, aby edytować style wzorca tekstu</a:t>
+            </a:r>
+          </a:p>
+          <a:p>
+            <a:pPr lvl="1"/>
+            <a:r>
+              <a:rPr lang="pl-PL"/>
+              <a:t>Drugi poziom</a:t>
+            </a:r>
+          </a:p>
+          <a:p>
+            <a:pPr lvl="2"/>
+            <a:r>
+              <a:rPr lang="pl-PL"/>
+              <a:t>Trzeci poziom</a:t>
+            </a:r>
+          </a:p>
+          <a:p>
+            <a:pPr lvl="3"/>
+            <a:r>
+              <a:rPr lang="pl-PL"/>
+              <a:t>Czwarty poziom</a:t>
+            </a:r>
+          </a:p>
+          <a:p>
+            <a:pPr lvl="4"/>
+            <a:r>
+              <a:rPr lang="pl-PL"/>
+              <a:t>Piąty poziom</a:t>
+            </a:r>
+          </a:p>
+        </p:txBody>
+      </p:sp>
+      <p:sp>
+        <p:nvSpPr>
+          <p:cNvPr id="5" name="Symbol zastępczy tekstu 4">
+            <a:extLst>
+              <a:ext uri="{FF2B5EF4-FFF2-40B4-BE49-F238E27FC236}">
+                <a16:creationId xmlns:a16="http://schemas.microsoft.com/office/drawing/2014/main" id="{DD8BB198-5066-D8D7-A2AD-69A1E37BFF40}"/>
+              </a:ext>
+            </a:extLst>
+          </p:cNvPr>
+          <p:cNvSpPr>
+            <a:spLocks noGrp="1"/>
+          </p:cNvSpPr>
+          <p:nvPr>
+            <p:ph type="body" sz="quarter" idx="3"/>
+          </p:nvPr>
+        </p:nvSpPr>
+        <p:spPr>
+          <a:xfrm>
+            <a:off x="6172200" y="1681163"/>
+            <a:ext cx="5183188" cy="823912"/>
+          </a:xfrm>
+        </p:spPr>
+        <p:txBody>
+          <a:bodyPr anchor="b"/>
+          <a:lstStyle>
+            <a:lvl1pPr marL="0" indent="0">
+              <a:buNone/>
+              <a:defRPr sz="2400" b="1"/>
+            </a:lvl1pPr>
+            <a:lvl2pPr marL="457200" indent="0">
+              <a:buNone/>
+              <a:defRPr sz="2000" b="1"/>
+            </a:lvl2pPr>
+            <a:lvl3pPr marL="914400" indent="0">
+              <a:buNone/>
+              <a:defRPr sz="1800" b="1"/>
+            </a:lvl3pPr>
+            <a:lvl4pPr marL="1371600" indent="0">
+              <a:buNone/>
+              <a:defRPr sz="1600" b="1"/>
+            </a:lvl4pPr>
+            <a:lvl5pPr marL="1828800" indent="0">
+              <a:buNone/>
+              <a:defRPr sz="1600" b="1"/>
+            </a:lvl5pPr>
+            <a:lvl6pPr marL="2286000" indent="0">
+              <a:buNone/>
+              <a:defRPr sz="1600" b="1"/>
+            </a:lvl6pPr>
+            <a:lvl7pPr marL="2743200" indent="0">
+              <a:buNone/>
+              <a:defRPr sz="1600" b="1"/>
+            </a:lvl7pPr>
+            <a:lvl8pPr marL="3200400" indent="0">
+              <a:buNone/>
+              <a:defRPr sz="1600" b="1"/>
+            </a:lvl8pPr>
+            <a:lvl9pPr marL="3657600" indent="0">
+              <a:buNone/>
+              <a:defRPr sz="1600" b="1"/>
+            </a:lvl9pPr>
+          </a:lstStyle>
+          <a:p>
+            <a:pPr lvl="0"/>
+            <a:r>
+              <a:rPr lang="pl-PL"/>
+              <a:t>Kliknij, aby edytować style wzorca tekstu</a:t>
+            </a:r>
+          </a:p>
+        </p:txBody>
+      </p:sp>
+      <p:sp>
+        <p:nvSpPr>
+          <p:cNvPr id="6" name="Symbol zastępczy zawartości 5">
+            <a:extLst>
+              <a:ext uri="{FF2B5EF4-FFF2-40B4-BE49-F238E27FC236}">
+                <a16:creationId xmlns:a16="http://schemas.microsoft.com/office/drawing/2014/main" id="{208F5362-E758-FE95-C074-62A957A6F2C4}"/>
+              </a:ext>
+            </a:extLst>
+          </p:cNvPr>
+          <p:cNvSpPr>
+            <a:spLocks noGrp="1"/>
+          </p:cNvSpPr>
+          <p:nvPr>
+            <p:ph sz="quarter" idx="4"/>
+          </p:nvPr>
+        </p:nvSpPr>
+        <p:spPr>
+          <a:xfrm>
+            <a:off x="6172200" y="2505075"/>
+            <a:ext cx="5183188" cy="3684588"/>
+          </a:xfrm>
+        </p:spPr>
+        <p:txBody>
+          <a:bodyPr/>
+          <a:lstStyle/>
+          <a:p>
+            <a:pPr lvl="0"/>
+            <a:r>
+              <a:rPr lang="pl-PL"/>
+              <a:t>Kliknij, aby edytować style wzorca tekstu</a:t>
+            </a:r>
+          </a:p>
+          <a:p>
+            <a:pPr lvl="1"/>
+            <a:r>
+              <a:rPr lang="pl-PL"/>
+              <a:t>Drugi poziom</a:t>
+            </a:r>
+          </a:p>
+          <a:p>
+            <a:pPr lvl="2"/>
+            <a:r>
+              <a:rPr lang="pl-PL"/>
+              <a:t>Trzeci poziom</a:t>
+            </a:r>
+          </a:p>
+          <a:p>
+            <a:pPr lvl="3"/>
+            <a:r>
+              <a:rPr lang="pl-PL"/>
+              <a:t>Czwarty poziom</a:t>
+            </a:r>
+          </a:p>
+          <a:p>
+            <a:pPr lvl="4"/>
+            <a:r>
+              <a:rPr lang="pl-PL"/>
+              <a:t>Piąty poziom</a:t>
+            </a:r>
+          </a:p>
+        </p:txBody>
+      </p:sp>
+      <p:sp>
+        <p:nvSpPr>
+          <p:cNvPr id="7" name="Symbol zastępczy daty 6">
+            <a:extLst>
+              <a:ext uri="{FF2B5EF4-FFF2-40B4-BE49-F238E27FC236}">
+                <a16:creationId xmlns:a16="http://schemas.microsoft.com/office/drawing/2014/main" id="{A201B384-A684-AA0E-8EE0-26CA7816CC78}"/>
+              </a:ext>
+            </a:extLst>
+          </p:cNvPr>
+          <p:cNvSpPr>
+            <a:spLocks noGrp="1"/>
+          </p:cNvSpPr>
+          <p:nvPr>
+            <p:ph type="dt" sz="half" idx="10"/>
+          </p:nvPr>
+        </p:nvSpPr>
+        <p:spPr/>
+        <p:txBody>
+          <a:bodyPr/>
+          <a:lstStyle/>
+          <a:p>
+            <a:fld id="{E180F3EB-CED7-43F4-9E23-4BCBF0141284}" type="datetimeFigureOut">
+              <a:rPr lang="pl-PL" smtClean="0"/>
+              <a:t>26.03.2026</a:t>
+            </a:fld>
+            <a:endParaRPr lang="pl-PL"/>
+          </a:p>
+        </p:txBody>
+      </p:sp>
+      <p:sp>
+        <p:nvSpPr>
+          <p:cNvPr id="8" name="Symbol zastępczy stopki 7">
+            <a:extLst>
+              <a:ext uri="{FF2B5EF4-FFF2-40B4-BE49-F238E27FC236}">
+                <a16:creationId xmlns:a16="http://schemas.microsoft.com/office/drawing/2014/main" id="{C2C11059-3B2D-18D3-C999-94C517BE4B17}"/>
+              </a:ext>
+            </a:extLst>
+          </p:cNvPr>
+          <p:cNvSpPr>
+            <a:spLocks noGrp="1"/>
+          </p:cNvSpPr>
+          <p:nvPr>
+            <p:ph type="ftr" sz="quarter" idx="11"/>
+          </p:nvPr>
+        </p:nvSpPr>
+        <p:spPr/>
+        <p:txBody>
+          <a:bodyPr/>
+          <a:lstStyle/>
+          <a:p>
+            <a:endParaRPr lang="pl-PL"/>
+          </a:p>
+        </p:txBody>
+      </p:sp>
+      <p:sp>
+        <p:nvSpPr>
+          <p:cNvPr id="9" name="Symbol zastępczy numeru slajdu 8">
+            <a:extLst>
+              <a:ext uri="{FF2B5EF4-FFF2-40B4-BE49-F238E27FC236}">
+                <a16:creationId xmlns:a16="http://schemas.microsoft.com/office/drawing/2014/main" id="{FFF84CFF-69CD-3949-23AD-D9B2AB50EF8B}"/>
+              </a:ext>
+            </a:extLst>
+          </p:cNvPr>
+          <p:cNvSpPr>
+            <a:spLocks noGrp="1"/>
+          </p:cNvSpPr>
+          <p:nvPr>
+            <p:ph type="sldNum" sz="quarter" idx="12"/>
+          </p:nvPr>
+        </p:nvSpPr>
+        <p:spPr/>
+        <p:txBody>
+          <a:bodyPr/>
+          <a:lstStyle/>
+          <a:p>
+            <a:fld id="{A08A34F4-C42B-42CF-851B-67FCC4F4CC97}" type="slidenum">
+              <a:rPr lang="pl-PL" smtClean="0"/>
+              <a:t>‹#›</a:t>
+            </a:fld>
+            <a:endParaRPr lang="pl-PL"/>
+          </a:p>
+        </p:txBody>
+      </p:sp>
+    </p:spTree>
+    <p:extLst>
+      <p:ext uri="{BB962C8B-B14F-4D97-AF65-F5344CB8AC3E}">
+        <p14:creationId xmlns:p14="http://schemas.microsoft.com/office/powerpoint/2010/main" val="2352933464"/>
+      </p:ext>
+    </p:extLst>
+  </p:cSld>
+  <p:clrMapOvr>
+    <a:masterClrMapping/>
+  </p:clrMapOvr>
+</p:sldLayout>
+</file>
+
+<file path=ppt/slideLayouts/slideLayout18.xml><?xml version="1.0" encoding="utf-8"?>
+<p:sldLayout xmlns:a="http://schemas.openxmlformats.org/drawingml/2006/main" xmlns:r="http://schemas.openxmlformats.org/officeDocument/2006/relationships" xmlns:p="http://schemas.openxmlformats.org/presentationml/2006/main" type="titleOnly" preserve="1">
+  <p:cSld name="Tylko tytuł">
+    <p:spTree>
+      <p:nvGrpSpPr>
+        <p:cNvPr id="1" name=""/>
+        <p:cNvGrpSpPr/>
+        <p:nvPr/>
+      </p:nvGrpSpPr>
+      <p:grpSpPr>
+        <a:xfrm>
+          <a:off x="0" y="0"/>
+          <a:ext cx="0" cy="0"/>
+          <a:chOff x="0" y="0"/>
+          <a:chExt cx="0" cy="0"/>
+        </a:xfrm>
+      </p:grpSpPr>
+      <p:sp>
+        <p:nvSpPr>
+          <p:cNvPr id="2" name="Tytuł 1">
+            <a:extLst>
+              <a:ext uri="{FF2B5EF4-FFF2-40B4-BE49-F238E27FC236}">
+                <a16:creationId xmlns:a16="http://schemas.microsoft.com/office/drawing/2014/main" id="{627A8749-5827-2F39-3ED3-04A98F4D59CB}"/>
+              </a:ext>
+            </a:extLst>
+          </p:cNvPr>
+          <p:cNvSpPr>
+            <a:spLocks noGrp="1"/>
+          </p:cNvSpPr>
+          <p:nvPr>
+            <p:ph type="title"/>
+          </p:nvPr>
+        </p:nvSpPr>
+        <p:spPr/>
+        <p:txBody>
+          <a:bodyPr/>
+          <a:lstStyle/>
+          <a:p>
+            <a:r>
+              <a:rPr lang="pl-PL"/>
+              <a:t>Kliknij, aby edytować styl</a:t>
+            </a:r>
+          </a:p>
+        </p:txBody>
+      </p:sp>
+      <p:sp>
+        <p:nvSpPr>
+          <p:cNvPr id="3" name="Symbol zastępczy daty 2">
+            <a:extLst>
+              <a:ext uri="{FF2B5EF4-FFF2-40B4-BE49-F238E27FC236}">
+                <a16:creationId xmlns:a16="http://schemas.microsoft.com/office/drawing/2014/main" id="{E2578643-4A46-2269-6104-85B3FC945D02}"/>
+              </a:ext>
+            </a:extLst>
+          </p:cNvPr>
+          <p:cNvSpPr>
+            <a:spLocks noGrp="1"/>
+          </p:cNvSpPr>
+          <p:nvPr>
+            <p:ph type="dt" sz="half" idx="10"/>
+          </p:nvPr>
+        </p:nvSpPr>
+        <p:spPr/>
+        <p:txBody>
+          <a:bodyPr/>
+          <a:lstStyle/>
+          <a:p>
+            <a:fld id="{E180F3EB-CED7-43F4-9E23-4BCBF0141284}" type="datetimeFigureOut">
+              <a:rPr lang="pl-PL" smtClean="0"/>
+              <a:t>26.03.2026</a:t>
+            </a:fld>
+            <a:endParaRPr lang="pl-PL"/>
+          </a:p>
+        </p:txBody>
+      </p:sp>
+      <p:sp>
+        <p:nvSpPr>
+          <p:cNvPr id="4" name="Symbol zastępczy stopki 3">
+            <a:extLst>
+              <a:ext uri="{FF2B5EF4-FFF2-40B4-BE49-F238E27FC236}">
+                <a16:creationId xmlns:a16="http://schemas.microsoft.com/office/drawing/2014/main" id="{E976E1CD-C45B-F72E-57B9-6A5E01499191}"/>
+              </a:ext>
+            </a:extLst>
+          </p:cNvPr>
+          <p:cNvSpPr>
+            <a:spLocks noGrp="1"/>
+          </p:cNvSpPr>
+          <p:nvPr>
+            <p:ph type="ftr" sz="quarter" idx="11"/>
+          </p:nvPr>
+        </p:nvSpPr>
+        <p:spPr/>
+        <p:txBody>
+          <a:bodyPr/>
+          <a:lstStyle/>
+          <a:p>
+            <a:endParaRPr lang="pl-PL"/>
+          </a:p>
+        </p:txBody>
+      </p:sp>
+      <p:sp>
+        <p:nvSpPr>
+          <p:cNvPr id="5" name="Symbol zastępczy numeru slajdu 4">
+            <a:extLst>
+              <a:ext uri="{FF2B5EF4-FFF2-40B4-BE49-F238E27FC236}">
+                <a16:creationId xmlns:a16="http://schemas.microsoft.com/office/drawing/2014/main" id="{9C4CEE1E-BB4C-DAC6-3986-48F25BE65A37}"/>
+              </a:ext>
+            </a:extLst>
+          </p:cNvPr>
+          <p:cNvSpPr>
+            <a:spLocks noGrp="1"/>
+          </p:cNvSpPr>
+          <p:nvPr>
+            <p:ph type="sldNum" sz="quarter" idx="12"/>
+          </p:nvPr>
+        </p:nvSpPr>
+        <p:spPr/>
+        <p:txBody>
+          <a:bodyPr/>
+          <a:lstStyle/>
+          <a:p>
+            <a:fld id="{A08A34F4-C42B-42CF-851B-67FCC4F4CC97}" type="slidenum">
+              <a:rPr lang="pl-PL" smtClean="0"/>
+              <a:t>‹#›</a:t>
+            </a:fld>
+            <a:endParaRPr lang="pl-PL"/>
+          </a:p>
+        </p:txBody>
+      </p:sp>
+    </p:spTree>
+    <p:extLst>
+      <p:ext uri="{BB962C8B-B14F-4D97-AF65-F5344CB8AC3E}">
+        <p14:creationId xmlns:p14="http://schemas.microsoft.com/office/powerpoint/2010/main" val="842059477"/>
+      </p:ext>
+    </p:extLst>
+  </p:cSld>
+  <p:clrMapOvr>
+    <a:masterClrMapping/>
+  </p:clrMapOvr>
+</p:sldLayout>
+</file>
+
+<file path=ppt/slideLayouts/slideLayout19.xml><?xml version="1.0" encoding="utf-8"?>
+<p:sldLayout xmlns:a="http://schemas.openxmlformats.org/drawingml/2006/main" xmlns:r="http://schemas.openxmlformats.org/officeDocument/2006/relationships" xmlns:p="http://schemas.openxmlformats.org/presentationml/2006/main" type="blank" preserve="1">
+  <p:cSld name="Pusty">
+    <p:spTree>
+      <p:nvGrpSpPr>
+        <p:cNvPr id="1" name=""/>
+        <p:cNvGrpSpPr/>
+        <p:nvPr/>
+      </p:nvGrpSpPr>
+      <p:grpSpPr>
+        <a:xfrm>
+          <a:off x="0" y="0"/>
+          <a:ext cx="0" cy="0"/>
+          <a:chOff x="0" y="0"/>
+          <a:chExt cx="0" cy="0"/>
+        </a:xfrm>
+      </p:grpSpPr>
+      <p:sp>
+        <p:nvSpPr>
+          <p:cNvPr id="2" name="Symbol zastępczy daty 1">
+            <a:extLst>
+              <a:ext uri="{FF2B5EF4-FFF2-40B4-BE49-F238E27FC236}">
+                <a16:creationId xmlns:a16="http://schemas.microsoft.com/office/drawing/2014/main" id="{5255A762-6FA3-02F4-AFF1-615F1B667A29}"/>
+              </a:ext>
+            </a:extLst>
+          </p:cNvPr>
+          <p:cNvSpPr>
+            <a:spLocks noGrp="1"/>
+          </p:cNvSpPr>
+          <p:nvPr>
+            <p:ph type="dt" sz="half" idx="10"/>
+          </p:nvPr>
+        </p:nvSpPr>
+        <p:spPr/>
+        <p:txBody>
+          <a:bodyPr/>
+          <a:lstStyle/>
+          <a:p>
+            <a:fld id="{E180F3EB-CED7-43F4-9E23-4BCBF0141284}" type="datetimeFigureOut">
+              <a:rPr lang="pl-PL" smtClean="0"/>
+              <a:t>26.03.2026</a:t>
+            </a:fld>
+            <a:endParaRPr lang="pl-PL"/>
+          </a:p>
+        </p:txBody>
+      </p:sp>
+      <p:sp>
+        <p:nvSpPr>
+          <p:cNvPr id="3" name="Symbol zastępczy stopki 2">
+            <a:extLst>
+              <a:ext uri="{FF2B5EF4-FFF2-40B4-BE49-F238E27FC236}">
+                <a16:creationId xmlns:a16="http://schemas.microsoft.com/office/drawing/2014/main" id="{E220AE2B-81A5-D982-BF4C-C6354A808352}"/>
+              </a:ext>
+            </a:extLst>
+          </p:cNvPr>
+          <p:cNvSpPr>
+            <a:spLocks noGrp="1"/>
+          </p:cNvSpPr>
+          <p:nvPr>
+            <p:ph type="ftr" sz="quarter" idx="11"/>
+          </p:nvPr>
+        </p:nvSpPr>
+        <p:spPr/>
+        <p:txBody>
+          <a:bodyPr/>
+          <a:lstStyle/>
+          <a:p>
+            <a:endParaRPr lang="pl-PL"/>
+          </a:p>
+        </p:txBody>
+      </p:sp>
+      <p:sp>
+        <p:nvSpPr>
+          <p:cNvPr id="4" name="Symbol zastępczy numeru slajdu 3">
+            <a:extLst>
+              <a:ext uri="{FF2B5EF4-FFF2-40B4-BE49-F238E27FC236}">
+                <a16:creationId xmlns:a16="http://schemas.microsoft.com/office/drawing/2014/main" id="{D5A943AD-0208-2AD6-F6B9-094470636D1A}"/>
+              </a:ext>
+            </a:extLst>
+          </p:cNvPr>
+          <p:cNvSpPr>
+            <a:spLocks noGrp="1"/>
+          </p:cNvSpPr>
+          <p:nvPr>
+            <p:ph type="sldNum" sz="quarter" idx="12"/>
+          </p:nvPr>
+        </p:nvSpPr>
+        <p:spPr/>
+        <p:txBody>
+          <a:bodyPr/>
+          <a:lstStyle/>
+          <a:p>
+            <a:fld id="{A08A34F4-C42B-42CF-851B-67FCC4F4CC97}" type="slidenum">
+              <a:rPr lang="pl-PL" smtClean="0"/>
+              <a:t>‹#›</a:t>
+            </a:fld>
+            <a:endParaRPr lang="pl-PL"/>
+          </a:p>
+        </p:txBody>
+      </p:sp>
+    </p:spTree>
+    <p:extLst>
+      <p:ext uri="{BB962C8B-B14F-4D97-AF65-F5344CB8AC3E}">
+        <p14:creationId xmlns:p14="http://schemas.microsoft.com/office/powerpoint/2010/main" val="789541437"/>
+      </p:ext>
+    </p:extLst>
+  </p:cSld>
+  <p:clrMapOvr>
+    <a:masterClrMapping/>
+  </p:clrMapOvr>
+</p:sldLayout>
+</file>
+
 <file path=ppt/slideLayouts/slideLayout2.xml><?xml version="1.0" encoding="utf-8"?>
 <p:sldLayout xmlns:a="http://schemas.openxmlformats.org/drawingml/2006/main" xmlns:r="http://schemas.openxmlformats.org/officeDocument/2006/relationships" xmlns:p="http://schemas.openxmlformats.org/presentationml/2006/main" type="obj" preserve="1">
   <p:cSld name="Tytuł i zawartość">
@@ -1125,6 +2761,1011 @@
     <p:extLst>
       <p:ext uri="{BB962C8B-B14F-4D97-AF65-F5344CB8AC3E}">
         <p14:creationId xmlns:p14="http://schemas.microsoft.com/office/powerpoint/2010/main" val="1656485139"/>
+      </p:ext>
+    </p:extLst>
+  </p:cSld>
+  <p:clrMapOvr>
+    <a:masterClrMapping/>
+  </p:clrMapOvr>
+</p:sldLayout>
+</file>
+
+<file path=ppt/slideLayouts/slideLayout20.xml><?xml version="1.0" encoding="utf-8"?>
+<p:sldLayout xmlns:a="http://schemas.openxmlformats.org/drawingml/2006/main" xmlns:r="http://schemas.openxmlformats.org/officeDocument/2006/relationships" xmlns:p="http://schemas.openxmlformats.org/presentationml/2006/main" type="objTx" preserve="1">
+  <p:cSld name="Zawartość z podpisem">
+    <p:spTree>
+      <p:nvGrpSpPr>
+        <p:cNvPr id="1" name=""/>
+        <p:cNvGrpSpPr/>
+        <p:nvPr/>
+      </p:nvGrpSpPr>
+      <p:grpSpPr>
+        <a:xfrm>
+          <a:off x="0" y="0"/>
+          <a:ext cx="0" cy="0"/>
+          <a:chOff x="0" y="0"/>
+          <a:chExt cx="0" cy="0"/>
+        </a:xfrm>
+      </p:grpSpPr>
+      <p:sp>
+        <p:nvSpPr>
+          <p:cNvPr id="2" name="Tytuł 1">
+            <a:extLst>
+              <a:ext uri="{FF2B5EF4-FFF2-40B4-BE49-F238E27FC236}">
+                <a16:creationId xmlns:a16="http://schemas.microsoft.com/office/drawing/2014/main" id="{019EE13C-51FF-21B1-7CCA-50AEACA8CE4F}"/>
+              </a:ext>
+            </a:extLst>
+          </p:cNvPr>
+          <p:cNvSpPr>
+            <a:spLocks noGrp="1"/>
+          </p:cNvSpPr>
+          <p:nvPr>
+            <p:ph type="title"/>
+          </p:nvPr>
+        </p:nvSpPr>
+        <p:spPr>
+          <a:xfrm>
+            <a:off x="839788" y="457200"/>
+            <a:ext cx="3932237" cy="1600200"/>
+          </a:xfrm>
+        </p:spPr>
+        <p:txBody>
+          <a:bodyPr anchor="b"/>
+          <a:lstStyle>
+            <a:lvl1pPr>
+              <a:defRPr sz="3200"/>
+            </a:lvl1pPr>
+          </a:lstStyle>
+          <a:p>
+            <a:r>
+              <a:rPr lang="pl-PL"/>
+              <a:t>Kliknij, aby edytować styl</a:t>
+            </a:r>
+          </a:p>
+        </p:txBody>
+      </p:sp>
+      <p:sp>
+        <p:nvSpPr>
+          <p:cNvPr id="3" name="Symbol zastępczy zawartości 2">
+            <a:extLst>
+              <a:ext uri="{FF2B5EF4-FFF2-40B4-BE49-F238E27FC236}">
+                <a16:creationId xmlns:a16="http://schemas.microsoft.com/office/drawing/2014/main" id="{B5BBCCE3-9C5C-1F94-7019-EB130E2561CB}"/>
+              </a:ext>
+            </a:extLst>
+          </p:cNvPr>
+          <p:cNvSpPr>
+            <a:spLocks noGrp="1"/>
+          </p:cNvSpPr>
+          <p:nvPr>
+            <p:ph idx="1"/>
+          </p:nvPr>
+        </p:nvSpPr>
+        <p:spPr>
+          <a:xfrm>
+            <a:off x="5183188" y="987425"/>
+            <a:ext cx="6172200" cy="4873625"/>
+          </a:xfrm>
+        </p:spPr>
+        <p:txBody>
+          <a:bodyPr/>
+          <a:lstStyle>
+            <a:lvl1pPr>
+              <a:defRPr sz="3200"/>
+            </a:lvl1pPr>
+            <a:lvl2pPr>
+              <a:defRPr sz="2800"/>
+            </a:lvl2pPr>
+            <a:lvl3pPr>
+              <a:defRPr sz="2400"/>
+            </a:lvl3pPr>
+            <a:lvl4pPr>
+              <a:defRPr sz="2000"/>
+            </a:lvl4pPr>
+            <a:lvl5pPr>
+              <a:defRPr sz="2000"/>
+            </a:lvl5pPr>
+            <a:lvl6pPr>
+              <a:defRPr sz="2000"/>
+            </a:lvl6pPr>
+            <a:lvl7pPr>
+              <a:defRPr sz="2000"/>
+            </a:lvl7pPr>
+            <a:lvl8pPr>
+              <a:defRPr sz="2000"/>
+            </a:lvl8pPr>
+            <a:lvl9pPr>
+              <a:defRPr sz="2000"/>
+            </a:lvl9pPr>
+          </a:lstStyle>
+          <a:p>
+            <a:pPr lvl="0"/>
+            <a:r>
+              <a:rPr lang="pl-PL"/>
+              <a:t>Kliknij, aby edytować style wzorca tekstu</a:t>
+            </a:r>
+          </a:p>
+          <a:p>
+            <a:pPr lvl="1"/>
+            <a:r>
+              <a:rPr lang="pl-PL"/>
+              <a:t>Drugi poziom</a:t>
+            </a:r>
+          </a:p>
+          <a:p>
+            <a:pPr lvl="2"/>
+            <a:r>
+              <a:rPr lang="pl-PL"/>
+              <a:t>Trzeci poziom</a:t>
+            </a:r>
+          </a:p>
+          <a:p>
+            <a:pPr lvl="3"/>
+            <a:r>
+              <a:rPr lang="pl-PL"/>
+              <a:t>Czwarty poziom</a:t>
+            </a:r>
+          </a:p>
+          <a:p>
+            <a:pPr lvl="4"/>
+            <a:r>
+              <a:rPr lang="pl-PL"/>
+              <a:t>Piąty poziom</a:t>
+            </a:r>
+          </a:p>
+        </p:txBody>
+      </p:sp>
+      <p:sp>
+        <p:nvSpPr>
+          <p:cNvPr id="4" name="Symbol zastępczy tekstu 3">
+            <a:extLst>
+              <a:ext uri="{FF2B5EF4-FFF2-40B4-BE49-F238E27FC236}">
+                <a16:creationId xmlns:a16="http://schemas.microsoft.com/office/drawing/2014/main" id="{D77D2D8D-FD42-515D-444D-5F5FD698030D}"/>
+              </a:ext>
+            </a:extLst>
+          </p:cNvPr>
+          <p:cNvSpPr>
+            <a:spLocks noGrp="1"/>
+          </p:cNvSpPr>
+          <p:nvPr>
+            <p:ph type="body" sz="half" idx="2"/>
+          </p:nvPr>
+        </p:nvSpPr>
+        <p:spPr>
+          <a:xfrm>
+            <a:off x="839788" y="2057400"/>
+            <a:ext cx="3932237" cy="3811588"/>
+          </a:xfrm>
+        </p:spPr>
+        <p:txBody>
+          <a:bodyPr/>
+          <a:lstStyle>
+            <a:lvl1pPr marL="0" indent="0">
+              <a:buNone/>
+              <a:defRPr sz="1600"/>
+            </a:lvl1pPr>
+            <a:lvl2pPr marL="457200" indent="0">
+              <a:buNone/>
+              <a:defRPr sz="1400"/>
+            </a:lvl2pPr>
+            <a:lvl3pPr marL="914400" indent="0">
+              <a:buNone/>
+              <a:defRPr sz="1200"/>
+            </a:lvl3pPr>
+            <a:lvl4pPr marL="1371600" indent="0">
+              <a:buNone/>
+              <a:defRPr sz="1000"/>
+            </a:lvl4pPr>
+            <a:lvl5pPr marL="1828800" indent="0">
+              <a:buNone/>
+              <a:defRPr sz="1000"/>
+            </a:lvl5pPr>
+            <a:lvl6pPr marL="2286000" indent="0">
+              <a:buNone/>
+              <a:defRPr sz="1000"/>
+            </a:lvl6pPr>
+            <a:lvl7pPr marL="2743200" indent="0">
+              <a:buNone/>
+              <a:defRPr sz="1000"/>
+            </a:lvl7pPr>
+            <a:lvl8pPr marL="3200400" indent="0">
+              <a:buNone/>
+              <a:defRPr sz="1000"/>
+            </a:lvl8pPr>
+            <a:lvl9pPr marL="3657600" indent="0">
+              <a:buNone/>
+              <a:defRPr sz="1000"/>
+            </a:lvl9pPr>
+          </a:lstStyle>
+          <a:p>
+            <a:pPr lvl="0"/>
+            <a:r>
+              <a:rPr lang="pl-PL"/>
+              <a:t>Kliknij, aby edytować style wzorca tekstu</a:t>
+            </a:r>
+          </a:p>
+        </p:txBody>
+      </p:sp>
+      <p:sp>
+        <p:nvSpPr>
+          <p:cNvPr id="5" name="Symbol zastępczy daty 4">
+            <a:extLst>
+              <a:ext uri="{FF2B5EF4-FFF2-40B4-BE49-F238E27FC236}">
+                <a16:creationId xmlns:a16="http://schemas.microsoft.com/office/drawing/2014/main" id="{31264D7A-144B-C23A-6E29-1B168396E809}"/>
+              </a:ext>
+            </a:extLst>
+          </p:cNvPr>
+          <p:cNvSpPr>
+            <a:spLocks noGrp="1"/>
+          </p:cNvSpPr>
+          <p:nvPr>
+            <p:ph type="dt" sz="half" idx="10"/>
+          </p:nvPr>
+        </p:nvSpPr>
+        <p:spPr/>
+        <p:txBody>
+          <a:bodyPr/>
+          <a:lstStyle/>
+          <a:p>
+            <a:fld id="{E180F3EB-CED7-43F4-9E23-4BCBF0141284}" type="datetimeFigureOut">
+              <a:rPr lang="pl-PL" smtClean="0"/>
+              <a:t>26.03.2026</a:t>
+            </a:fld>
+            <a:endParaRPr lang="pl-PL"/>
+          </a:p>
+        </p:txBody>
+      </p:sp>
+      <p:sp>
+        <p:nvSpPr>
+          <p:cNvPr id="6" name="Symbol zastępczy stopki 5">
+            <a:extLst>
+              <a:ext uri="{FF2B5EF4-FFF2-40B4-BE49-F238E27FC236}">
+                <a16:creationId xmlns:a16="http://schemas.microsoft.com/office/drawing/2014/main" id="{5A2DD9A9-8DDE-929F-91A0-5E1C28BA3D3F}"/>
+              </a:ext>
+            </a:extLst>
+          </p:cNvPr>
+          <p:cNvSpPr>
+            <a:spLocks noGrp="1"/>
+          </p:cNvSpPr>
+          <p:nvPr>
+            <p:ph type="ftr" sz="quarter" idx="11"/>
+          </p:nvPr>
+        </p:nvSpPr>
+        <p:spPr/>
+        <p:txBody>
+          <a:bodyPr/>
+          <a:lstStyle/>
+          <a:p>
+            <a:endParaRPr lang="pl-PL"/>
+          </a:p>
+        </p:txBody>
+      </p:sp>
+      <p:sp>
+        <p:nvSpPr>
+          <p:cNvPr id="7" name="Symbol zastępczy numeru slajdu 6">
+            <a:extLst>
+              <a:ext uri="{FF2B5EF4-FFF2-40B4-BE49-F238E27FC236}">
+                <a16:creationId xmlns:a16="http://schemas.microsoft.com/office/drawing/2014/main" id="{5871711E-6205-FE2B-09BE-358CE42D1A1E}"/>
+              </a:ext>
+            </a:extLst>
+          </p:cNvPr>
+          <p:cNvSpPr>
+            <a:spLocks noGrp="1"/>
+          </p:cNvSpPr>
+          <p:nvPr>
+            <p:ph type="sldNum" sz="quarter" idx="12"/>
+          </p:nvPr>
+        </p:nvSpPr>
+        <p:spPr/>
+        <p:txBody>
+          <a:bodyPr/>
+          <a:lstStyle/>
+          <a:p>
+            <a:fld id="{A08A34F4-C42B-42CF-851B-67FCC4F4CC97}" type="slidenum">
+              <a:rPr lang="pl-PL" smtClean="0"/>
+              <a:t>‹#›</a:t>
+            </a:fld>
+            <a:endParaRPr lang="pl-PL"/>
+          </a:p>
+        </p:txBody>
+      </p:sp>
+    </p:spTree>
+    <p:extLst>
+      <p:ext uri="{BB962C8B-B14F-4D97-AF65-F5344CB8AC3E}">
+        <p14:creationId xmlns:p14="http://schemas.microsoft.com/office/powerpoint/2010/main" val="2986573175"/>
+      </p:ext>
+    </p:extLst>
+  </p:cSld>
+  <p:clrMapOvr>
+    <a:masterClrMapping/>
+  </p:clrMapOvr>
+</p:sldLayout>
+</file>
+
+<file path=ppt/slideLayouts/slideLayout21.xml><?xml version="1.0" encoding="utf-8"?>
+<p:sldLayout xmlns:a="http://schemas.openxmlformats.org/drawingml/2006/main" xmlns:r="http://schemas.openxmlformats.org/officeDocument/2006/relationships" xmlns:p="http://schemas.openxmlformats.org/presentationml/2006/main" type="picTx" preserve="1">
+  <p:cSld name="Obraz z podpisem">
+    <p:spTree>
+      <p:nvGrpSpPr>
+        <p:cNvPr id="1" name=""/>
+        <p:cNvGrpSpPr/>
+        <p:nvPr/>
+      </p:nvGrpSpPr>
+      <p:grpSpPr>
+        <a:xfrm>
+          <a:off x="0" y="0"/>
+          <a:ext cx="0" cy="0"/>
+          <a:chOff x="0" y="0"/>
+          <a:chExt cx="0" cy="0"/>
+        </a:xfrm>
+      </p:grpSpPr>
+      <p:sp>
+        <p:nvSpPr>
+          <p:cNvPr id="2" name="Tytuł 1">
+            <a:extLst>
+              <a:ext uri="{FF2B5EF4-FFF2-40B4-BE49-F238E27FC236}">
+                <a16:creationId xmlns:a16="http://schemas.microsoft.com/office/drawing/2014/main" id="{BEC3A722-1A99-925B-EB06-59CBF4973CD4}"/>
+              </a:ext>
+            </a:extLst>
+          </p:cNvPr>
+          <p:cNvSpPr>
+            <a:spLocks noGrp="1"/>
+          </p:cNvSpPr>
+          <p:nvPr>
+            <p:ph type="title"/>
+          </p:nvPr>
+        </p:nvSpPr>
+        <p:spPr>
+          <a:xfrm>
+            <a:off x="839788" y="457200"/>
+            <a:ext cx="3932237" cy="1600200"/>
+          </a:xfrm>
+        </p:spPr>
+        <p:txBody>
+          <a:bodyPr anchor="b"/>
+          <a:lstStyle>
+            <a:lvl1pPr>
+              <a:defRPr sz="3200"/>
+            </a:lvl1pPr>
+          </a:lstStyle>
+          <a:p>
+            <a:r>
+              <a:rPr lang="pl-PL"/>
+              <a:t>Kliknij, aby edytować styl</a:t>
+            </a:r>
+          </a:p>
+        </p:txBody>
+      </p:sp>
+      <p:sp>
+        <p:nvSpPr>
+          <p:cNvPr id="3" name="Symbol zastępczy obrazu 2">
+            <a:extLst>
+              <a:ext uri="{FF2B5EF4-FFF2-40B4-BE49-F238E27FC236}">
+                <a16:creationId xmlns:a16="http://schemas.microsoft.com/office/drawing/2014/main" id="{FD417C7E-AF36-5157-99C2-E1C7B7AD7070}"/>
+              </a:ext>
+            </a:extLst>
+          </p:cNvPr>
+          <p:cNvSpPr>
+            <a:spLocks noGrp="1"/>
+          </p:cNvSpPr>
+          <p:nvPr>
+            <p:ph type="pic" idx="1"/>
+          </p:nvPr>
+        </p:nvSpPr>
+        <p:spPr>
+          <a:xfrm>
+            <a:off x="5183188" y="987425"/>
+            <a:ext cx="6172200" cy="4873625"/>
+          </a:xfrm>
+        </p:spPr>
+        <p:txBody>
+          <a:bodyPr/>
+          <a:lstStyle>
+            <a:lvl1pPr marL="0" indent="0">
+              <a:buNone/>
+              <a:defRPr sz="3200"/>
+            </a:lvl1pPr>
+            <a:lvl2pPr marL="457200" indent="0">
+              <a:buNone/>
+              <a:defRPr sz="2800"/>
+            </a:lvl2pPr>
+            <a:lvl3pPr marL="914400" indent="0">
+              <a:buNone/>
+              <a:defRPr sz="2400"/>
+            </a:lvl3pPr>
+            <a:lvl4pPr marL="1371600" indent="0">
+              <a:buNone/>
+              <a:defRPr sz="2000"/>
+            </a:lvl4pPr>
+            <a:lvl5pPr marL="1828800" indent="0">
+              <a:buNone/>
+              <a:defRPr sz="2000"/>
+            </a:lvl5pPr>
+            <a:lvl6pPr marL="2286000" indent="0">
+              <a:buNone/>
+              <a:defRPr sz="2000"/>
+            </a:lvl6pPr>
+            <a:lvl7pPr marL="2743200" indent="0">
+              <a:buNone/>
+              <a:defRPr sz="2000"/>
+            </a:lvl7pPr>
+            <a:lvl8pPr marL="3200400" indent="0">
+              <a:buNone/>
+              <a:defRPr sz="2000"/>
+            </a:lvl8pPr>
+            <a:lvl9pPr marL="3657600" indent="0">
+              <a:buNone/>
+              <a:defRPr sz="2000"/>
+            </a:lvl9pPr>
+          </a:lstStyle>
+          <a:p>
+            <a:endParaRPr lang="pl-PL"/>
+          </a:p>
+        </p:txBody>
+      </p:sp>
+      <p:sp>
+        <p:nvSpPr>
+          <p:cNvPr id="4" name="Symbol zastępczy tekstu 3">
+            <a:extLst>
+              <a:ext uri="{FF2B5EF4-FFF2-40B4-BE49-F238E27FC236}">
+                <a16:creationId xmlns:a16="http://schemas.microsoft.com/office/drawing/2014/main" id="{4A76CF50-C881-88CD-F08B-B00867C1E34C}"/>
+              </a:ext>
+            </a:extLst>
+          </p:cNvPr>
+          <p:cNvSpPr>
+            <a:spLocks noGrp="1"/>
+          </p:cNvSpPr>
+          <p:nvPr>
+            <p:ph type="body" sz="half" idx="2"/>
+          </p:nvPr>
+        </p:nvSpPr>
+        <p:spPr>
+          <a:xfrm>
+            <a:off x="839788" y="2057400"/>
+            <a:ext cx="3932237" cy="3811588"/>
+          </a:xfrm>
+        </p:spPr>
+        <p:txBody>
+          <a:bodyPr/>
+          <a:lstStyle>
+            <a:lvl1pPr marL="0" indent="0">
+              <a:buNone/>
+              <a:defRPr sz="1600"/>
+            </a:lvl1pPr>
+            <a:lvl2pPr marL="457200" indent="0">
+              <a:buNone/>
+              <a:defRPr sz="1400"/>
+            </a:lvl2pPr>
+            <a:lvl3pPr marL="914400" indent="0">
+              <a:buNone/>
+              <a:defRPr sz="1200"/>
+            </a:lvl3pPr>
+            <a:lvl4pPr marL="1371600" indent="0">
+              <a:buNone/>
+              <a:defRPr sz="1000"/>
+            </a:lvl4pPr>
+            <a:lvl5pPr marL="1828800" indent="0">
+              <a:buNone/>
+              <a:defRPr sz="1000"/>
+            </a:lvl5pPr>
+            <a:lvl6pPr marL="2286000" indent="0">
+              <a:buNone/>
+              <a:defRPr sz="1000"/>
+            </a:lvl6pPr>
+            <a:lvl7pPr marL="2743200" indent="0">
+              <a:buNone/>
+              <a:defRPr sz="1000"/>
+            </a:lvl7pPr>
+            <a:lvl8pPr marL="3200400" indent="0">
+              <a:buNone/>
+              <a:defRPr sz="1000"/>
+            </a:lvl8pPr>
+            <a:lvl9pPr marL="3657600" indent="0">
+              <a:buNone/>
+              <a:defRPr sz="1000"/>
+            </a:lvl9pPr>
+          </a:lstStyle>
+          <a:p>
+            <a:pPr lvl="0"/>
+            <a:r>
+              <a:rPr lang="pl-PL"/>
+              <a:t>Kliknij, aby edytować style wzorca tekstu</a:t>
+            </a:r>
+          </a:p>
+        </p:txBody>
+      </p:sp>
+      <p:sp>
+        <p:nvSpPr>
+          <p:cNvPr id="5" name="Symbol zastępczy daty 4">
+            <a:extLst>
+              <a:ext uri="{FF2B5EF4-FFF2-40B4-BE49-F238E27FC236}">
+                <a16:creationId xmlns:a16="http://schemas.microsoft.com/office/drawing/2014/main" id="{6E7D45C7-AA88-98B9-E68C-D2DA96DEF8E3}"/>
+              </a:ext>
+            </a:extLst>
+          </p:cNvPr>
+          <p:cNvSpPr>
+            <a:spLocks noGrp="1"/>
+          </p:cNvSpPr>
+          <p:nvPr>
+            <p:ph type="dt" sz="half" idx="10"/>
+          </p:nvPr>
+        </p:nvSpPr>
+        <p:spPr/>
+        <p:txBody>
+          <a:bodyPr/>
+          <a:lstStyle/>
+          <a:p>
+            <a:fld id="{E180F3EB-CED7-43F4-9E23-4BCBF0141284}" type="datetimeFigureOut">
+              <a:rPr lang="pl-PL" smtClean="0"/>
+              <a:t>26.03.2026</a:t>
+            </a:fld>
+            <a:endParaRPr lang="pl-PL"/>
+          </a:p>
+        </p:txBody>
+      </p:sp>
+      <p:sp>
+        <p:nvSpPr>
+          <p:cNvPr id="6" name="Symbol zastępczy stopki 5">
+            <a:extLst>
+              <a:ext uri="{FF2B5EF4-FFF2-40B4-BE49-F238E27FC236}">
+                <a16:creationId xmlns:a16="http://schemas.microsoft.com/office/drawing/2014/main" id="{72F317C9-E93E-7E60-2EA2-320331D03B30}"/>
+              </a:ext>
+            </a:extLst>
+          </p:cNvPr>
+          <p:cNvSpPr>
+            <a:spLocks noGrp="1"/>
+          </p:cNvSpPr>
+          <p:nvPr>
+            <p:ph type="ftr" sz="quarter" idx="11"/>
+          </p:nvPr>
+        </p:nvSpPr>
+        <p:spPr/>
+        <p:txBody>
+          <a:bodyPr/>
+          <a:lstStyle/>
+          <a:p>
+            <a:endParaRPr lang="pl-PL"/>
+          </a:p>
+        </p:txBody>
+      </p:sp>
+      <p:sp>
+        <p:nvSpPr>
+          <p:cNvPr id="7" name="Symbol zastępczy numeru slajdu 6">
+            <a:extLst>
+              <a:ext uri="{FF2B5EF4-FFF2-40B4-BE49-F238E27FC236}">
+                <a16:creationId xmlns:a16="http://schemas.microsoft.com/office/drawing/2014/main" id="{2507E408-DE2C-D187-6C90-1C161C6950A2}"/>
+              </a:ext>
+            </a:extLst>
+          </p:cNvPr>
+          <p:cNvSpPr>
+            <a:spLocks noGrp="1"/>
+          </p:cNvSpPr>
+          <p:nvPr>
+            <p:ph type="sldNum" sz="quarter" idx="12"/>
+          </p:nvPr>
+        </p:nvSpPr>
+        <p:spPr/>
+        <p:txBody>
+          <a:bodyPr/>
+          <a:lstStyle/>
+          <a:p>
+            <a:fld id="{A08A34F4-C42B-42CF-851B-67FCC4F4CC97}" type="slidenum">
+              <a:rPr lang="pl-PL" smtClean="0"/>
+              <a:t>‹#›</a:t>
+            </a:fld>
+            <a:endParaRPr lang="pl-PL"/>
+          </a:p>
+        </p:txBody>
+      </p:sp>
+    </p:spTree>
+    <p:extLst>
+      <p:ext uri="{BB962C8B-B14F-4D97-AF65-F5344CB8AC3E}">
+        <p14:creationId xmlns:p14="http://schemas.microsoft.com/office/powerpoint/2010/main" val="3522390105"/>
+      </p:ext>
+    </p:extLst>
+  </p:cSld>
+  <p:clrMapOvr>
+    <a:masterClrMapping/>
+  </p:clrMapOvr>
+</p:sldLayout>
+</file>
+
+<file path=ppt/slideLayouts/slideLayout22.xml><?xml version="1.0" encoding="utf-8"?>
+<p:sldLayout xmlns:a="http://schemas.openxmlformats.org/drawingml/2006/main" xmlns:r="http://schemas.openxmlformats.org/officeDocument/2006/relationships" xmlns:p="http://schemas.openxmlformats.org/presentationml/2006/main" type="vertTx" preserve="1">
+  <p:cSld name="Tytuł i tekst pionowy">
+    <p:spTree>
+      <p:nvGrpSpPr>
+        <p:cNvPr id="1" name=""/>
+        <p:cNvGrpSpPr/>
+        <p:nvPr/>
+      </p:nvGrpSpPr>
+      <p:grpSpPr>
+        <a:xfrm>
+          <a:off x="0" y="0"/>
+          <a:ext cx="0" cy="0"/>
+          <a:chOff x="0" y="0"/>
+          <a:chExt cx="0" cy="0"/>
+        </a:xfrm>
+      </p:grpSpPr>
+      <p:sp>
+        <p:nvSpPr>
+          <p:cNvPr id="2" name="Tytuł 1">
+            <a:extLst>
+              <a:ext uri="{FF2B5EF4-FFF2-40B4-BE49-F238E27FC236}">
+                <a16:creationId xmlns:a16="http://schemas.microsoft.com/office/drawing/2014/main" id="{C6EEAA07-8A83-2B4E-E3C3-A1A2B2F01ECB}"/>
+              </a:ext>
+            </a:extLst>
+          </p:cNvPr>
+          <p:cNvSpPr>
+            <a:spLocks noGrp="1"/>
+          </p:cNvSpPr>
+          <p:nvPr>
+            <p:ph type="title"/>
+          </p:nvPr>
+        </p:nvSpPr>
+        <p:spPr/>
+        <p:txBody>
+          <a:bodyPr/>
+          <a:lstStyle/>
+          <a:p>
+            <a:r>
+              <a:rPr lang="pl-PL"/>
+              <a:t>Kliknij, aby edytować styl</a:t>
+            </a:r>
+          </a:p>
+        </p:txBody>
+      </p:sp>
+      <p:sp>
+        <p:nvSpPr>
+          <p:cNvPr id="3" name="Symbol zastępczy tytułu pionowego 2">
+            <a:extLst>
+              <a:ext uri="{FF2B5EF4-FFF2-40B4-BE49-F238E27FC236}">
+                <a16:creationId xmlns:a16="http://schemas.microsoft.com/office/drawing/2014/main" id="{1B9D490C-B7B9-9B86-059D-E30940313061}"/>
+              </a:ext>
+            </a:extLst>
+          </p:cNvPr>
+          <p:cNvSpPr>
+            <a:spLocks noGrp="1"/>
+          </p:cNvSpPr>
+          <p:nvPr>
+            <p:ph type="body" orient="vert" idx="1"/>
+          </p:nvPr>
+        </p:nvSpPr>
+        <p:spPr/>
+        <p:txBody>
+          <a:bodyPr vert="eaVert"/>
+          <a:lstStyle/>
+          <a:p>
+            <a:pPr lvl="0"/>
+            <a:r>
+              <a:rPr lang="pl-PL"/>
+              <a:t>Kliknij, aby edytować style wzorca tekstu</a:t>
+            </a:r>
+          </a:p>
+          <a:p>
+            <a:pPr lvl="1"/>
+            <a:r>
+              <a:rPr lang="pl-PL"/>
+              <a:t>Drugi poziom</a:t>
+            </a:r>
+          </a:p>
+          <a:p>
+            <a:pPr lvl="2"/>
+            <a:r>
+              <a:rPr lang="pl-PL"/>
+              <a:t>Trzeci poziom</a:t>
+            </a:r>
+          </a:p>
+          <a:p>
+            <a:pPr lvl="3"/>
+            <a:r>
+              <a:rPr lang="pl-PL"/>
+              <a:t>Czwarty poziom</a:t>
+            </a:r>
+          </a:p>
+          <a:p>
+            <a:pPr lvl="4"/>
+            <a:r>
+              <a:rPr lang="pl-PL"/>
+              <a:t>Piąty poziom</a:t>
+            </a:r>
+          </a:p>
+        </p:txBody>
+      </p:sp>
+      <p:sp>
+        <p:nvSpPr>
+          <p:cNvPr id="4" name="Symbol zastępczy daty 3">
+            <a:extLst>
+              <a:ext uri="{FF2B5EF4-FFF2-40B4-BE49-F238E27FC236}">
+                <a16:creationId xmlns:a16="http://schemas.microsoft.com/office/drawing/2014/main" id="{4C6B02BF-2AF3-7043-A562-C4FBE86BF437}"/>
+              </a:ext>
+            </a:extLst>
+          </p:cNvPr>
+          <p:cNvSpPr>
+            <a:spLocks noGrp="1"/>
+          </p:cNvSpPr>
+          <p:nvPr>
+            <p:ph type="dt" sz="half" idx="10"/>
+          </p:nvPr>
+        </p:nvSpPr>
+        <p:spPr/>
+        <p:txBody>
+          <a:bodyPr/>
+          <a:lstStyle/>
+          <a:p>
+            <a:fld id="{E180F3EB-CED7-43F4-9E23-4BCBF0141284}" type="datetimeFigureOut">
+              <a:rPr lang="pl-PL" smtClean="0"/>
+              <a:t>26.03.2026</a:t>
+            </a:fld>
+            <a:endParaRPr lang="pl-PL"/>
+          </a:p>
+        </p:txBody>
+      </p:sp>
+      <p:sp>
+        <p:nvSpPr>
+          <p:cNvPr id="5" name="Symbol zastępczy stopki 4">
+            <a:extLst>
+              <a:ext uri="{FF2B5EF4-FFF2-40B4-BE49-F238E27FC236}">
+                <a16:creationId xmlns:a16="http://schemas.microsoft.com/office/drawing/2014/main" id="{8D3ACACB-E231-3B99-C7F4-7485E3CF562B}"/>
+              </a:ext>
+            </a:extLst>
+          </p:cNvPr>
+          <p:cNvSpPr>
+            <a:spLocks noGrp="1"/>
+          </p:cNvSpPr>
+          <p:nvPr>
+            <p:ph type="ftr" sz="quarter" idx="11"/>
+          </p:nvPr>
+        </p:nvSpPr>
+        <p:spPr/>
+        <p:txBody>
+          <a:bodyPr/>
+          <a:lstStyle/>
+          <a:p>
+            <a:endParaRPr lang="pl-PL"/>
+          </a:p>
+        </p:txBody>
+      </p:sp>
+      <p:sp>
+        <p:nvSpPr>
+          <p:cNvPr id="6" name="Symbol zastępczy numeru slajdu 5">
+            <a:extLst>
+              <a:ext uri="{FF2B5EF4-FFF2-40B4-BE49-F238E27FC236}">
+                <a16:creationId xmlns:a16="http://schemas.microsoft.com/office/drawing/2014/main" id="{5AECDC50-8E18-9189-FF85-3C4262655859}"/>
+              </a:ext>
+            </a:extLst>
+          </p:cNvPr>
+          <p:cNvSpPr>
+            <a:spLocks noGrp="1"/>
+          </p:cNvSpPr>
+          <p:nvPr>
+            <p:ph type="sldNum" sz="quarter" idx="12"/>
+          </p:nvPr>
+        </p:nvSpPr>
+        <p:spPr/>
+        <p:txBody>
+          <a:bodyPr/>
+          <a:lstStyle/>
+          <a:p>
+            <a:fld id="{A08A34F4-C42B-42CF-851B-67FCC4F4CC97}" type="slidenum">
+              <a:rPr lang="pl-PL" smtClean="0"/>
+              <a:t>‹#›</a:t>
+            </a:fld>
+            <a:endParaRPr lang="pl-PL"/>
+          </a:p>
+        </p:txBody>
+      </p:sp>
+    </p:spTree>
+    <p:extLst>
+      <p:ext uri="{BB962C8B-B14F-4D97-AF65-F5344CB8AC3E}">
+        <p14:creationId xmlns:p14="http://schemas.microsoft.com/office/powerpoint/2010/main" val="1701967047"/>
+      </p:ext>
+    </p:extLst>
+  </p:cSld>
+  <p:clrMapOvr>
+    <a:masterClrMapping/>
+  </p:clrMapOvr>
+</p:sldLayout>
+</file>
+
+<file path=ppt/slideLayouts/slideLayout23.xml><?xml version="1.0" encoding="utf-8"?>
+<p:sldLayout xmlns:a="http://schemas.openxmlformats.org/drawingml/2006/main" xmlns:r="http://schemas.openxmlformats.org/officeDocument/2006/relationships" xmlns:p="http://schemas.openxmlformats.org/presentationml/2006/main" type="vertTitleAndTx" preserve="1">
+  <p:cSld name="Tytuł pionowy i tekst">
+    <p:spTree>
+      <p:nvGrpSpPr>
+        <p:cNvPr id="1" name=""/>
+        <p:cNvGrpSpPr/>
+        <p:nvPr/>
+      </p:nvGrpSpPr>
+      <p:grpSpPr>
+        <a:xfrm>
+          <a:off x="0" y="0"/>
+          <a:ext cx="0" cy="0"/>
+          <a:chOff x="0" y="0"/>
+          <a:chExt cx="0" cy="0"/>
+        </a:xfrm>
+      </p:grpSpPr>
+      <p:sp>
+        <p:nvSpPr>
+          <p:cNvPr id="2" name="Tytuł pionowy 1">
+            <a:extLst>
+              <a:ext uri="{FF2B5EF4-FFF2-40B4-BE49-F238E27FC236}">
+                <a16:creationId xmlns:a16="http://schemas.microsoft.com/office/drawing/2014/main" id="{DE5FF89C-8C1E-E041-D4A3-F8333883B86E}"/>
+              </a:ext>
+            </a:extLst>
+          </p:cNvPr>
+          <p:cNvSpPr>
+            <a:spLocks noGrp="1"/>
+          </p:cNvSpPr>
+          <p:nvPr>
+            <p:ph type="title" orient="vert"/>
+          </p:nvPr>
+        </p:nvSpPr>
+        <p:spPr>
+          <a:xfrm>
+            <a:off x="8724900" y="365125"/>
+            <a:ext cx="2628900" cy="5811838"/>
+          </a:xfrm>
+        </p:spPr>
+        <p:txBody>
+          <a:bodyPr vert="eaVert"/>
+          <a:lstStyle/>
+          <a:p>
+            <a:r>
+              <a:rPr lang="pl-PL"/>
+              <a:t>Kliknij, aby edytować styl</a:t>
+            </a:r>
+          </a:p>
+        </p:txBody>
+      </p:sp>
+      <p:sp>
+        <p:nvSpPr>
+          <p:cNvPr id="3" name="Symbol zastępczy tytułu pionowego 2">
+            <a:extLst>
+              <a:ext uri="{FF2B5EF4-FFF2-40B4-BE49-F238E27FC236}">
+                <a16:creationId xmlns:a16="http://schemas.microsoft.com/office/drawing/2014/main" id="{371DF6C8-1E49-65D5-B6EB-5F23057592E1}"/>
+              </a:ext>
+            </a:extLst>
+          </p:cNvPr>
+          <p:cNvSpPr>
+            <a:spLocks noGrp="1"/>
+          </p:cNvSpPr>
+          <p:nvPr>
+            <p:ph type="body" orient="vert" idx="1"/>
+          </p:nvPr>
+        </p:nvSpPr>
+        <p:spPr>
+          <a:xfrm>
+            <a:off x="838200" y="365125"/>
+            <a:ext cx="7734300" cy="5811838"/>
+          </a:xfrm>
+        </p:spPr>
+        <p:txBody>
+          <a:bodyPr vert="eaVert"/>
+          <a:lstStyle/>
+          <a:p>
+            <a:pPr lvl="0"/>
+            <a:r>
+              <a:rPr lang="pl-PL"/>
+              <a:t>Kliknij, aby edytować style wzorca tekstu</a:t>
+            </a:r>
+          </a:p>
+          <a:p>
+            <a:pPr lvl="1"/>
+            <a:r>
+              <a:rPr lang="pl-PL"/>
+              <a:t>Drugi poziom</a:t>
+            </a:r>
+          </a:p>
+          <a:p>
+            <a:pPr lvl="2"/>
+            <a:r>
+              <a:rPr lang="pl-PL"/>
+              <a:t>Trzeci poziom</a:t>
+            </a:r>
+          </a:p>
+          <a:p>
+            <a:pPr lvl="3"/>
+            <a:r>
+              <a:rPr lang="pl-PL"/>
+              <a:t>Czwarty poziom</a:t>
+            </a:r>
+          </a:p>
+          <a:p>
+            <a:pPr lvl="4"/>
+            <a:r>
+              <a:rPr lang="pl-PL"/>
+              <a:t>Piąty poziom</a:t>
+            </a:r>
+          </a:p>
+        </p:txBody>
+      </p:sp>
+      <p:sp>
+        <p:nvSpPr>
+          <p:cNvPr id="4" name="Symbol zastępczy daty 3">
+            <a:extLst>
+              <a:ext uri="{FF2B5EF4-FFF2-40B4-BE49-F238E27FC236}">
+                <a16:creationId xmlns:a16="http://schemas.microsoft.com/office/drawing/2014/main" id="{387CBD23-EE1F-EE8C-1AC9-4FFA05AA5438}"/>
+              </a:ext>
+            </a:extLst>
+          </p:cNvPr>
+          <p:cNvSpPr>
+            <a:spLocks noGrp="1"/>
+          </p:cNvSpPr>
+          <p:nvPr>
+            <p:ph type="dt" sz="half" idx="10"/>
+          </p:nvPr>
+        </p:nvSpPr>
+        <p:spPr/>
+        <p:txBody>
+          <a:bodyPr/>
+          <a:lstStyle/>
+          <a:p>
+            <a:fld id="{E180F3EB-CED7-43F4-9E23-4BCBF0141284}" type="datetimeFigureOut">
+              <a:rPr lang="pl-PL" smtClean="0"/>
+              <a:t>26.03.2026</a:t>
+            </a:fld>
+            <a:endParaRPr lang="pl-PL"/>
+          </a:p>
+        </p:txBody>
+      </p:sp>
+      <p:sp>
+        <p:nvSpPr>
+          <p:cNvPr id="5" name="Symbol zastępczy stopki 4">
+            <a:extLst>
+              <a:ext uri="{FF2B5EF4-FFF2-40B4-BE49-F238E27FC236}">
+                <a16:creationId xmlns:a16="http://schemas.microsoft.com/office/drawing/2014/main" id="{5E523A84-58EF-92BC-3B97-4CC88F2A17D3}"/>
+              </a:ext>
+            </a:extLst>
+          </p:cNvPr>
+          <p:cNvSpPr>
+            <a:spLocks noGrp="1"/>
+          </p:cNvSpPr>
+          <p:nvPr>
+            <p:ph type="ftr" sz="quarter" idx="11"/>
+          </p:nvPr>
+        </p:nvSpPr>
+        <p:spPr/>
+        <p:txBody>
+          <a:bodyPr/>
+          <a:lstStyle/>
+          <a:p>
+            <a:endParaRPr lang="pl-PL"/>
+          </a:p>
+        </p:txBody>
+      </p:sp>
+      <p:sp>
+        <p:nvSpPr>
+          <p:cNvPr id="6" name="Symbol zastępczy numeru slajdu 5">
+            <a:extLst>
+              <a:ext uri="{FF2B5EF4-FFF2-40B4-BE49-F238E27FC236}">
+                <a16:creationId xmlns:a16="http://schemas.microsoft.com/office/drawing/2014/main" id="{64A5AA1F-856D-BD00-E1E7-B1C38CCBE83A}"/>
+              </a:ext>
+            </a:extLst>
+          </p:cNvPr>
+          <p:cNvSpPr>
+            <a:spLocks noGrp="1"/>
+          </p:cNvSpPr>
+          <p:nvPr>
+            <p:ph type="sldNum" sz="quarter" idx="12"/>
+          </p:nvPr>
+        </p:nvSpPr>
+        <p:spPr/>
+        <p:txBody>
+          <a:bodyPr/>
+          <a:lstStyle/>
+          <a:p>
+            <a:fld id="{A08A34F4-C42B-42CF-851B-67FCC4F4CC97}" type="slidenum">
+              <a:rPr lang="pl-PL" smtClean="0"/>
+              <a:t>‹#›</a:t>
+            </a:fld>
+            <a:endParaRPr lang="pl-PL"/>
+          </a:p>
+        </p:txBody>
+      </p:sp>
+    </p:spTree>
+    <p:extLst>
+      <p:ext uri="{BB962C8B-B14F-4D97-AF65-F5344CB8AC3E}">
+        <p14:creationId xmlns:p14="http://schemas.microsoft.com/office/powerpoint/2010/main" val="2454489051"/>
       </p:ext>
     </p:extLst>
   </p:cSld>
@@ -3508,6 +6149,574 @@
 </p:sldMaster>
 </file>
 
+<file path=ppt/slideMasters/slideMaster2.xml><?xml version="1.0" encoding="utf-8"?>
+<p:sldMaster xmlns:a="http://schemas.openxmlformats.org/drawingml/2006/main" xmlns:r="http://schemas.openxmlformats.org/officeDocument/2006/relationships" xmlns:p="http://schemas.openxmlformats.org/presentationml/2006/main">
+  <p:cSld>
+    <p:bg>
+      <p:bgRef idx="1001">
+        <a:schemeClr val="bg1"/>
+      </p:bgRef>
+    </p:bg>
+    <p:spTree>
+      <p:nvGrpSpPr>
+        <p:cNvPr id="1" name=""/>
+        <p:cNvGrpSpPr/>
+        <p:nvPr/>
+      </p:nvGrpSpPr>
+      <p:grpSpPr>
+        <a:xfrm>
+          <a:off x="0" y="0"/>
+          <a:ext cx="0" cy="0"/>
+          <a:chOff x="0" y="0"/>
+          <a:chExt cx="0" cy="0"/>
+        </a:xfrm>
+      </p:grpSpPr>
+      <p:sp>
+        <p:nvSpPr>
+          <p:cNvPr id="2" name="Symbol zastępczy tytułu 1">
+            <a:extLst>
+              <a:ext uri="{FF2B5EF4-FFF2-40B4-BE49-F238E27FC236}">
+                <a16:creationId xmlns:a16="http://schemas.microsoft.com/office/drawing/2014/main" id="{813A6722-C3F5-1564-7357-C769BAF028E6}"/>
+              </a:ext>
+            </a:extLst>
+          </p:cNvPr>
+          <p:cNvSpPr>
+            <a:spLocks noGrp="1"/>
+          </p:cNvSpPr>
+          <p:nvPr>
+            <p:ph type="title"/>
+          </p:nvPr>
+        </p:nvSpPr>
+        <p:spPr>
+          <a:xfrm>
+            <a:off x="838200" y="365125"/>
+            <a:ext cx="10515600" cy="1325563"/>
+          </a:xfrm>
+          <a:prstGeom prst="rect">
+            <a:avLst/>
+          </a:prstGeom>
+        </p:spPr>
+        <p:txBody>
+          <a:bodyPr vert="horz" lIns="91440" tIns="45720" rIns="91440" bIns="45720" rtlCol="0" anchor="ctr">
+            <a:normAutofit/>
+          </a:bodyPr>
+          <a:lstStyle/>
+          <a:p>
+            <a:r>
+              <a:rPr lang="pl-PL"/>
+              <a:t>Kliknij, aby edytować styl</a:t>
+            </a:r>
+          </a:p>
+        </p:txBody>
+      </p:sp>
+      <p:sp>
+        <p:nvSpPr>
+          <p:cNvPr id="3" name="Symbol zastępczy tekstu 2">
+            <a:extLst>
+              <a:ext uri="{FF2B5EF4-FFF2-40B4-BE49-F238E27FC236}">
+                <a16:creationId xmlns:a16="http://schemas.microsoft.com/office/drawing/2014/main" id="{A290B49B-83D8-8350-E404-06F1D8C56F04}"/>
+              </a:ext>
+            </a:extLst>
+          </p:cNvPr>
+          <p:cNvSpPr>
+            <a:spLocks noGrp="1"/>
+          </p:cNvSpPr>
+          <p:nvPr>
+            <p:ph type="body" idx="1"/>
+          </p:nvPr>
+        </p:nvSpPr>
+        <p:spPr>
+          <a:xfrm>
+            <a:off x="838200" y="1825625"/>
+            <a:ext cx="10515600" cy="4351338"/>
+          </a:xfrm>
+          <a:prstGeom prst="rect">
+            <a:avLst/>
+          </a:prstGeom>
+        </p:spPr>
+        <p:txBody>
+          <a:bodyPr vert="horz" lIns="91440" tIns="45720" rIns="91440" bIns="45720" rtlCol="0">
+            <a:normAutofit/>
+          </a:bodyPr>
+          <a:lstStyle/>
+          <a:p>
+            <a:pPr lvl="0"/>
+            <a:r>
+              <a:rPr lang="pl-PL"/>
+              <a:t>Kliknij, aby edytować style wzorca tekstu</a:t>
+            </a:r>
+          </a:p>
+          <a:p>
+            <a:pPr lvl="1"/>
+            <a:r>
+              <a:rPr lang="pl-PL"/>
+              <a:t>Drugi poziom</a:t>
+            </a:r>
+          </a:p>
+          <a:p>
+            <a:pPr lvl="2"/>
+            <a:r>
+              <a:rPr lang="pl-PL"/>
+              <a:t>Trzeci poziom</a:t>
+            </a:r>
+          </a:p>
+          <a:p>
+            <a:pPr lvl="3"/>
+            <a:r>
+              <a:rPr lang="pl-PL"/>
+              <a:t>Czwarty poziom</a:t>
+            </a:r>
+          </a:p>
+          <a:p>
+            <a:pPr lvl="4"/>
+            <a:r>
+              <a:rPr lang="pl-PL"/>
+              <a:t>Piąty poziom</a:t>
+            </a:r>
+          </a:p>
+        </p:txBody>
+      </p:sp>
+      <p:sp>
+        <p:nvSpPr>
+          <p:cNvPr id="4" name="Symbol zastępczy daty 3">
+            <a:extLst>
+              <a:ext uri="{FF2B5EF4-FFF2-40B4-BE49-F238E27FC236}">
+                <a16:creationId xmlns:a16="http://schemas.microsoft.com/office/drawing/2014/main" id="{5499F847-54EA-E6AF-217A-7EB04C19ADFB}"/>
+              </a:ext>
+            </a:extLst>
+          </p:cNvPr>
+          <p:cNvSpPr>
+            <a:spLocks noGrp="1"/>
+          </p:cNvSpPr>
+          <p:nvPr>
+            <p:ph type="dt" sz="half" idx="2"/>
+          </p:nvPr>
+        </p:nvSpPr>
+        <p:spPr>
+          <a:xfrm>
+            <a:off x="838200" y="6356350"/>
+            <a:ext cx="2743200" cy="365125"/>
+          </a:xfrm>
+          <a:prstGeom prst="rect">
+            <a:avLst/>
+          </a:prstGeom>
+        </p:spPr>
+        <p:txBody>
+          <a:bodyPr vert="horz" lIns="91440" tIns="45720" rIns="91440" bIns="45720" rtlCol="0" anchor="ctr"/>
+          <a:lstStyle>
+            <a:lvl1pPr algn="l">
+              <a:defRPr sz="1200">
+                <a:solidFill>
+                  <a:schemeClr val="tx1">
+                    <a:tint val="82000"/>
+                  </a:schemeClr>
+                </a:solidFill>
+              </a:defRPr>
+            </a:lvl1pPr>
+          </a:lstStyle>
+          <a:p>
+            <a:fld id="{E180F3EB-CED7-43F4-9E23-4BCBF0141284}" type="datetimeFigureOut">
+              <a:rPr lang="pl-PL" smtClean="0"/>
+              <a:t>26.03.2026</a:t>
+            </a:fld>
+            <a:endParaRPr lang="pl-PL"/>
+          </a:p>
+        </p:txBody>
+      </p:sp>
+      <p:sp>
+        <p:nvSpPr>
+          <p:cNvPr id="5" name="Symbol zastępczy stopki 4">
+            <a:extLst>
+              <a:ext uri="{FF2B5EF4-FFF2-40B4-BE49-F238E27FC236}">
+                <a16:creationId xmlns:a16="http://schemas.microsoft.com/office/drawing/2014/main" id="{BE061A4C-0724-784F-60D3-D62EB2659A58}"/>
+              </a:ext>
+            </a:extLst>
+          </p:cNvPr>
+          <p:cNvSpPr>
+            <a:spLocks noGrp="1"/>
+          </p:cNvSpPr>
+          <p:nvPr>
+            <p:ph type="ftr" sz="quarter" idx="3"/>
+          </p:nvPr>
+        </p:nvSpPr>
+        <p:spPr>
+          <a:xfrm>
+            <a:off x="4038600" y="6356350"/>
+            <a:ext cx="4114800" cy="365125"/>
+          </a:xfrm>
+          <a:prstGeom prst="rect">
+            <a:avLst/>
+          </a:prstGeom>
+        </p:spPr>
+        <p:txBody>
+          <a:bodyPr vert="horz" lIns="91440" tIns="45720" rIns="91440" bIns="45720" rtlCol="0" anchor="ctr"/>
+          <a:lstStyle>
+            <a:lvl1pPr algn="ctr">
+              <a:defRPr sz="1200">
+                <a:solidFill>
+                  <a:schemeClr val="tx1">
+                    <a:tint val="82000"/>
+                  </a:schemeClr>
+                </a:solidFill>
+              </a:defRPr>
+            </a:lvl1pPr>
+          </a:lstStyle>
+          <a:p>
+            <a:endParaRPr lang="pl-PL"/>
+          </a:p>
+        </p:txBody>
+      </p:sp>
+      <p:sp>
+        <p:nvSpPr>
+          <p:cNvPr id="6" name="Symbol zastępczy numeru slajdu 5">
+            <a:extLst>
+              <a:ext uri="{FF2B5EF4-FFF2-40B4-BE49-F238E27FC236}">
+                <a16:creationId xmlns:a16="http://schemas.microsoft.com/office/drawing/2014/main" id="{788EC950-3F0C-5C30-43B1-CFB8B41245E2}"/>
+              </a:ext>
+            </a:extLst>
+          </p:cNvPr>
+          <p:cNvSpPr>
+            <a:spLocks noGrp="1"/>
+          </p:cNvSpPr>
+          <p:nvPr>
+            <p:ph type="sldNum" sz="quarter" idx="4"/>
+          </p:nvPr>
+        </p:nvSpPr>
+        <p:spPr>
+          <a:xfrm>
+            <a:off x="8610600" y="6356350"/>
+            <a:ext cx="2743200" cy="365125"/>
+          </a:xfrm>
+          <a:prstGeom prst="rect">
+            <a:avLst/>
+          </a:prstGeom>
+        </p:spPr>
+        <p:txBody>
+          <a:bodyPr vert="horz" lIns="91440" tIns="45720" rIns="91440" bIns="45720" rtlCol="0" anchor="ctr"/>
+          <a:lstStyle>
+            <a:lvl1pPr algn="r">
+              <a:defRPr sz="1200">
+                <a:solidFill>
+                  <a:schemeClr val="tx1">
+                    <a:tint val="82000"/>
+                  </a:schemeClr>
+                </a:solidFill>
+              </a:defRPr>
+            </a:lvl1pPr>
+          </a:lstStyle>
+          <a:p>
+            <a:fld id="{A08A34F4-C42B-42CF-851B-67FCC4F4CC97}" type="slidenum">
+              <a:rPr lang="pl-PL" smtClean="0"/>
+              <a:t>‹#›</a:t>
+            </a:fld>
+            <a:endParaRPr lang="pl-PL"/>
+          </a:p>
+        </p:txBody>
+      </p:sp>
+    </p:spTree>
+    <p:extLst>
+      <p:ext uri="{BB962C8B-B14F-4D97-AF65-F5344CB8AC3E}">
+        <p14:creationId xmlns:p14="http://schemas.microsoft.com/office/powerpoint/2010/main" val="259898745"/>
+      </p:ext>
+    </p:extLst>
+  </p:cSld>
+  <p:clrMap bg1="lt1" tx1="dk1" bg2="lt2" tx2="dk2" accent1="accent1" accent2="accent2" accent3="accent3" accent4="accent4" accent5="accent5" accent6="accent6" hlink="hlink" folHlink="folHlink"/>
+  <p:sldLayoutIdLst>
+    <p:sldLayoutId id="2147483662" r:id="rId1"/>
+    <p:sldLayoutId id="2147483663" r:id="rId2"/>
+    <p:sldLayoutId id="2147483664" r:id="rId3"/>
+    <p:sldLayoutId id="2147483665" r:id="rId4"/>
+    <p:sldLayoutId id="2147483666" r:id="rId5"/>
+    <p:sldLayoutId id="2147483667" r:id="rId6"/>
+    <p:sldLayoutId id="2147483668" r:id="rId7"/>
+    <p:sldLayoutId id="2147483669" r:id="rId8"/>
+    <p:sldLayoutId id="2147483670" r:id="rId9"/>
+    <p:sldLayoutId id="2147483671" r:id="rId10"/>
+    <p:sldLayoutId id="2147483672" r:id="rId11"/>
+  </p:sldLayoutIdLst>
+  <p:txStyles>
+    <p:titleStyle>
+      <a:lvl1pPr algn="l" defTabSz="914400" rtl="0" eaLnBrk="1" latinLnBrk="0" hangingPunct="1">
+        <a:lnSpc>
+          <a:spcPct val="90000"/>
+        </a:lnSpc>
+        <a:spcBef>
+          <a:spcPct val="0"/>
+        </a:spcBef>
+        <a:buNone/>
+        <a:defRPr sz="4400" kern="1200">
+          <a:solidFill>
+            <a:schemeClr val="tx1"/>
+          </a:solidFill>
+          <a:latin typeface="+mj-lt"/>
+          <a:ea typeface="+mj-ea"/>
+          <a:cs typeface="+mj-cs"/>
+        </a:defRPr>
+      </a:lvl1pPr>
+    </p:titleStyle>
+    <p:bodyStyle>
+      <a:lvl1pPr marL="228600" indent="-228600" algn="l" defTabSz="914400" rtl="0" eaLnBrk="1" latinLnBrk="0" hangingPunct="1">
+        <a:lnSpc>
+          <a:spcPct val="90000"/>
+        </a:lnSpc>
+        <a:spcBef>
+          <a:spcPts val="1000"/>
+        </a:spcBef>
+        <a:buFont typeface="Arial" panose="020B0604020202020204" pitchFamily="34" charset="0"/>
+        <a:buChar char="•"/>
+        <a:defRPr sz="2800" kern="1200">
+          <a:solidFill>
+            <a:schemeClr val="tx1"/>
+          </a:solidFill>
+          <a:latin typeface="+mn-lt"/>
+          <a:ea typeface="+mn-ea"/>
+          <a:cs typeface="+mn-cs"/>
+        </a:defRPr>
+      </a:lvl1pPr>
+      <a:lvl2pPr marL="685800" indent="-228600" algn="l" defTabSz="914400" rtl="0" eaLnBrk="1" latinLnBrk="0" hangingPunct="1">
+        <a:lnSpc>
+          <a:spcPct val="90000"/>
+        </a:lnSpc>
+        <a:spcBef>
+          <a:spcPts val="500"/>
+        </a:spcBef>
+        <a:buFont typeface="Arial" panose="020B0604020202020204" pitchFamily="34" charset="0"/>
+        <a:buChar char="•"/>
+        <a:defRPr sz="2400" kern="1200">
+          <a:solidFill>
+            <a:schemeClr val="tx1"/>
+          </a:solidFill>
+          <a:latin typeface="+mn-lt"/>
+          <a:ea typeface="+mn-ea"/>
+          <a:cs typeface="+mn-cs"/>
+        </a:defRPr>
+      </a:lvl2pPr>
+      <a:lvl3pPr marL="1143000" indent="-228600" algn="l" defTabSz="914400" rtl="0" eaLnBrk="1" latinLnBrk="0" hangingPunct="1">
+        <a:lnSpc>
+          <a:spcPct val="90000"/>
+        </a:lnSpc>
+        <a:spcBef>
+          <a:spcPts val="500"/>
+        </a:spcBef>
+        <a:buFont typeface="Arial" panose="020B0604020202020204" pitchFamily="34" charset="0"/>
+        <a:buChar char="•"/>
+        <a:defRPr sz="2000" kern="1200">
+          <a:solidFill>
+            <a:schemeClr val="tx1"/>
+          </a:solidFill>
+          <a:latin typeface="+mn-lt"/>
+          <a:ea typeface="+mn-ea"/>
+          <a:cs typeface="+mn-cs"/>
+        </a:defRPr>
+      </a:lvl3pPr>
+      <a:lvl4pPr marL="1600200" indent="-228600" algn="l" defTabSz="914400" rtl="0" eaLnBrk="1" latinLnBrk="0" hangingPunct="1">
+        <a:lnSpc>
+          <a:spcPct val="90000"/>
+        </a:lnSpc>
+        <a:spcBef>
+          <a:spcPts val="500"/>
+        </a:spcBef>
+        <a:buFont typeface="Arial" panose="020B0604020202020204" pitchFamily="34" charset="0"/>
+        <a:buChar char="•"/>
+        <a:defRPr sz="1800" kern="1200">
+          <a:solidFill>
+            <a:schemeClr val="tx1"/>
+          </a:solidFill>
+          <a:latin typeface="+mn-lt"/>
+          <a:ea typeface="+mn-ea"/>
+          <a:cs typeface="+mn-cs"/>
+        </a:defRPr>
+      </a:lvl4pPr>
+      <a:lvl5pPr marL="2057400" indent="-228600" algn="l" defTabSz="914400" rtl="0" eaLnBrk="1" latinLnBrk="0" hangingPunct="1">
+        <a:lnSpc>
+          <a:spcPct val="90000"/>
+        </a:lnSpc>
+        <a:spcBef>
+          <a:spcPts val="500"/>
+        </a:spcBef>
+        <a:buFont typeface="Arial" panose="020B0604020202020204" pitchFamily="34" charset="0"/>
+        <a:buChar char="•"/>
+        <a:defRPr sz="1800" kern="1200">
+          <a:solidFill>
+            <a:schemeClr val="tx1"/>
+          </a:solidFill>
+          <a:latin typeface="+mn-lt"/>
+          <a:ea typeface="+mn-ea"/>
+          <a:cs typeface="+mn-cs"/>
+        </a:defRPr>
+      </a:lvl5pPr>
+      <a:lvl6pPr marL="2514600" indent="-228600" algn="l" defTabSz="914400" rtl="0" eaLnBrk="1" latinLnBrk="0" hangingPunct="1">
+        <a:lnSpc>
+          <a:spcPct val="90000"/>
+        </a:lnSpc>
+        <a:spcBef>
+          <a:spcPts val="500"/>
+        </a:spcBef>
+        <a:buFont typeface="Arial" panose="020B0604020202020204" pitchFamily="34" charset="0"/>
+        <a:buChar char="•"/>
+        <a:defRPr sz="1800" kern="1200">
+          <a:solidFill>
+            <a:schemeClr val="tx1"/>
+          </a:solidFill>
+          <a:latin typeface="+mn-lt"/>
+          <a:ea typeface="+mn-ea"/>
+          <a:cs typeface="+mn-cs"/>
+        </a:defRPr>
+      </a:lvl6pPr>
+      <a:lvl7pPr marL="2971800" indent="-228600" algn="l" defTabSz="914400" rtl="0" eaLnBrk="1" latinLnBrk="0" hangingPunct="1">
+        <a:lnSpc>
+          <a:spcPct val="90000"/>
+        </a:lnSpc>
+        <a:spcBef>
+          <a:spcPts val="500"/>
+        </a:spcBef>
+        <a:buFont typeface="Arial" panose="020B0604020202020204" pitchFamily="34" charset="0"/>
+        <a:buChar char="•"/>
+        <a:defRPr sz="1800" kern="1200">
+          <a:solidFill>
+            <a:schemeClr val="tx1"/>
+          </a:solidFill>
+          <a:latin typeface="+mn-lt"/>
+          <a:ea typeface="+mn-ea"/>
+          <a:cs typeface="+mn-cs"/>
+        </a:defRPr>
+      </a:lvl7pPr>
+      <a:lvl8pPr marL="3429000" indent="-228600" algn="l" defTabSz="914400" rtl="0" eaLnBrk="1" latinLnBrk="0" hangingPunct="1">
+        <a:lnSpc>
+          <a:spcPct val="90000"/>
+        </a:lnSpc>
+        <a:spcBef>
+          <a:spcPts val="500"/>
+        </a:spcBef>
+        <a:buFont typeface="Arial" panose="020B0604020202020204" pitchFamily="34" charset="0"/>
+        <a:buChar char="•"/>
+        <a:defRPr sz="1800" kern="1200">
+          <a:solidFill>
+            <a:schemeClr val="tx1"/>
+          </a:solidFill>
+          <a:latin typeface="+mn-lt"/>
+          <a:ea typeface="+mn-ea"/>
+          <a:cs typeface="+mn-cs"/>
+        </a:defRPr>
+      </a:lvl8pPr>
+      <a:lvl9pPr marL="3886200" indent="-228600" algn="l" defTabSz="914400" rtl="0" eaLnBrk="1" latinLnBrk="0" hangingPunct="1">
+        <a:lnSpc>
+          <a:spcPct val="90000"/>
+        </a:lnSpc>
+        <a:spcBef>
+          <a:spcPts val="500"/>
+        </a:spcBef>
+        <a:buFont typeface="Arial" panose="020B0604020202020204" pitchFamily="34" charset="0"/>
+        <a:buChar char="•"/>
+        <a:defRPr sz="1800" kern="1200">
+          <a:solidFill>
+            <a:schemeClr val="tx1"/>
+          </a:solidFill>
+          <a:latin typeface="+mn-lt"/>
+          <a:ea typeface="+mn-ea"/>
+          <a:cs typeface="+mn-cs"/>
+        </a:defRPr>
+      </a:lvl9pPr>
+    </p:bodyStyle>
+    <p:otherStyle>
+      <a:defPPr>
+        <a:defRPr lang="pl-PL"/>
+      </a:defPPr>
+      <a:lvl1pPr marL="0" algn="l" defTabSz="914400" rtl="0" eaLnBrk="1" latinLnBrk="0" hangingPunct="1">
+        <a:defRPr sz="1800" kern="1200">
+          <a:solidFill>
+            <a:schemeClr val="tx1"/>
+          </a:solidFill>
+          <a:latin typeface="+mn-lt"/>
+          <a:ea typeface="+mn-ea"/>
+          <a:cs typeface="+mn-cs"/>
+        </a:defRPr>
+      </a:lvl1pPr>
+      <a:lvl2pPr marL="457200" algn="l" defTabSz="914400" rtl="0" eaLnBrk="1" latinLnBrk="0" hangingPunct="1">
+        <a:defRPr sz="1800" kern="1200">
+          <a:solidFill>
+            <a:schemeClr val="tx1"/>
+          </a:solidFill>
+          <a:latin typeface="+mn-lt"/>
+          <a:ea typeface="+mn-ea"/>
+          <a:cs typeface="+mn-cs"/>
+        </a:defRPr>
+      </a:lvl2pPr>
+      <a:lvl3pPr marL="914400" algn="l" defTabSz="914400" rtl="0" eaLnBrk="1" latinLnBrk="0" hangingPunct="1">
+        <a:defRPr sz="1800" kern="1200">
+          <a:solidFill>
+            <a:schemeClr val="tx1"/>
+          </a:solidFill>
+          <a:latin typeface="+mn-lt"/>
+          <a:ea typeface="+mn-ea"/>
+          <a:cs typeface="+mn-cs"/>
+        </a:defRPr>
+      </a:lvl3pPr>
+      <a:lvl4pPr marL="1371600" algn="l" defTabSz="914400" rtl="0" eaLnBrk="1" latinLnBrk="0" hangingPunct="1">
+        <a:defRPr sz="1800" kern="1200">
+          <a:solidFill>
+            <a:schemeClr val="tx1"/>
+          </a:solidFill>
+          <a:latin typeface="+mn-lt"/>
+          <a:ea typeface="+mn-ea"/>
+          <a:cs typeface="+mn-cs"/>
+        </a:defRPr>
+      </a:lvl4pPr>
+      <a:lvl5pPr marL="1828800" algn="l" defTabSz="914400" rtl="0" eaLnBrk="1" latinLnBrk="0" hangingPunct="1">
+        <a:defRPr sz="1800" kern="1200">
+          <a:solidFill>
+            <a:schemeClr val="tx1"/>
+          </a:solidFill>
+          <a:latin typeface="+mn-lt"/>
+          <a:ea typeface="+mn-ea"/>
+          <a:cs typeface="+mn-cs"/>
+        </a:defRPr>
+      </a:lvl5pPr>
+      <a:lvl6pPr marL="2286000" algn="l" defTabSz="914400" rtl="0" eaLnBrk="1" latinLnBrk="0" hangingPunct="1">
+        <a:defRPr sz="1800" kern="1200">
+          <a:solidFill>
+            <a:schemeClr val="tx1"/>
+          </a:solidFill>
+          <a:latin typeface="+mn-lt"/>
+          <a:ea typeface="+mn-ea"/>
+          <a:cs typeface="+mn-cs"/>
+        </a:defRPr>
+      </a:lvl6pPr>
+      <a:lvl7pPr marL="2743200" algn="l" defTabSz="914400" rtl="0" eaLnBrk="1" latinLnBrk="0" hangingPunct="1">
+        <a:defRPr sz="1800" kern="1200">
+          <a:solidFill>
+            <a:schemeClr val="tx1"/>
+          </a:solidFill>
+          <a:latin typeface="+mn-lt"/>
+          <a:ea typeface="+mn-ea"/>
+          <a:cs typeface="+mn-cs"/>
+        </a:defRPr>
+      </a:lvl7pPr>
+      <a:lvl8pPr marL="3200400" algn="l" defTabSz="914400" rtl="0" eaLnBrk="1" latinLnBrk="0" hangingPunct="1">
+        <a:defRPr sz="1800" kern="1200">
+          <a:solidFill>
+            <a:schemeClr val="tx1"/>
+          </a:solidFill>
+          <a:latin typeface="+mn-lt"/>
+          <a:ea typeface="+mn-ea"/>
+          <a:cs typeface="+mn-cs"/>
+        </a:defRPr>
+      </a:lvl8pPr>
+      <a:lvl9pPr marL="3657600" algn="l" defTabSz="914400" rtl="0" eaLnBrk="1" latinLnBrk="0" hangingPunct="1">
+        <a:defRPr sz="1800" kern="1200">
+          <a:solidFill>
+            <a:schemeClr val="tx1"/>
+          </a:solidFill>
+          <a:latin typeface="+mn-lt"/>
+          <a:ea typeface="+mn-ea"/>
+          <a:cs typeface="+mn-cs"/>
+        </a:defRPr>
+      </a:lvl9pPr>
+    </p:otherStyle>
+  </p:txStyles>
+</p:sldMaster>
+</file>
+
 <file path=ppt/slides/slide1.xml><?xml version="1.0" encoding="utf-8"?>
 <p:sld xmlns:a="http://schemas.openxmlformats.org/drawingml/2006/main" xmlns:r="http://schemas.openxmlformats.org/officeDocument/2006/relationships" xmlns:p="http://schemas.openxmlformats.org/presentationml/2006/main">
   <p:cSld>
@@ -3575,7 +6784,7 @@
           <a:lstStyle/>
           <a:p>
             <a:r>
-              <a:rPr lang="pl-PL"/>
+              <a:rPr lang="pl-PL" dirty="0"/>
               <a:t>Matematyczna logika oceny trudności przykładów oraz oryginalny kod źródłowy</a:t>
             </a:r>
           </a:p>
@@ -3585,6 +6794,988 @@
     <p:extLst>
       <p:ext uri="{BB962C8B-B14F-4D97-AF65-F5344CB8AC3E}">
         <p14:creationId xmlns:p14="http://schemas.microsoft.com/office/powerpoint/2010/main" val="3223712090"/>
+      </p:ext>
+    </p:extLst>
+  </p:cSld>
+  <p:clrMapOvr>
+    <a:masterClrMapping/>
+  </p:clrMapOvr>
+</p:sld>
+</file>
+
+<file path=ppt/slides/slide10.xml><?xml version="1.0" encoding="utf-8"?>
+<p:sld xmlns:a="http://schemas.openxmlformats.org/drawingml/2006/main" xmlns:r="http://schemas.openxmlformats.org/officeDocument/2006/relationships" xmlns:p="http://schemas.openxmlformats.org/presentationml/2006/main">
+  <p:cSld>
+    <p:spTree>
+      <p:nvGrpSpPr>
+        <p:cNvPr id="1" name=""/>
+        <p:cNvGrpSpPr/>
+        <p:nvPr/>
+      </p:nvGrpSpPr>
+      <p:grpSpPr>
+        <a:xfrm>
+          <a:off x="0" y="0"/>
+          <a:ext cx="0" cy="0"/>
+          <a:chOff x="0" y="0"/>
+          <a:chExt cx="0" cy="0"/>
+        </a:xfrm>
+      </p:grpSpPr>
+      <p:sp>
+        <p:nvSpPr>
+          <p:cNvPr id="2" name="Tytuł 1">
+            <a:extLst>
+              <a:ext uri="{FF2B5EF4-FFF2-40B4-BE49-F238E27FC236}">
+                <a16:creationId xmlns:a16="http://schemas.microsoft.com/office/drawing/2014/main" id="{9A644413-B022-43F3-DC9E-8DB942188C9F}"/>
+              </a:ext>
+            </a:extLst>
+          </p:cNvPr>
+          <p:cNvSpPr>
+            <a:spLocks noGrp="1"/>
+          </p:cNvSpPr>
+          <p:nvPr>
+            <p:ph type="title"/>
+          </p:nvPr>
+        </p:nvSpPr>
+        <p:spPr/>
+        <p:txBody>
+          <a:bodyPr/>
+          <a:lstStyle/>
+          <a:p>
+            <a:pPr algn="ctr"/>
+            <a:r>
+              <a:rPr lang="pl-PL" dirty="0"/>
+              <a:t>Wykrywanie przykładów </a:t>
+            </a:r>
+            <a:r>
+              <a:rPr lang="pl-PL" dirty="0" err="1"/>
+              <a:t>OoD</a:t>
+            </a:r>
+            <a:endParaRPr lang="pl-PL" dirty="0"/>
+          </a:p>
+        </p:txBody>
+      </p:sp>
+      <p:sp>
+        <p:nvSpPr>
+          <p:cNvPr id="3" name="Symbol zastępczy zawartości 2">
+            <a:extLst>
+              <a:ext uri="{FF2B5EF4-FFF2-40B4-BE49-F238E27FC236}">
+                <a16:creationId xmlns:a16="http://schemas.microsoft.com/office/drawing/2014/main" id="{545B6A7F-159F-3108-C374-8FB504C40639}"/>
+              </a:ext>
+            </a:extLst>
+          </p:cNvPr>
+          <p:cNvSpPr>
+            <a:spLocks noGrp="1"/>
+          </p:cNvSpPr>
+          <p:nvPr>
+            <p:ph idx="1"/>
+          </p:nvPr>
+        </p:nvSpPr>
+        <p:spPr>
+          <a:xfrm>
+            <a:off x="838200" y="3151188"/>
+            <a:ext cx="10515600" cy="1325563"/>
+          </a:xfrm>
+        </p:spPr>
+        <p:txBody>
+          <a:bodyPr/>
+          <a:lstStyle/>
+          <a:p>
+            <a:r>
+              <a:rPr lang="pl-PL" dirty="0"/>
+              <a:t>Dodatkowo </a:t>
+            </a:r>
+            <a:r>
+              <a:rPr lang="pl-PL" dirty="0" err="1"/>
+              <a:t>VoG</a:t>
+            </a:r>
+            <a:r>
+              <a:rPr lang="pl-PL" dirty="0"/>
+              <a:t> wykazał zdolność do wykrywania przykładów </a:t>
+            </a:r>
+            <a:br>
+              <a:rPr lang="pl-PL" dirty="0"/>
+            </a:br>
+            <a:r>
+              <a:rPr lang="pl-PL" dirty="0"/>
+              <a:t>Out of Distribution (</a:t>
+            </a:r>
+            <a:r>
+              <a:rPr lang="pl-PL" dirty="0" err="1"/>
+              <a:t>OoD</a:t>
+            </a:r>
+            <a:r>
+              <a:rPr lang="pl-PL" dirty="0"/>
+              <a:t>) lepszą od większości innych metod, które wzięli pod lupę badacze.</a:t>
+            </a:r>
+          </a:p>
+        </p:txBody>
+      </p:sp>
+    </p:spTree>
+    <p:extLst>
+      <p:ext uri="{BB962C8B-B14F-4D97-AF65-F5344CB8AC3E}">
+        <p14:creationId xmlns:p14="http://schemas.microsoft.com/office/powerpoint/2010/main" val="93877577"/>
+      </p:ext>
+    </p:extLst>
+  </p:cSld>
+  <p:clrMapOvr>
+    <a:masterClrMapping/>
+  </p:clrMapOvr>
+</p:sld>
+</file>
+
+<file path=ppt/slides/slide11.xml><?xml version="1.0" encoding="utf-8"?>
+<p:sld xmlns:a="http://schemas.openxmlformats.org/drawingml/2006/main" xmlns:r="http://schemas.openxmlformats.org/officeDocument/2006/relationships" xmlns:p="http://schemas.openxmlformats.org/presentationml/2006/main">
+  <p:cSld>
+    <p:spTree>
+      <p:nvGrpSpPr>
+        <p:cNvPr id="1" name=""/>
+        <p:cNvGrpSpPr/>
+        <p:nvPr/>
+      </p:nvGrpSpPr>
+      <p:grpSpPr>
+        <a:xfrm>
+          <a:off x="0" y="0"/>
+          <a:ext cx="0" cy="0"/>
+          <a:chOff x="0" y="0"/>
+          <a:chExt cx="0" cy="0"/>
+        </a:xfrm>
+      </p:grpSpPr>
+      <p:sp>
+        <p:nvSpPr>
+          <p:cNvPr id="2" name="Tytuł 1">
+            <a:extLst>
+              <a:ext uri="{FF2B5EF4-FFF2-40B4-BE49-F238E27FC236}">
+                <a16:creationId xmlns:a16="http://schemas.microsoft.com/office/drawing/2014/main" id="{526D68EC-195E-5901-E2B9-36BCC69CF65D}"/>
+              </a:ext>
+            </a:extLst>
+          </p:cNvPr>
+          <p:cNvSpPr>
+            <a:spLocks noGrp="1"/>
+          </p:cNvSpPr>
+          <p:nvPr>
+            <p:ph type="title"/>
+          </p:nvPr>
+        </p:nvSpPr>
+        <p:spPr/>
+        <p:txBody>
+          <a:bodyPr/>
+          <a:lstStyle/>
+          <a:p>
+            <a:r>
+              <a:rPr lang="pl-PL" dirty="0"/>
+              <a:t>Oryginalny kod źródłowy</a:t>
+            </a:r>
+          </a:p>
+        </p:txBody>
+      </p:sp>
+      <p:sp>
+        <p:nvSpPr>
+          <p:cNvPr id="3" name="Symbol zastępczy tekstu 2">
+            <a:extLst>
+              <a:ext uri="{FF2B5EF4-FFF2-40B4-BE49-F238E27FC236}">
+                <a16:creationId xmlns:a16="http://schemas.microsoft.com/office/drawing/2014/main" id="{36453CC4-19A3-BB10-7770-EBBFA7F5E73E}"/>
+              </a:ext>
+            </a:extLst>
+          </p:cNvPr>
+          <p:cNvSpPr>
+            <a:spLocks noGrp="1"/>
+          </p:cNvSpPr>
+          <p:nvPr>
+            <p:ph type="body" idx="1"/>
+          </p:nvPr>
+        </p:nvSpPr>
+        <p:spPr/>
+        <p:txBody>
+          <a:bodyPr/>
+          <a:lstStyle/>
+          <a:p>
+            <a:r>
+              <a:rPr lang="pl-PL" dirty="0"/>
+              <a:t>Autorzy udostępnili kod oraz </a:t>
+            </a:r>
+            <a:r>
+              <a:rPr lang="pl-PL" dirty="0" err="1"/>
+              <a:t>pobieralne</a:t>
+            </a:r>
+            <a:r>
+              <a:rPr lang="pl-PL" dirty="0"/>
+              <a:t> wyniki </a:t>
+            </a:r>
+            <a:r>
+              <a:rPr lang="pl-PL" dirty="0" err="1"/>
+              <a:t>VoG</a:t>
+            </a:r>
+            <a:r>
+              <a:rPr lang="pl-PL" dirty="0"/>
+              <a:t>.</a:t>
+            </a:r>
+          </a:p>
+          <a:p>
+            <a:r>
+              <a:rPr lang="pl-PL" dirty="0"/>
+              <a:t>Główne repozytorium GitHub:	</a:t>
+            </a:r>
+            <a:r>
+              <a:rPr lang="pl-PL" dirty="0" err="1"/>
+              <a:t>https</a:t>
+            </a:r>
+            <a:r>
+              <a:rPr lang="pl-PL" dirty="0"/>
+              <a:t>://</a:t>
+            </a:r>
+            <a:r>
+              <a:rPr lang="pl-PL" dirty="0" err="1"/>
+              <a:t>github.com</a:t>
+            </a:r>
+            <a:r>
+              <a:rPr lang="pl-PL" dirty="0"/>
+              <a:t>/chirag126/</a:t>
+            </a:r>
+            <a:r>
+              <a:rPr lang="pl-PL" dirty="0" err="1"/>
+              <a:t>VOG.git</a:t>
+            </a:r>
+            <a:endParaRPr lang="pl-PL" dirty="0"/>
+          </a:p>
+          <a:p>
+            <a:r>
+              <a:rPr lang="pl-PL" dirty="0"/>
+              <a:t>Strona domowa projektu:</a:t>
+            </a:r>
+          </a:p>
+          <a:p>
+            <a:pPr marL="0" indent="0">
+              <a:buNone/>
+            </a:pPr>
+            <a:r>
+              <a:rPr lang="pl-PL" dirty="0"/>
+              <a:t>	</a:t>
+            </a:r>
+            <a:r>
+              <a:rPr lang="pl-PL" dirty="0" err="1"/>
+              <a:t>https</a:t>
+            </a:r>
+            <a:r>
+              <a:rPr lang="pl-PL" dirty="0"/>
+              <a:t>://</a:t>
+            </a:r>
+            <a:r>
+              <a:rPr lang="pl-PL" dirty="0" err="1"/>
+              <a:t>varianceofgradients.github.io</a:t>
+            </a:r>
+            <a:r>
+              <a:rPr lang="pl-PL" dirty="0"/>
+              <a:t>/</a:t>
+            </a:r>
+          </a:p>
+        </p:txBody>
+      </p:sp>
+    </p:spTree>
+    <p:extLst>
+      <p:ext uri="{BB962C8B-B14F-4D97-AF65-F5344CB8AC3E}">
+        <p14:creationId xmlns:p14="http://schemas.microsoft.com/office/powerpoint/2010/main" val="668757634"/>
+      </p:ext>
+    </p:extLst>
+  </p:cSld>
+  <p:clrMapOvr>
+    <a:masterClrMapping/>
+  </p:clrMapOvr>
+</p:sld>
+</file>
+
+<file path=ppt/slides/slide12.xml><?xml version="1.0" encoding="utf-8"?>
+<p:sld xmlns:a="http://schemas.openxmlformats.org/drawingml/2006/main" xmlns:r="http://schemas.openxmlformats.org/officeDocument/2006/relationships" xmlns:p="http://schemas.openxmlformats.org/presentationml/2006/main">
+  <p:cSld>
+    <p:spTree>
+      <p:nvGrpSpPr>
+        <p:cNvPr id="1" name=""/>
+        <p:cNvGrpSpPr/>
+        <p:nvPr/>
+      </p:nvGrpSpPr>
+      <p:grpSpPr>
+        <a:xfrm>
+          <a:off x="0" y="0"/>
+          <a:ext cx="0" cy="0"/>
+          <a:chOff x="0" y="0"/>
+          <a:chExt cx="0" cy="0"/>
+        </a:xfrm>
+      </p:grpSpPr>
+      <p:sp>
+        <p:nvSpPr>
+          <p:cNvPr id="2" name="Tytuł 1">
+            <a:extLst>
+              <a:ext uri="{FF2B5EF4-FFF2-40B4-BE49-F238E27FC236}">
+                <a16:creationId xmlns:a16="http://schemas.microsoft.com/office/drawing/2014/main" id="{6029E30A-45CA-AC6E-D9FE-1B99CDDC70C4}"/>
+              </a:ext>
+            </a:extLst>
+          </p:cNvPr>
+          <p:cNvSpPr>
+            <a:spLocks noGrp="1"/>
+          </p:cNvSpPr>
+          <p:nvPr>
+            <p:ph type="title"/>
+          </p:nvPr>
+        </p:nvSpPr>
+        <p:spPr/>
+        <p:txBody>
+          <a:bodyPr/>
+          <a:lstStyle/>
+          <a:p>
+            <a:r>
+              <a:rPr lang="pl-PL" dirty="0"/>
+              <a:t>Krótkie omówienie kodu</a:t>
+            </a:r>
+          </a:p>
+        </p:txBody>
+      </p:sp>
+      <p:sp>
+        <p:nvSpPr>
+          <p:cNvPr id="4" name="Rectangle 1">
+            <a:extLst>
+              <a:ext uri="{FF2B5EF4-FFF2-40B4-BE49-F238E27FC236}">
+                <a16:creationId xmlns:a16="http://schemas.microsoft.com/office/drawing/2014/main" id="{C4161637-7F61-25B7-9EB1-15561802D1BE}"/>
+              </a:ext>
+            </a:extLst>
+          </p:cNvPr>
+          <p:cNvSpPr>
+            <a:spLocks noGrp="1" noChangeArrowheads="1"/>
+          </p:cNvSpPr>
+          <p:nvPr>
+            <p:ph type="body" idx="1"/>
+          </p:nvPr>
+        </p:nvSpPr>
+        <p:spPr bwMode="auto">
+          <a:xfrm>
+            <a:off x="949036" y="1706077"/>
+            <a:ext cx="9239054" cy="4170372"/>
+          </a:xfrm>
+          <a:prstGeom prst="rect">
+            <a:avLst/>
+          </a:prstGeom>
+          <a:noFill/>
+          <a:ln>
+            <a:noFill/>
+          </a:ln>
+          <a:effectLst/>
+          <a:extLst>
+            <a:ext uri="{909E8E84-426E-40DD-AFC4-6F175D3DCCD1}">
+              <a14:hiddenFill xmlns:a14="http://schemas.microsoft.com/office/drawing/2010/main">
+                <a:solidFill>
+                  <a:schemeClr val="accent1"/>
+                </a:solidFill>
+              </a14:hiddenFill>
+            </a:ext>
+            <a:ext uri="{91240B29-F687-4F45-9708-019B960494DF}">
+              <a14:hiddenLine xmlns:a14="http://schemas.microsoft.com/office/drawing/2010/main" w="9525">
+                <a:solidFill>
+                  <a:schemeClr val="tx1"/>
+                </a:solidFill>
+                <a:miter lim="800000"/>
+                <a:headEnd/>
+                <a:tailEnd/>
+              </a14:hiddenLine>
+            </a:ext>
+            <a:ext uri="{AF507438-7753-43E0-B8FC-AC1667EBCBE1}">
+              <a14:hiddenEffects xmlns:a14="http://schemas.microsoft.com/office/drawing/2010/main">
+                <a:effectLst>
+                  <a:outerShdw dist="35921" dir="2700000" algn="ctr" rotWithShape="0">
+                    <a:schemeClr val="bg2"/>
+                  </a:outerShdw>
+                </a:effectLst>
+              </a14:hiddenEffects>
+            </a:ext>
+          </a:extLst>
+        </p:spPr>
+        <p:txBody>
+          <a:bodyPr vert="horz" wrap="square" lIns="91440" tIns="0" rIns="91440" bIns="45720" numCol="1" anchor="ctr" anchorCtr="0" compatLnSpc="1">
+            <a:prstTxWarp prst="textNoShape">
+              <a:avLst/>
+            </a:prstTxWarp>
+            <a:spAutoFit/>
+          </a:bodyPr>
+          <a:lstStyle/>
+          <a:p>
+            <a:pPr marL="342900" marR="0" lvl="0" indent="-342900" algn="l" defTabSz="914400" rtl="0" eaLnBrk="0" fontAlgn="base" latinLnBrk="0" hangingPunct="0">
+              <a:lnSpc>
+                <a:spcPct val="100000"/>
+              </a:lnSpc>
+              <a:spcBef>
+                <a:spcPct val="0"/>
+              </a:spcBef>
+              <a:spcAft>
+                <a:spcPct val="0"/>
+              </a:spcAft>
+              <a:buClrTx/>
+              <a:buSzTx/>
+              <a:buFont typeface="+mj-lt"/>
+              <a:buAutoNum type="arabicPeriod"/>
+              <a:tabLst/>
+            </a:pPr>
+            <a:r>
+              <a:rPr kumimoji="0" lang="pl-PL" altLang="pl-PL" sz="1800" b="1" i="0" u="none" strike="noStrike" cap="none" normalizeH="0" baseline="0" dirty="0">
+                <a:ln>
+                  <a:noFill/>
+                </a:ln>
+                <a:solidFill>
+                  <a:schemeClr val="tx1"/>
+                </a:solidFill>
+                <a:effectLst/>
+              </a:rPr>
+              <a:t>Trening i zapisywanie stanu</a:t>
+            </a:r>
+          </a:p>
+          <a:p>
+            <a:pPr lvl="1" eaLnBrk="0" fontAlgn="base" hangingPunct="0">
+              <a:lnSpc>
+                <a:spcPct val="100000"/>
+              </a:lnSpc>
+              <a:spcBef>
+                <a:spcPct val="0"/>
+              </a:spcBef>
+              <a:spcAft>
+                <a:spcPct val="0"/>
+              </a:spcAft>
+            </a:pPr>
+            <a:r>
+              <a:rPr kumimoji="0" lang="pl-PL" altLang="pl-PL" sz="1400" b="1" i="0" u="none" strike="noStrike" cap="none" normalizeH="0" baseline="0" dirty="0">
+                <a:ln>
+                  <a:noFill/>
+                </a:ln>
+                <a:solidFill>
+                  <a:schemeClr val="tx1"/>
+                </a:solidFill>
+                <a:effectLst/>
+              </a:rPr>
+              <a:t>Trening:</a:t>
+            </a:r>
+            <a:r>
+              <a:rPr kumimoji="0" lang="pl-PL" altLang="pl-PL" sz="1400" b="0" i="0" u="none" strike="noStrike" cap="none" normalizeH="0" baseline="0" dirty="0">
+                <a:ln>
+                  <a:noFill/>
+                </a:ln>
+                <a:solidFill>
+                  <a:schemeClr val="tx1"/>
+                </a:solidFill>
+                <a:effectLst/>
+              </a:rPr>
+              <a:t> Uczenie modeli (ResNet-18 dla zbiorów </a:t>
+            </a:r>
+            <a:r>
+              <a:rPr kumimoji="0" lang="pl-PL" altLang="pl-PL" sz="1400" b="0" i="0" u="none" strike="noStrike" cap="none" normalizeH="0" baseline="0" dirty="0" err="1">
+                <a:ln>
+                  <a:noFill/>
+                </a:ln>
+                <a:solidFill>
+                  <a:schemeClr val="tx1"/>
+                </a:solidFill>
+                <a:effectLst/>
+              </a:rPr>
+              <a:t>Cifar</a:t>
+            </a:r>
+            <a:r>
+              <a:rPr kumimoji="0" lang="pl-PL" altLang="pl-PL" sz="1400" b="0" i="0" u="none" strike="noStrike" cap="none" normalizeH="0" baseline="0" dirty="0">
+                <a:ln>
+                  <a:noFill/>
+                </a:ln>
+                <a:solidFill>
+                  <a:schemeClr val="tx1"/>
+                </a:solidFill>
+                <a:effectLst/>
+              </a:rPr>
+              <a:t>, ResNet-50 dla </a:t>
+            </a:r>
+            <a:r>
+              <a:rPr kumimoji="0" lang="pl-PL" altLang="pl-PL" sz="1400" b="0" i="0" u="none" strike="noStrike" cap="none" normalizeH="0" baseline="0" dirty="0" err="1">
+                <a:ln>
+                  <a:noFill/>
+                </a:ln>
+                <a:solidFill>
+                  <a:schemeClr val="tx1"/>
+                </a:solidFill>
+                <a:effectLst/>
+              </a:rPr>
+              <a:t>ImageNet</a:t>
+            </a:r>
+            <a:r>
+              <a:rPr kumimoji="0" lang="pl-PL" altLang="pl-PL" sz="1400" b="0" i="0" u="none" strike="noStrike" cap="none" normalizeH="0" baseline="0" dirty="0">
+                <a:ln>
+                  <a:noFill/>
+                </a:ln>
+                <a:solidFill>
+                  <a:schemeClr val="tx1"/>
+                </a:solidFill>
+                <a:effectLst/>
+              </a:rPr>
+              <a:t>) za pomocą algorytmu SGD, ze standardową augmentacją danych (przycinanie, odbicia lustrzane </a:t>
+            </a:r>
+            <a:r>
+              <a:rPr kumimoji="0" lang="pl-PL" altLang="pl-PL" sz="1400" b="0" i="0" u="none" strike="noStrike" cap="none" normalizeH="0" baseline="0" dirty="0" err="1">
+                <a:ln>
+                  <a:noFill/>
+                </a:ln>
+                <a:solidFill>
+                  <a:schemeClr val="tx1"/>
+                </a:solidFill>
+                <a:effectLst/>
+              </a:rPr>
+              <a:t>itp</a:t>
+            </a:r>
+            <a:r>
+              <a:rPr kumimoji="0" lang="pl-PL" altLang="pl-PL" sz="1400" b="0" i="0" u="none" strike="noStrike" cap="none" normalizeH="0" baseline="0" dirty="0">
+                <a:ln>
+                  <a:noFill/>
+                </a:ln>
+                <a:solidFill>
+                  <a:schemeClr val="tx1"/>
+                </a:solidFill>
+                <a:effectLst/>
+              </a:rPr>
+              <a:t>).</a:t>
+            </a:r>
+          </a:p>
+          <a:p>
+            <a:pPr lvl="1" eaLnBrk="0" fontAlgn="base" hangingPunct="0">
+              <a:lnSpc>
+                <a:spcPct val="100000"/>
+              </a:lnSpc>
+              <a:spcBef>
+                <a:spcPct val="0"/>
+              </a:spcBef>
+              <a:spcAft>
+                <a:spcPct val="0"/>
+              </a:spcAft>
+            </a:pPr>
+            <a:r>
+              <a:rPr kumimoji="0" lang="pl-PL" altLang="pl-PL" sz="1400" b="1" i="0" u="none" strike="noStrike" cap="none" normalizeH="0" baseline="0" dirty="0" err="1">
+                <a:ln>
+                  <a:noFill/>
+                </a:ln>
+                <a:solidFill>
+                  <a:schemeClr val="tx1"/>
+                </a:solidFill>
+                <a:effectLst/>
+              </a:rPr>
+              <a:t>Checkpoints</a:t>
+            </a:r>
+            <a:r>
+              <a:rPr kumimoji="0" lang="pl-PL" altLang="pl-PL" sz="1400" b="1" i="0" u="none" strike="noStrike" cap="none" normalizeH="0" baseline="0" dirty="0">
+                <a:ln>
+                  <a:noFill/>
+                </a:ln>
+                <a:solidFill>
+                  <a:schemeClr val="tx1"/>
+                </a:solidFill>
+                <a:effectLst/>
+              </a:rPr>
+              <a:t>:</a:t>
+            </a:r>
+            <a:r>
+              <a:rPr kumimoji="0" lang="pl-PL" altLang="pl-PL" sz="1400" b="0" i="0" u="none" strike="noStrike" cap="none" normalizeH="0" baseline="0" dirty="0">
+                <a:ln>
+                  <a:noFill/>
+                </a:ln>
+                <a:solidFill>
+                  <a:schemeClr val="tx1"/>
+                </a:solidFill>
+                <a:effectLst/>
+              </a:rPr>
+              <a:t> Zapisywanie wag modelu w trakcie nauki – co 10 epok dla </a:t>
+            </a:r>
+            <a:r>
+              <a:rPr kumimoji="0" lang="pl-PL" altLang="pl-PL" sz="1400" b="0" i="0" u="none" strike="noStrike" cap="none" normalizeH="0" baseline="0" dirty="0" err="1">
+                <a:ln>
+                  <a:noFill/>
+                </a:ln>
+                <a:solidFill>
+                  <a:schemeClr val="tx1"/>
+                </a:solidFill>
+                <a:effectLst/>
+              </a:rPr>
+              <a:t>Cifar</a:t>
+            </a:r>
+            <a:r>
+              <a:rPr kumimoji="0" lang="pl-PL" altLang="pl-PL" sz="1400" b="0" i="0" u="none" strike="noStrike" cap="none" normalizeH="0" baseline="0" dirty="0">
+                <a:ln>
+                  <a:noFill/>
+                </a:ln>
+                <a:solidFill>
+                  <a:schemeClr val="tx1"/>
+                </a:solidFill>
+                <a:effectLst/>
+              </a:rPr>
+              <a:t> lub 32 razy w trakcie całego treningu dla </a:t>
+            </a:r>
+            <a:r>
+              <a:rPr kumimoji="0" lang="pl-PL" altLang="pl-PL" sz="1400" b="0" i="0" u="none" strike="noStrike" cap="none" normalizeH="0" baseline="0" dirty="0" err="1">
+                <a:ln>
+                  <a:noFill/>
+                </a:ln>
+                <a:solidFill>
+                  <a:schemeClr val="tx1"/>
+                </a:solidFill>
+                <a:effectLst/>
+              </a:rPr>
+              <a:t>ImageNet</a:t>
+            </a:r>
+            <a:r>
+              <a:rPr kumimoji="0" lang="pl-PL" altLang="pl-PL" sz="1400" b="0" i="0" u="none" strike="noStrike" cap="none" normalizeH="0" baseline="0" dirty="0">
+                <a:ln>
+                  <a:noFill/>
+                </a:ln>
+                <a:solidFill>
+                  <a:schemeClr val="tx1"/>
+                </a:solidFill>
+                <a:effectLst/>
+              </a:rPr>
+              <a:t>.</a:t>
+            </a:r>
+          </a:p>
+          <a:p>
+            <a:pPr marL="342900" indent="-342900" eaLnBrk="0" fontAlgn="base" hangingPunct="0">
+              <a:lnSpc>
+                <a:spcPct val="100000"/>
+              </a:lnSpc>
+              <a:spcBef>
+                <a:spcPct val="0"/>
+              </a:spcBef>
+              <a:spcAft>
+                <a:spcPct val="0"/>
+              </a:spcAft>
+              <a:buFont typeface="+mj-lt"/>
+              <a:buAutoNum type="arabicPeriod"/>
+            </a:pPr>
+            <a:r>
+              <a:rPr kumimoji="0" lang="pl-PL" altLang="pl-PL" sz="1800" b="1" i="0" u="none" strike="noStrike" cap="none" normalizeH="0" baseline="0" dirty="0">
+                <a:ln>
+                  <a:noFill/>
+                </a:ln>
+                <a:solidFill>
+                  <a:schemeClr val="tx1"/>
+                </a:solidFill>
+                <a:effectLst/>
+              </a:rPr>
+              <a:t>Wyliczanie metryki </a:t>
+            </a:r>
+          </a:p>
+          <a:p>
+            <a:pPr lvl="1" eaLnBrk="0" fontAlgn="base" hangingPunct="0">
+              <a:lnSpc>
+                <a:spcPct val="100000"/>
+              </a:lnSpc>
+              <a:spcBef>
+                <a:spcPct val="0"/>
+              </a:spcBef>
+              <a:spcAft>
+                <a:spcPct val="0"/>
+              </a:spcAft>
+            </a:pPr>
+            <a:r>
+              <a:rPr kumimoji="0" lang="pl-PL" altLang="pl-PL" sz="1400" b="1" i="0" u="none" strike="noStrike" cap="none" normalizeH="0" baseline="0" dirty="0">
+                <a:ln>
+                  <a:noFill/>
+                </a:ln>
+                <a:solidFill>
+                  <a:schemeClr val="tx1"/>
+                </a:solidFill>
+                <a:effectLst/>
+              </a:rPr>
+              <a:t>Pobranie gradientów:</a:t>
+            </a:r>
+            <a:r>
+              <a:rPr kumimoji="0" lang="pl-PL" altLang="pl-PL" sz="1400" b="0" i="0" u="none" strike="noStrike" cap="none" normalizeH="0" baseline="0" dirty="0">
+                <a:ln>
+                  <a:noFill/>
+                </a:ln>
+                <a:solidFill>
+                  <a:schemeClr val="tx1"/>
+                </a:solidFill>
+                <a:effectLst/>
+              </a:rPr>
+              <a:t> Wybór K punktów kontrolnych. Dla każdego obrazu sieć oblicza gradient aktywacji warstwy </a:t>
+            </a:r>
+            <a:r>
+              <a:rPr kumimoji="0" lang="pl-PL" altLang="pl-PL" sz="1400" b="0" i="0" u="none" strike="noStrike" cap="none" normalizeH="0" baseline="0" dirty="0" err="1">
+                <a:ln>
+                  <a:noFill/>
+                </a:ln>
+                <a:solidFill>
+                  <a:schemeClr val="tx1"/>
+                </a:solidFill>
+                <a:effectLst/>
+              </a:rPr>
+              <a:t>pre-softmax</a:t>
+            </a:r>
+            <a:r>
+              <a:rPr kumimoji="0" lang="pl-PL" altLang="pl-PL" sz="1400" b="0" i="0" u="none" strike="noStrike" cap="none" normalizeH="0" baseline="0" dirty="0">
+                <a:ln>
+                  <a:noFill/>
+                </a:ln>
+                <a:solidFill>
+                  <a:schemeClr val="tx1"/>
+                </a:solidFill>
+                <a:effectLst/>
+              </a:rPr>
+              <a:t> w stosunku do pikseli wejściowych.</a:t>
+            </a:r>
+          </a:p>
+          <a:p>
+            <a:pPr lvl="1" eaLnBrk="0" fontAlgn="base" hangingPunct="0">
+              <a:lnSpc>
+                <a:spcPct val="100000"/>
+              </a:lnSpc>
+              <a:spcBef>
+                <a:spcPct val="0"/>
+              </a:spcBef>
+              <a:spcAft>
+                <a:spcPct val="0"/>
+              </a:spcAft>
+            </a:pPr>
+            <a:r>
+              <a:rPr kumimoji="0" lang="pl-PL" altLang="pl-PL" sz="1400" b="1" i="0" u="none" strike="noStrike" cap="none" normalizeH="0" baseline="0" dirty="0">
+                <a:ln>
+                  <a:noFill/>
+                </a:ln>
+                <a:solidFill>
+                  <a:schemeClr val="tx1"/>
+                </a:solidFill>
+                <a:effectLst/>
+              </a:rPr>
+              <a:t>Agregacja:</a:t>
+            </a:r>
+            <a:r>
+              <a:rPr kumimoji="0" lang="pl-PL" altLang="pl-PL" sz="1400" b="0" i="0" u="none" strike="noStrike" cap="none" normalizeH="0" baseline="0" dirty="0">
+                <a:ln>
+                  <a:noFill/>
+                </a:ln>
+                <a:solidFill>
+                  <a:schemeClr val="tx1"/>
+                </a:solidFill>
+                <a:effectLst/>
+              </a:rPr>
+              <a:t> Gradienty uśrednia się po kanałach kolorów. Następnie algorytm oblicza wariancję tych gradientów (ich zmienność) na przestrzeni wybranych punktów kontrolnych.</a:t>
+            </a:r>
+          </a:p>
+          <a:p>
+            <a:pPr lvl="1" eaLnBrk="0" fontAlgn="base" hangingPunct="0">
+              <a:lnSpc>
+                <a:spcPct val="100000"/>
+              </a:lnSpc>
+              <a:spcBef>
+                <a:spcPct val="0"/>
+              </a:spcBef>
+              <a:spcAft>
+                <a:spcPct val="0"/>
+              </a:spcAft>
+            </a:pPr>
+            <a:r>
+              <a:rPr kumimoji="0" lang="pl-PL" altLang="pl-PL" sz="1400" b="1" i="0" u="none" strike="noStrike" cap="none" normalizeH="0" baseline="0" dirty="0">
+                <a:ln>
+                  <a:noFill/>
+                </a:ln>
+                <a:solidFill>
+                  <a:schemeClr val="tx1"/>
+                </a:solidFill>
+                <a:effectLst/>
+              </a:rPr>
+              <a:t>Wynik końcowy:</a:t>
+            </a:r>
+            <a:r>
+              <a:rPr kumimoji="0" lang="pl-PL" altLang="pl-PL" sz="1400" b="0" i="0" u="none" strike="noStrike" cap="none" normalizeH="0" baseline="0" dirty="0">
+                <a:ln>
+                  <a:noFill/>
+                </a:ln>
+                <a:solidFill>
+                  <a:schemeClr val="tx1"/>
+                </a:solidFill>
+                <a:effectLst/>
+              </a:rPr>
+              <a:t> Wariancje wszystkich pikseli są uśredniane do jednej liczby dla całego obrazu. Wynik ten jest na koniec normalizowany względem średniej dla danej klasy.</a:t>
+            </a:r>
+          </a:p>
+          <a:p>
+            <a:pPr marL="342900" indent="-342900" eaLnBrk="0" fontAlgn="base" hangingPunct="0">
+              <a:lnSpc>
+                <a:spcPct val="100000"/>
+              </a:lnSpc>
+              <a:spcBef>
+                <a:spcPct val="0"/>
+              </a:spcBef>
+              <a:spcAft>
+                <a:spcPct val="0"/>
+              </a:spcAft>
+              <a:buFont typeface="+mj-lt"/>
+              <a:buAutoNum type="arabicPeriod"/>
+            </a:pPr>
+            <a:r>
+              <a:rPr kumimoji="0" lang="pl-PL" altLang="pl-PL" sz="1800" b="1" i="0" u="none" strike="noStrike" cap="none" normalizeH="0" baseline="0" dirty="0">
+                <a:ln>
+                  <a:noFill/>
+                </a:ln>
+                <a:solidFill>
+                  <a:schemeClr val="tx1"/>
+                </a:solidFill>
+                <a:effectLst/>
+              </a:rPr>
+              <a:t>Zastosowanie i ewaluacja</a:t>
+            </a:r>
+          </a:p>
+          <a:p>
+            <a:pPr lvl="1" eaLnBrk="0" fontAlgn="base" hangingPunct="0">
+              <a:lnSpc>
+                <a:spcPct val="100000"/>
+              </a:lnSpc>
+              <a:spcBef>
+                <a:spcPct val="0"/>
+              </a:spcBef>
+              <a:spcAft>
+                <a:spcPct val="0"/>
+              </a:spcAft>
+            </a:pPr>
+            <a:r>
+              <a:rPr kumimoji="0" lang="pl-PL" altLang="pl-PL" sz="1400" b="1" i="0" u="none" strike="noStrike" cap="none" normalizeH="0" baseline="0" dirty="0">
+                <a:ln>
+                  <a:noFill/>
+                </a:ln>
+                <a:solidFill>
+                  <a:schemeClr val="tx1"/>
+                </a:solidFill>
+                <a:effectLst/>
+              </a:rPr>
+              <a:t>Ranking:</a:t>
+            </a:r>
+            <a:r>
+              <a:rPr kumimoji="0" lang="pl-PL" altLang="pl-PL" sz="1400" b="0" i="0" u="none" strike="noStrike" cap="none" normalizeH="0" baseline="0" dirty="0">
+                <a:ln>
+                  <a:noFill/>
+                </a:ln>
+                <a:solidFill>
+                  <a:schemeClr val="tx1"/>
+                </a:solidFill>
+                <a:effectLst/>
+              </a:rPr>
+              <a:t> Posortowanie zbioru danych na podstawie obliczonego wyniku </a:t>
+            </a:r>
+            <a:r>
+              <a:rPr kumimoji="0" lang="pl-PL" altLang="pl-PL" sz="1400" b="0" i="0" u="none" strike="noStrike" cap="none" normalizeH="0" baseline="0" dirty="0" err="1">
+                <a:ln>
+                  <a:noFill/>
+                </a:ln>
+                <a:solidFill>
+                  <a:schemeClr val="tx1"/>
+                </a:solidFill>
+                <a:effectLst/>
+              </a:rPr>
+              <a:t>VoG</a:t>
+            </a:r>
+            <a:r>
+              <a:rPr kumimoji="0" lang="pl-PL" altLang="pl-PL" sz="1400" b="0" i="0" u="none" strike="noStrike" cap="none" normalizeH="0" baseline="0" dirty="0">
+                <a:ln>
+                  <a:noFill/>
+                </a:ln>
+                <a:solidFill>
+                  <a:schemeClr val="tx1"/>
+                </a:solidFill>
+                <a:effectLst/>
+              </a:rPr>
+              <a:t>.</a:t>
+            </a:r>
+            <a:endParaRPr lang="pl-PL" altLang="pl-PL" sz="1400" dirty="0"/>
+          </a:p>
+          <a:p>
+            <a:pPr lvl="1" eaLnBrk="0" fontAlgn="base" hangingPunct="0">
+              <a:lnSpc>
+                <a:spcPct val="100000"/>
+              </a:lnSpc>
+              <a:spcBef>
+                <a:spcPct val="0"/>
+              </a:spcBef>
+              <a:spcAft>
+                <a:spcPct val="0"/>
+              </a:spcAft>
+            </a:pPr>
+            <a:r>
+              <a:rPr kumimoji="0" lang="pl-PL" altLang="pl-PL" sz="1400" b="1" i="0" u="none" strike="noStrike" cap="none" normalizeH="0" baseline="0" dirty="0">
+                <a:ln>
+                  <a:noFill/>
+                </a:ln>
+                <a:solidFill>
+                  <a:schemeClr val="tx1"/>
+                </a:solidFill>
+                <a:effectLst/>
+              </a:rPr>
+              <a:t>Audyt:</a:t>
+            </a:r>
+            <a:r>
+              <a:rPr kumimoji="0" lang="pl-PL" altLang="pl-PL" sz="1400" b="0" i="0" u="none" strike="noStrike" cap="none" normalizeH="0" baseline="0" dirty="0">
+                <a:ln>
+                  <a:noFill/>
+                </a:ln>
+                <a:solidFill>
+                  <a:schemeClr val="tx1"/>
+                </a:solidFill>
+                <a:effectLst/>
+              </a:rPr>
+              <a:t> Wykorzystanie rankingu do wykrywania trudnych próbek , odnajdywania danych spoza rozkładu (</a:t>
+            </a:r>
+            <a:r>
+              <a:rPr kumimoji="0" lang="pl-PL" altLang="pl-PL" sz="1400" b="0" i="0" u="none" strike="noStrike" cap="none" normalizeH="0" baseline="0" dirty="0" err="1">
+                <a:ln>
+                  <a:noFill/>
+                </a:ln>
+                <a:solidFill>
+                  <a:schemeClr val="tx1"/>
+                </a:solidFill>
+                <a:effectLst/>
+              </a:rPr>
+              <a:t>OoD</a:t>
+            </a:r>
+            <a:r>
+              <a:rPr kumimoji="0" lang="pl-PL" altLang="pl-PL" sz="1400" b="0" i="0" u="none" strike="noStrike" cap="none" normalizeH="0" baseline="0" dirty="0">
+                <a:ln>
+                  <a:noFill/>
+                </a:ln>
+                <a:solidFill>
+                  <a:schemeClr val="tx1"/>
+                </a:solidFill>
+                <a:effectLst/>
+              </a:rPr>
+              <a:t>) oraz identyfikacji przykładów, które model musiał "zapamiętać na siłę" (np. z celowo podmienionymi etykietami).</a:t>
+            </a:r>
+          </a:p>
+          <a:p>
+            <a:pPr marL="0" marR="0" lvl="0" indent="0" algn="l" defTabSz="914400" rtl="0" eaLnBrk="0" fontAlgn="base" latinLnBrk="0" hangingPunct="0">
+              <a:lnSpc>
+                <a:spcPct val="100000"/>
+              </a:lnSpc>
+              <a:spcBef>
+                <a:spcPct val="0"/>
+              </a:spcBef>
+              <a:spcAft>
+                <a:spcPct val="0"/>
+              </a:spcAft>
+              <a:buClrTx/>
+              <a:buSzTx/>
+              <a:buFontTx/>
+              <a:buNone/>
+              <a:tabLst/>
+            </a:pPr>
+            <a:endParaRPr kumimoji="0" lang="pl-PL" altLang="pl-PL" sz="1800" b="0" i="0" u="none" strike="noStrike" cap="none" normalizeH="0" baseline="0" dirty="0">
+              <a:ln>
+                <a:noFill/>
+              </a:ln>
+              <a:solidFill>
+                <a:schemeClr val="tx1"/>
+              </a:solidFill>
+              <a:effectLst/>
+              <a:latin typeface="Arial" panose="020B0604020202020204" pitchFamily="34" charset="0"/>
+            </a:endParaRPr>
+          </a:p>
+        </p:txBody>
+      </p:sp>
+    </p:spTree>
+    <p:extLst>
+      <p:ext uri="{BB962C8B-B14F-4D97-AF65-F5344CB8AC3E}">
+        <p14:creationId xmlns:p14="http://schemas.microsoft.com/office/powerpoint/2010/main" val="4071234729"/>
       </p:ext>
     </p:extLst>
   </p:cSld>
@@ -3616,7 +7807,7 @@
           <p:cNvPr id="2" name="Tytuł 1">
             <a:extLst>
               <a:ext uri="{FF2B5EF4-FFF2-40B4-BE49-F238E27FC236}">
-                <a16:creationId xmlns:a16="http://schemas.microsoft.com/office/drawing/2014/main" id="{E99A93D3-21BA-10DB-6A64-68736341AB15}"/>
+                <a16:creationId xmlns:a16="http://schemas.microsoft.com/office/drawing/2014/main" id="{190B42A1-B470-F329-5446-0B100BEF5F69}"/>
               </a:ext>
             </a:extLst>
           </p:cNvPr>
@@ -3632,83 +7823,48 @@
           <a:bodyPr/>
           <a:lstStyle/>
           <a:p>
-            <a:r>
-              <a:rPr lang="pl-PL"/>
-              <a:t>Podstawa logiki - Ranking oparty na gradientach</a:t>
-            </a:r>
-          </a:p>
-        </p:txBody>
-      </p:sp>
-      <p:sp>
-        <p:nvSpPr>
-          <p:cNvPr id="3" name="Symbol zastępczy tekstu 2">
-            <a:extLst>
-              <a:ext uri="{FF2B5EF4-FFF2-40B4-BE49-F238E27FC236}">
-                <a16:creationId xmlns:a16="http://schemas.microsoft.com/office/drawing/2014/main" id="{938DD198-D76C-3590-FC2D-B5474879CC3E}"/>
-              </a:ext>
-            </a:extLst>
-          </p:cNvPr>
-          <p:cNvSpPr>
-            <a:spLocks noGrp="1"/>
-          </p:cNvSpPr>
-          <p:nvPr>
-            <p:ph type="body" idx="1"/>
-          </p:nvPr>
-        </p:nvSpPr>
-        <p:spPr/>
-        <p:txBody>
-          <a:bodyPr/>
-          <a:lstStyle/>
-          <a:p>
-            <a:r>
-              <a:rPr lang="pl-PL" dirty="0" err="1"/>
-              <a:t>VoG</a:t>
-            </a:r>
+            <a:pPr algn="ctr"/>
             <a:r>
               <a:rPr lang="pl-PL" dirty="0"/>
-              <a:t> to ranking oparty na gradientach, </a:t>
-            </a:r>
-            <a:r>
-              <a:rPr lang="pl-PL" dirty="0" err="1"/>
-              <a:t>mierzacy</a:t>
-            </a:r>
+              <a:t>Które przykłady są trudne do sklasyfikowania?</a:t>
+            </a:r>
+          </a:p>
+        </p:txBody>
+      </p:sp>
+      <p:sp>
+        <p:nvSpPr>
+          <p:cNvPr id="3" name="Symbol zastępczy zawartości 2">
+            <a:extLst>
+              <a:ext uri="{FF2B5EF4-FFF2-40B4-BE49-F238E27FC236}">
+                <a16:creationId xmlns:a16="http://schemas.microsoft.com/office/drawing/2014/main" id="{B5A37628-E732-53A7-E03E-33BAD3587FA3}"/>
+              </a:ext>
+            </a:extLst>
+          </p:cNvPr>
+          <p:cNvSpPr>
+            <a:spLocks noGrp="1"/>
+          </p:cNvSpPr>
+          <p:nvPr>
+            <p:ph idx="1"/>
+          </p:nvPr>
+        </p:nvSpPr>
+        <p:spPr>
+          <a:xfrm>
+            <a:off x="838200" y="2344642"/>
+            <a:ext cx="10515600" cy="2168716"/>
+          </a:xfrm>
+        </p:spPr>
+        <p:txBody>
+          <a:bodyPr>
+            <a:normAutofit/>
+          </a:bodyPr>
+          <a:lstStyle/>
+          <a:p>
+            <a:pPr marL="0" indent="0" algn="ctr">
+              <a:buNone/>
+            </a:pPr>
             <a:r>
               <a:rPr lang="pl-PL" dirty="0"/>
-              <a:t> </a:t>
-            </a:r>
-            <a:r>
-              <a:rPr lang="pl-PL" dirty="0" err="1"/>
-              <a:t>zmiennosc</a:t>
-            </a:r>
-            <a:r>
-              <a:rPr lang="pl-PL" dirty="0"/>
-              <a:t> </a:t>
-            </a:r>
-            <a:r>
-              <a:rPr lang="pl-PL" dirty="0" err="1"/>
-              <a:t>wyjasnien</a:t>
-            </a:r>
-            <a:r>
-              <a:rPr lang="pl-PL" dirty="0"/>
-              <a:t> w czasie treningu.</a:t>
-            </a:r>
-          </a:p>
-          <a:p>
-            <a:r>
-              <a:rPr lang="pl-PL" dirty="0"/>
-              <a:t>Przykłady trudne do nauczenia wykazują wyższą wariancję w aktualizacjach gradientów przez cały okres treningu.</a:t>
-            </a:r>
-          </a:p>
-          <a:p>
-            <a:r>
-              <a:rPr lang="pl-PL" dirty="0"/>
-              <a:t>Gradienty propagowane wstecznie dla przykładów łatwiejszych wykazują niższą wariancję.</a:t>
-            </a:r>
-          </a:p>
-          <a:p>
-            <a:r>
-              <a:rPr lang="pl-PL" dirty="0"/>
-              <a:t>Strata z łatwych przykładów nie dominuje trwale w procesie uczenia.</a:t>
+              <a:t>W uczeniu maszynowym sporym problemem jest zrozumienie, które przykłady są trudne dla modelu do sklasyfikowania. Taka wiedza pozwoliłaby na wykorzystanie ograniczonego czasu badaczy na skupienie się właśnie na tych przykładach, aby np. lepiej wyjaśnić zachowanie modelu.</a:t>
             </a:r>
           </a:p>
         </p:txBody>
@@ -3716,7 +7872,7 @@
     </p:spTree>
     <p:extLst>
       <p:ext uri="{BB962C8B-B14F-4D97-AF65-F5344CB8AC3E}">
-        <p14:creationId xmlns:p14="http://schemas.microsoft.com/office/powerpoint/2010/main" val="14552994"/>
+        <p14:creationId xmlns:p14="http://schemas.microsoft.com/office/powerpoint/2010/main" val="2205357581"/>
       </p:ext>
     </p:extLst>
   </p:cSld>
@@ -3748,6 +7904,149 @@
           <p:cNvPr id="2" name="Tytuł 1">
             <a:extLst>
               <a:ext uri="{FF2B5EF4-FFF2-40B4-BE49-F238E27FC236}">
+                <a16:creationId xmlns:a16="http://schemas.microsoft.com/office/drawing/2014/main" id="{E99A93D3-21BA-10DB-6A64-68736341AB15}"/>
+              </a:ext>
+            </a:extLst>
+          </p:cNvPr>
+          <p:cNvSpPr>
+            <a:spLocks noGrp="1"/>
+          </p:cNvSpPr>
+          <p:nvPr>
+            <p:ph type="title"/>
+          </p:nvPr>
+        </p:nvSpPr>
+        <p:spPr/>
+        <p:txBody>
+          <a:bodyPr/>
+          <a:lstStyle/>
+          <a:p>
+            <a:pPr algn="ctr"/>
+            <a:r>
+              <a:rPr lang="pl-PL" dirty="0" err="1"/>
+              <a:t>Variance</a:t>
+            </a:r>
+            <a:r>
+              <a:rPr lang="pl-PL" dirty="0"/>
+              <a:t> of </a:t>
+            </a:r>
+            <a:r>
+              <a:rPr lang="pl-PL" dirty="0" err="1"/>
+              <a:t>Gradience</a:t>
+            </a:r>
+            <a:r>
+              <a:rPr lang="pl-PL" dirty="0"/>
+              <a:t> (</a:t>
+            </a:r>
+            <a:r>
+              <a:rPr lang="pl-PL" dirty="0" err="1"/>
+              <a:t>VoG</a:t>
+            </a:r>
+            <a:r>
+              <a:rPr lang="pl-PL" dirty="0"/>
+              <a:t>)</a:t>
+            </a:r>
+          </a:p>
+        </p:txBody>
+      </p:sp>
+      <p:sp>
+        <p:nvSpPr>
+          <p:cNvPr id="3" name="Symbol zastępczy tekstu 2">
+            <a:extLst>
+              <a:ext uri="{FF2B5EF4-FFF2-40B4-BE49-F238E27FC236}">
+                <a16:creationId xmlns:a16="http://schemas.microsoft.com/office/drawing/2014/main" id="{938DD198-D76C-3590-FC2D-B5474879CC3E}"/>
+              </a:ext>
+            </a:extLst>
+          </p:cNvPr>
+          <p:cNvSpPr>
+            <a:spLocks noGrp="1"/>
+          </p:cNvSpPr>
+          <p:nvPr>
+            <p:ph type="body" idx="1"/>
+          </p:nvPr>
+        </p:nvSpPr>
+        <p:spPr/>
+        <p:txBody>
+          <a:bodyPr/>
+          <a:lstStyle/>
+          <a:p>
+            <a:r>
+              <a:rPr lang="pl-PL" dirty="0"/>
+              <a:t>Okazuje, że przydatnym do tego celu jest metryka </a:t>
+            </a:r>
+            <a:r>
+              <a:rPr lang="pl-PL" dirty="0" err="1"/>
+              <a:t>VoG</a:t>
+            </a:r>
+            <a:r>
+              <a:rPr lang="pl-PL" dirty="0"/>
+              <a:t>.</a:t>
+            </a:r>
+          </a:p>
+          <a:p>
+            <a:r>
+              <a:rPr lang="pl-PL" dirty="0" err="1"/>
+              <a:t>VoG</a:t>
+            </a:r>
+            <a:r>
+              <a:rPr lang="pl-PL" dirty="0"/>
+              <a:t> to ranking oparty na gradientach, mierzący zmienność wyjaśnień w czasie treningu.</a:t>
+            </a:r>
+          </a:p>
+          <a:p>
+            <a:r>
+              <a:rPr lang="pl-PL" dirty="0"/>
+              <a:t>Przykłady trudne do nauczenia wykazują wyższą wariancję w aktualizacjach gradientów przez cały okres treningu.</a:t>
+            </a:r>
+          </a:p>
+          <a:p>
+            <a:r>
+              <a:rPr lang="pl-PL" dirty="0"/>
+              <a:t>Gradienty propagowane wstecznie dla przykładów łatwiejszych wykazują niższą wariancję.</a:t>
+            </a:r>
+          </a:p>
+          <a:p>
+            <a:r>
+              <a:rPr lang="pl-PL" dirty="0"/>
+              <a:t>Strata z łatwych przykładów nie dominuje trwale w procesie uczenia.</a:t>
+            </a:r>
+          </a:p>
+        </p:txBody>
+      </p:sp>
+    </p:spTree>
+    <p:extLst>
+      <p:ext uri="{BB962C8B-B14F-4D97-AF65-F5344CB8AC3E}">
+        <p14:creationId xmlns:p14="http://schemas.microsoft.com/office/powerpoint/2010/main" val="14552994"/>
+      </p:ext>
+    </p:extLst>
+  </p:cSld>
+  <p:clrMapOvr>
+    <a:masterClrMapping/>
+  </p:clrMapOvr>
+</p:sld>
+</file>
+
+<file path=ppt/slides/slide4.xml><?xml version="1.0" encoding="utf-8"?>
+<p:sld xmlns:a="http://schemas.openxmlformats.org/drawingml/2006/main" xmlns:r="http://schemas.openxmlformats.org/officeDocument/2006/relationships" xmlns:p="http://schemas.openxmlformats.org/presentationml/2006/main">
+  <p:cSld>
+    <p:spTree>
+      <p:nvGrpSpPr>
+        <p:cNvPr id="1" name=""/>
+        <p:cNvGrpSpPr/>
+        <p:nvPr/>
+      </p:nvGrpSpPr>
+      <p:grpSpPr>
+        <a:xfrm>
+          <a:off x="0" y="0"/>
+          <a:ext cx="0" cy="0"/>
+          <a:chOff x="0" y="0"/>
+          <a:chExt cx="0" cy="0"/>
+        </a:xfrm>
+      </p:grpSpPr>
+      <p:sp>
+        <p:nvSpPr>
+          <p:cNvPr id="2" name="Tytuł 1">
+            <a:extLst>
+              <a:ext uri="{FF2B5EF4-FFF2-40B4-BE49-F238E27FC236}">
                 <a16:creationId xmlns:a16="http://schemas.microsoft.com/office/drawing/2014/main" id="{FC294626-5902-BB67-53FF-69A16E5E5EF3}"/>
               </a:ext>
             </a:extLst>
@@ -3771,8 +8070,8 @@
           </a:p>
         </p:txBody>
       </p:sp>
-      <mc:AlternateContent xmlns:mc="http://schemas.openxmlformats.org/markup-compatibility/2006">
-        <mc:Choice xmlns:a14="http://schemas.microsoft.com/office/drawing/2010/main" Requires="a14">
+      <mc:AlternateContent xmlns:mc="http://schemas.openxmlformats.org/markup-compatibility/2006" xmlns:a14="http://schemas.microsoft.com/office/drawing/2010/main">
+        <mc:Choice Requires="a14">
           <p:sp>
             <p:nvSpPr>
               <p:cNvPr id="3" name="Symbol zastępczy tekstu 2">
@@ -3949,7 +8248,7 @@
             </p:txBody>
           </p:sp>
         </mc:Choice>
-        <mc:Fallback>
+        <mc:Fallback xmlns="">
           <p:sp>
             <p:nvSpPr>
               <p:cNvPr id="3" name="Symbol zastępczy tekstu 2">
@@ -4002,7 +8301,7 @@
 </p:sld>
 </file>
 
-<file path=ppt/slides/slide4.xml><?xml version="1.0" encoding="utf-8"?>
+<file path=ppt/slides/slide5.xml><?xml version="1.0" encoding="utf-8"?>
 <p:sld xmlns:a="http://schemas.openxmlformats.org/drawingml/2006/main" xmlns:r="http://schemas.openxmlformats.org/officeDocument/2006/relationships" xmlns:p="http://schemas.openxmlformats.org/presentationml/2006/main">
   <p:cSld>
     <p:spTree>
@@ -4040,15 +8339,23 @@
           <a:bodyPr/>
           <a:lstStyle/>
           <a:p>
-            <a:r>
-              <a:rPr lang="pl-PL"/>
-              <a:t>Analiza matematyczna - Wariancja i Normalizacja</a:t>
-            </a:r>
-          </a:p>
-        </p:txBody>
-      </p:sp>
-      <mc:AlternateContent xmlns:mc="http://schemas.openxmlformats.org/markup-compatibility/2006">
-        <mc:Choice xmlns:a14="http://schemas.microsoft.com/office/drawing/2010/main" Requires="a14">
+            <a:pPr algn="ctr"/>
+            <a:r>
+              <a:rPr lang="pl-PL" dirty="0"/>
+              <a:t>Analiza matematyczna - wariancja </a:t>
+            </a:r>
+            <a:br>
+              <a:rPr lang="pl-PL" dirty="0"/>
+            </a:br>
+            <a:r>
+              <a:rPr lang="pl-PL" dirty="0"/>
+              <a:t>i normalizacja</a:t>
+            </a:r>
+          </a:p>
+        </p:txBody>
+      </p:sp>
+      <mc:AlternateContent xmlns:mc="http://schemas.openxmlformats.org/markup-compatibility/2006" xmlns:a14="http://schemas.microsoft.com/office/drawing/2010/main">
+        <mc:Choice Requires="a14">
           <p:sp>
             <p:nvSpPr>
               <p:cNvPr id="3" name="Symbol zastępczy tekstu 2">
@@ -4521,7 +8828,7 @@
             </p:txBody>
           </p:sp>
         </mc:Choice>
-        <mc:Fallback>
+        <mc:Fallback xmlns="">
           <p:sp>
             <p:nvSpPr>
               <p:cNvPr id="3" name="Symbol zastępczy tekstu 2">
@@ -4609,166 +8916,6 @@
 </p:sld>
 </file>
 
-<file path=ppt/slides/slide5.xml><?xml version="1.0" encoding="utf-8"?>
-<p:sld xmlns:a="http://schemas.openxmlformats.org/drawingml/2006/main" xmlns:r="http://schemas.openxmlformats.org/officeDocument/2006/relationships" xmlns:p="http://schemas.openxmlformats.org/presentationml/2006/main">
-  <p:cSld>
-    <p:spTree>
-      <p:nvGrpSpPr>
-        <p:cNvPr id="1" name=""/>
-        <p:cNvGrpSpPr/>
-        <p:nvPr/>
-      </p:nvGrpSpPr>
-      <p:grpSpPr>
-        <a:xfrm>
-          <a:off x="0" y="0"/>
-          <a:ext cx="0" cy="0"/>
-          <a:chOff x="0" y="0"/>
-          <a:chExt cx="0" cy="0"/>
-        </a:xfrm>
-      </p:grpSpPr>
-      <p:sp>
-        <p:nvSpPr>
-          <p:cNvPr id="2" name="Tytuł 1">
-            <a:extLst>
-              <a:ext uri="{FF2B5EF4-FFF2-40B4-BE49-F238E27FC236}">
-                <a16:creationId xmlns:a16="http://schemas.microsoft.com/office/drawing/2014/main" id="{526D68EC-195E-5901-E2B9-36BCC69CF65D}"/>
-              </a:ext>
-            </a:extLst>
-          </p:cNvPr>
-          <p:cNvSpPr>
-            <a:spLocks noGrp="1"/>
-          </p:cNvSpPr>
-          <p:nvPr>
-            <p:ph type="title"/>
-          </p:nvPr>
-        </p:nvSpPr>
-        <p:spPr/>
-        <p:txBody>
-          <a:bodyPr/>
-          <a:lstStyle/>
-          <a:p>
-            <a:r>
-              <a:rPr lang="pl-PL" dirty="0"/>
-              <a:t>Oryginalny kod źródłowy</a:t>
-            </a:r>
-          </a:p>
-        </p:txBody>
-      </p:sp>
-      <p:sp>
-        <p:nvSpPr>
-          <p:cNvPr id="3" name="Symbol zastępczy tekstu 2">
-            <a:extLst>
-              <a:ext uri="{FF2B5EF4-FFF2-40B4-BE49-F238E27FC236}">
-                <a16:creationId xmlns:a16="http://schemas.microsoft.com/office/drawing/2014/main" id="{36453CC4-19A3-BB10-7770-EBBFA7F5E73E}"/>
-              </a:ext>
-            </a:extLst>
-          </p:cNvPr>
-          <p:cNvSpPr>
-            <a:spLocks noGrp="1"/>
-          </p:cNvSpPr>
-          <p:nvPr>
-            <p:ph type="body" idx="1"/>
-          </p:nvPr>
-        </p:nvSpPr>
-        <p:spPr/>
-        <p:txBody>
-          <a:bodyPr/>
-          <a:lstStyle/>
-          <a:p>
-            <a:r>
-              <a:rPr lang="pl-PL" dirty="0"/>
-              <a:t>Autorzy udostępnili kod oraz </a:t>
-            </a:r>
-            <a:r>
-              <a:rPr lang="pl-PL" dirty="0" err="1"/>
-              <a:t>pobieralne</a:t>
-            </a:r>
-            <a:r>
-              <a:rPr lang="pl-PL" dirty="0"/>
-              <a:t> wyniki </a:t>
-            </a:r>
-            <a:r>
-              <a:rPr lang="pl-PL" dirty="0" err="1"/>
-              <a:t>VoG</a:t>
-            </a:r>
-            <a:r>
-              <a:rPr lang="pl-PL" dirty="0"/>
-              <a:t>.</a:t>
-            </a:r>
-          </a:p>
-          <a:p>
-            <a:r>
-              <a:rPr lang="pl-PL" dirty="0"/>
-              <a:t>Główne repozytorium GitHub:	</a:t>
-            </a:r>
-            <a:r>
-              <a:rPr lang="pl-PL" dirty="0" err="1"/>
-              <a:t>https</a:t>
-            </a:r>
-            <a:r>
-              <a:rPr lang="pl-PL" dirty="0"/>
-              <a:t>://</a:t>
-            </a:r>
-            <a:r>
-              <a:rPr lang="pl-PL" dirty="0" err="1"/>
-              <a:t>github.com</a:t>
-            </a:r>
-            <a:r>
-              <a:rPr lang="pl-PL" dirty="0"/>
-              <a:t>/chirag126/</a:t>
-            </a:r>
-            <a:r>
-              <a:rPr lang="pl-PL" dirty="0" err="1"/>
-              <a:t>VOG.git</a:t>
-            </a:r>
-            <a:endParaRPr lang="pl-PL" dirty="0"/>
-          </a:p>
-          <a:p>
-            <a:r>
-              <a:rPr lang="pl-PL" dirty="0"/>
-              <a:t>Strona domowa projektu:</a:t>
-            </a:r>
-          </a:p>
-          <a:p>
-            <a:pPr marL="0" indent="0">
-              <a:buNone/>
-            </a:pPr>
-            <a:r>
-              <a:rPr lang="pl-PL" dirty="0"/>
-              <a:t>	</a:t>
-            </a:r>
-            <a:r>
-              <a:rPr lang="pl-PL" dirty="0" err="1"/>
-              <a:t>https</a:t>
-            </a:r>
-            <a:r>
-              <a:rPr lang="pl-PL" dirty="0"/>
-              <a:t>://</a:t>
-            </a:r>
-            <a:r>
-              <a:rPr lang="pl-PL" dirty="0" err="1"/>
-              <a:t>varianceofgradients.github.io</a:t>
-            </a:r>
-            <a:r>
-              <a:rPr lang="pl-PL" dirty="0"/>
-              <a:t>/</a:t>
-            </a:r>
-          </a:p>
-        </p:txBody>
-      </p:sp>
-    </p:spTree>
-    <p:extLst>
-      <p:ext uri="{BB962C8B-B14F-4D97-AF65-F5344CB8AC3E}">
-        <p14:creationId xmlns:p14="http://schemas.microsoft.com/office/powerpoint/2010/main" val="668757634"/>
-      </p:ext>
-    </p:extLst>
-  </p:cSld>
-  <p:clrMapOvr>
-    <a:masterClrMapping/>
-  </p:clrMapOvr>
-</p:sld>
-</file>
-
 <file path=ppt/slides/slide6.xml><?xml version="1.0" encoding="utf-8"?>
 <p:sld xmlns:a="http://schemas.openxmlformats.org/drawingml/2006/main" xmlns:r="http://schemas.openxmlformats.org/officeDocument/2006/relationships" xmlns:p="http://schemas.openxmlformats.org/presentationml/2006/main">
   <p:cSld>
@@ -4791,7 +8938,7 @@
           <p:cNvPr id="2" name="Tytuł 1">
             <a:extLst>
               <a:ext uri="{FF2B5EF4-FFF2-40B4-BE49-F238E27FC236}">
-                <a16:creationId xmlns:a16="http://schemas.microsoft.com/office/drawing/2014/main" id="{6029E30A-45CA-AC6E-D9FE-1B99CDDC70C4}"/>
+                <a16:creationId xmlns:a16="http://schemas.microsoft.com/office/drawing/2014/main" id="{5E8E86E8-25EE-EAB9-342D-B0C7E5098CB1}"/>
               </a:ext>
             </a:extLst>
           </p:cNvPr>
@@ -4807,661 +8954,538 @@
           <a:bodyPr/>
           <a:lstStyle/>
           <a:p>
+            <a:pPr algn="ctr"/>
             <a:r>
               <a:rPr lang="pl-PL" dirty="0"/>
-              <a:t>Krótkie omówienie kodu</a:t>
-            </a:r>
-          </a:p>
-        </p:txBody>
-      </p:sp>
-      <p:sp>
-        <p:nvSpPr>
-          <p:cNvPr id="4" name="Rectangle 1">
-            <a:extLst>
-              <a:ext uri="{FF2B5EF4-FFF2-40B4-BE49-F238E27FC236}">
-                <a16:creationId xmlns:a16="http://schemas.microsoft.com/office/drawing/2014/main" id="{C4161637-7F61-25B7-9EB1-15561802D1BE}"/>
-              </a:ext>
-            </a:extLst>
-          </p:cNvPr>
-          <p:cNvSpPr>
-            <a:spLocks noGrp="1" noChangeArrowheads="1"/>
-          </p:cNvSpPr>
-          <p:nvPr>
-            <p:ph type="body" idx="1"/>
-          </p:nvPr>
-        </p:nvSpPr>
-        <p:spPr bwMode="auto">
-          <a:xfrm>
-            <a:off x="949036" y="1706077"/>
-            <a:ext cx="9239054" cy="4170372"/>
-          </a:xfrm>
-          <a:prstGeom prst="rect">
-            <a:avLst/>
-          </a:prstGeom>
-          <a:noFill/>
-          <a:ln>
-            <a:noFill/>
-          </a:ln>
-          <a:effectLst/>
-          <a:extLst>
-            <a:ext uri="{909E8E84-426E-40DD-AFC4-6F175D3DCCD1}">
-              <a14:hiddenFill xmlns:a14="http://schemas.microsoft.com/office/drawing/2010/main">
-                <a:solidFill>
-                  <a:schemeClr val="accent1"/>
-                </a:solidFill>
-              </a14:hiddenFill>
-            </a:ext>
-            <a:ext uri="{91240B29-F687-4F45-9708-019B960494DF}">
-              <a14:hiddenLine xmlns:a14="http://schemas.microsoft.com/office/drawing/2010/main" w="9525">
-                <a:solidFill>
-                  <a:schemeClr val="tx1"/>
-                </a:solidFill>
-                <a:miter lim="800000"/>
-                <a:headEnd/>
-                <a:tailEnd/>
-              </a14:hiddenLine>
-            </a:ext>
-            <a:ext uri="{AF507438-7753-43E0-B8FC-AC1667EBCBE1}">
-              <a14:hiddenEffects xmlns:a14="http://schemas.microsoft.com/office/drawing/2010/main">
-                <a:effectLst>
-                  <a:outerShdw dist="35921" dir="2700000" algn="ctr" rotWithShape="0">
-                    <a:schemeClr val="bg2"/>
-                  </a:outerShdw>
-                </a:effectLst>
-              </a14:hiddenEffects>
-            </a:ext>
-          </a:extLst>
-        </p:spPr>
-        <p:txBody>
-          <a:bodyPr vert="horz" wrap="square" lIns="91440" tIns="0" rIns="91440" bIns="45720" numCol="1" anchor="ctr" anchorCtr="0" compatLnSpc="1">
-            <a:prstTxWarp prst="textNoShape">
-              <a:avLst/>
-            </a:prstTxWarp>
-            <a:spAutoFit/>
-          </a:bodyPr>
-          <a:lstStyle/>
-          <a:p>
-            <a:pPr marL="342900" marR="0" lvl="0" indent="-342900" algn="l" defTabSz="914400" rtl="0" eaLnBrk="0" fontAlgn="base" latinLnBrk="0" hangingPunct="0">
-              <a:lnSpc>
-                <a:spcPct val="100000"/>
-              </a:lnSpc>
-              <a:spcBef>
-                <a:spcPct val="0"/>
-              </a:spcBef>
-              <a:spcAft>
-                <a:spcPct val="0"/>
-              </a:spcAft>
-              <a:buClrTx/>
-              <a:buSzTx/>
-              <a:buFont typeface="+mj-lt"/>
-              <a:buAutoNum type="arabicPeriod"/>
-              <a:tabLst/>
-            </a:pPr>
-            <a:r>
-              <a:rPr kumimoji="0" lang="pl-PL" altLang="pl-PL" sz="1800" b="1" i="0" u="none" strike="noStrike" cap="none" normalizeH="0" baseline="0" dirty="0">
-                <a:ln>
-                  <a:noFill/>
-                </a:ln>
-                <a:solidFill>
-                  <a:schemeClr val="tx1"/>
-                </a:solidFill>
-                <a:effectLst/>
-              </a:rPr>
-              <a:t>Trening i zapisywanie stanu</a:t>
-            </a:r>
-          </a:p>
-          <a:p>
-            <a:pPr lvl="1" eaLnBrk="0" fontAlgn="base" hangingPunct="0">
-              <a:lnSpc>
-                <a:spcPct val="100000"/>
-              </a:lnSpc>
-              <a:spcBef>
-                <a:spcPct val="0"/>
-              </a:spcBef>
-              <a:spcAft>
-                <a:spcPct val="0"/>
-              </a:spcAft>
-            </a:pPr>
-            <a:r>
-              <a:rPr kumimoji="0" lang="pl-PL" altLang="pl-PL" sz="1400" b="1" i="0" u="none" strike="noStrike" cap="none" normalizeH="0" baseline="0" dirty="0">
-                <a:ln>
-                  <a:noFill/>
-                </a:ln>
-                <a:solidFill>
-                  <a:schemeClr val="tx1"/>
-                </a:solidFill>
-                <a:effectLst/>
-              </a:rPr>
-              <a:t>Trening:</a:t>
-            </a:r>
-            <a:r>
-              <a:rPr kumimoji="0" lang="pl-PL" altLang="pl-PL" sz="1400" b="0" i="0" u="none" strike="noStrike" cap="none" normalizeH="0" baseline="0" dirty="0">
-                <a:ln>
-                  <a:noFill/>
-                </a:ln>
-                <a:solidFill>
-                  <a:schemeClr val="tx1"/>
-                </a:solidFill>
-                <a:effectLst/>
-              </a:rPr>
-              <a:t> Uczenie modeli (ResNet-18 dla zbiorów </a:t>
-            </a:r>
-            <a:r>
-              <a:rPr kumimoji="0" lang="pl-PL" altLang="pl-PL" sz="1400" b="0" i="0" u="none" strike="noStrike" cap="none" normalizeH="0" baseline="0" dirty="0" err="1">
-                <a:ln>
-                  <a:noFill/>
-                </a:ln>
-                <a:solidFill>
-                  <a:schemeClr val="tx1"/>
-                </a:solidFill>
-                <a:effectLst/>
-              </a:rPr>
-              <a:t>Cifar</a:t>
-            </a:r>
-            <a:r>
-              <a:rPr kumimoji="0" lang="pl-PL" altLang="pl-PL" sz="1400" b="0" i="0" u="none" strike="noStrike" cap="none" normalizeH="0" baseline="0" dirty="0">
-                <a:ln>
-                  <a:noFill/>
-                </a:ln>
-                <a:solidFill>
-                  <a:schemeClr val="tx1"/>
-                </a:solidFill>
-                <a:effectLst/>
-              </a:rPr>
-              <a:t>, ResNet-50 dla </a:t>
-            </a:r>
-            <a:r>
-              <a:rPr kumimoji="0" lang="pl-PL" altLang="pl-PL" sz="1400" b="0" i="0" u="none" strike="noStrike" cap="none" normalizeH="0" baseline="0" dirty="0" err="1">
-                <a:ln>
-                  <a:noFill/>
-                </a:ln>
-                <a:solidFill>
-                  <a:schemeClr val="tx1"/>
-                </a:solidFill>
-                <a:effectLst/>
-              </a:rPr>
-              <a:t>ImageNet</a:t>
-            </a:r>
-            <a:r>
-              <a:rPr kumimoji="0" lang="pl-PL" altLang="pl-PL" sz="1400" b="0" i="0" u="none" strike="noStrike" cap="none" normalizeH="0" baseline="0" dirty="0">
-                <a:ln>
-                  <a:noFill/>
-                </a:ln>
-                <a:solidFill>
-                  <a:schemeClr val="tx1"/>
-                </a:solidFill>
-                <a:effectLst/>
-              </a:rPr>
-              <a:t>) za pomocą algorytmu SGD, ze standardową augmentacją danych (przycinanie, odbicia lustrzane </a:t>
-            </a:r>
-            <a:r>
-              <a:rPr kumimoji="0" lang="pl-PL" altLang="pl-PL" sz="1400" b="0" i="0" u="none" strike="noStrike" cap="none" normalizeH="0" baseline="0" dirty="0" err="1">
-                <a:ln>
-                  <a:noFill/>
-                </a:ln>
-                <a:solidFill>
-                  <a:schemeClr val="tx1"/>
-                </a:solidFill>
-                <a:effectLst/>
-              </a:rPr>
-              <a:t>itp</a:t>
-            </a:r>
-            <a:r>
-              <a:rPr kumimoji="0" lang="pl-PL" altLang="pl-PL" sz="1400" b="0" i="0" u="none" strike="noStrike" cap="none" normalizeH="0" baseline="0" dirty="0">
-                <a:ln>
-                  <a:noFill/>
-                </a:ln>
-                <a:solidFill>
-                  <a:schemeClr val="tx1"/>
-                </a:solidFill>
-                <a:effectLst/>
-              </a:rPr>
-              <a:t>).</a:t>
-            </a:r>
-          </a:p>
-          <a:p>
-            <a:pPr lvl="1" eaLnBrk="0" fontAlgn="base" hangingPunct="0">
-              <a:lnSpc>
-                <a:spcPct val="100000"/>
-              </a:lnSpc>
-              <a:spcBef>
-                <a:spcPct val="0"/>
-              </a:spcBef>
-              <a:spcAft>
-                <a:spcPct val="0"/>
-              </a:spcAft>
-            </a:pPr>
-            <a:r>
-              <a:rPr kumimoji="0" lang="pl-PL" altLang="pl-PL" sz="1400" b="1" i="0" u="none" strike="noStrike" cap="none" normalizeH="0" baseline="0" dirty="0" err="1">
-                <a:ln>
-                  <a:noFill/>
-                </a:ln>
-                <a:solidFill>
-                  <a:schemeClr val="tx1"/>
-                </a:solidFill>
-                <a:effectLst/>
-              </a:rPr>
-              <a:t>Checkpoints</a:t>
-            </a:r>
-            <a:r>
-              <a:rPr kumimoji="0" lang="pl-PL" altLang="pl-PL" sz="1400" b="1" i="0" u="none" strike="noStrike" cap="none" normalizeH="0" baseline="0" dirty="0">
-                <a:ln>
-                  <a:noFill/>
-                </a:ln>
-                <a:solidFill>
-                  <a:schemeClr val="tx1"/>
-                </a:solidFill>
-                <a:effectLst/>
-              </a:rPr>
+              <a:t>Cechy obrazów w zależności od wartości </a:t>
+            </a:r>
+            <a:r>
+              <a:rPr lang="pl-PL" dirty="0" err="1"/>
+              <a:t>VoG</a:t>
+            </a:r>
+            <a:endParaRPr lang="pl-PL" dirty="0"/>
+          </a:p>
+        </p:txBody>
+      </p:sp>
+      <p:sp>
+        <p:nvSpPr>
+          <p:cNvPr id="3" name="Symbol zastępczy zawartości 2">
+            <a:extLst>
+              <a:ext uri="{FF2B5EF4-FFF2-40B4-BE49-F238E27FC236}">
+                <a16:creationId xmlns:a16="http://schemas.microsoft.com/office/drawing/2014/main" id="{A8265BE0-BC82-15A4-9C94-16FB755923A9}"/>
+              </a:ext>
+            </a:extLst>
+          </p:cNvPr>
+          <p:cNvSpPr>
+            <a:spLocks noGrp="1"/>
+          </p:cNvSpPr>
+          <p:nvPr>
+            <p:ph idx="1"/>
+          </p:nvPr>
+        </p:nvSpPr>
+        <p:spPr/>
+        <p:txBody>
+          <a:bodyPr/>
+          <a:lstStyle/>
+          <a:p>
+            <a:r>
+              <a:rPr lang="pl-PL" dirty="0"/>
+              <a:t>Wysokie </a:t>
+            </a:r>
+            <a:r>
+              <a:rPr lang="pl-PL" dirty="0" err="1"/>
+              <a:t>VoG</a:t>
+            </a:r>
+            <a:r>
+              <a:rPr lang="pl-PL" dirty="0"/>
               <a:t>:</a:t>
             </a:r>
-            <a:r>
-              <a:rPr kumimoji="0" lang="pl-PL" altLang="pl-PL" sz="1400" b="0" i="0" u="none" strike="noStrike" cap="none" normalizeH="0" baseline="0" dirty="0">
-                <a:ln>
-                  <a:noFill/>
-                </a:ln>
-                <a:solidFill>
-                  <a:schemeClr val="tx1"/>
-                </a:solidFill>
-                <a:effectLst/>
-              </a:rPr>
-              <a:t> Zapisywanie wag modelu w trakcie nauki – co 10 epok dla </a:t>
-            </a:r>
-            <a:r>
-              <a:rPr kumimoji="0" lang="pl-PL" altLang="pl-PL" sz="1400" b="0" i="0" u="none" strike="noStrike" cap="none" normalizeH="0" baseline="0" dirty="0" err="1">
-                <a:ln>
-                  <a:noFill/>
-                </a:ln>
-                <a:solidFill>
-                  <a:schemeClr val="tx1"/>
-                </a:solidFill>
-                <a:effectLst/>
-              </a:rPr>
-              <a:t>Cifar</a:t>
-            </a:r>
-            <a:r>
-              <a:rPr kumimoji="0" lang="pl-PL" altLang="pl-PL" sz="1400" b="0" i="0" u="none" strike="noStrike" cap="none" normalizeH="0" baseline="0" dirty="0">
-                <a:ln>
-                  <a:noFill/>
-                </a:ln>
-                <a:solidFill>
-                  <a:schemeClr val="tx1"/>
-                </a:solidFill>
-                <a:effectLst/>
-              </a:rPr>
-              <a:t> lub 32 razy w trakcie całego treningu dla </a:t>
-            </a:r>
-            <a:r>
-              <a:rPr kumimoji="0" lang="pl-PL" altLang="pl-PL" sz="1400" b="0" i="0" u="none" strike="noStrike" cap="none" normalizeH="0" baseline="0" dirty="0" err="1">
-                <a:ln>
-                  <a:noFill/>
-                </a:ln>
-                <a:solidFill>
-                  <a:schemeClr val="tx1"/>
-                </a:solidFill>
-                <a:effectLst/>
-              </a:rPr>
-              <a:t>ImageNet</a:t>
-            </a:r>
-            <a:r>
-              <a:rPr kumimoji="0" lang="pl-PL" altLang="pl-PL" sz="1400" b="0" i="0" u="none" strike="noStrike" cap="none" normalizeH="0" baseline="0" dirty="0">
-                <a:ln>
-                  <a:noFill/>
-                </a:ln>
-                <a:solidFill>
-                  <a:schemeClr val="tx1"/>
-                </a:solidFill>
-                <a:effectLst/>
-              </a:rPr>
-              <a:t>.</a:t>
-            </a:r>
-          </a:p>
-          <a:p>
-            <a:pPr marL="342900" indent="-342900" eaLnBrk="0" fontAlgn="base" hangingPunct="0">
-              <a:lnSpc>
-                <a:spcPct val="100000"/>
-              </a:lnSpc>
-              <a:spcBef>
-                <a:spcPct val="0"/>
-              </a:spcBef>
-              <a:spcAft>
-                <a:spcPct val="0"/>
-              </a:spcAft>
-              <a:buFont typeface="+mj-lt"/>
-              <a:buAutoNum type="arabicPeriod"/>
-            </a:pPr>
-            <a:r>
-              <a:rPr kumimoji="0" lang="pl-PL" altLang="pl-PL" sz="1800" b="1" i="0" u="none" strike="noStrike" cap="none" normalizeH="0" baseline="0" dirty="0">
-                <a:ln>
-                  <a:noFill/>
-                </a:ln>
-                <a:solidFill>
-                  <a:schemeClr val="tx1"/>
-                </a:solidFill>
-                <a:effectLst/>
-              </a:rPr>
-              <a:t>Wyliczanie metryki </a:t>
-            </a:r>
-          </a:p>
-          <a:p>
-            <a:pPr lvl="1" eaLnBrk="0" fontAlgn="base" hangingPunct="0">
-              <a:lnSpc>
-                <a:spcPct val="100000"/>
-              </a:lnSpc>
-              <a:spcBef>
-                <a:spcPct val="0"/>
-              </a:spcBef>
-              <a:spcAft>
-                <a:spcPct val="0"/>
-              </a:spcAft>
-            </a:pPr>
-            <a:r>
-              <a:rPr kumimoji="0" lang="pl-PL" altLang="pl-PL" sz="1400" b="1" i="0" u="none" strike="noStrike" cap="none" normalizeH="0" baseline="0" dirty="0">
-                <a:ln>
-                  <a:noFill/>
-                </a:ln>
-                <a:solidFill>
-                  <a:schemeClr val="tx1"/>
-                </a:solidFill>
-                <a:effectLst/>
-              </a:rPr>
-              <a:t>Pobranie gradientów:</a:t>
-            </a:r>
-            <a:r>
-              <a:rPr kumimoji="0" lang="pl-PL" altLang="pl-PL" sz="1400" b="0" i="0" u="none" strike="noStrike" cap="none" normalizeH="0" baseline="0" dirty="0">
-                <a:ln>
-                  <a:noFill/>
-                </a:ln>
-                <a:solidFill>
-                  <a:schemeClr val="tx1"/>
-                </a:solidFill>
-                <a:effectLst/>
-              </a:rPr>
-              <a:t> Wybór K punktów kontrolnych. Dla każdego obrazu sieć oblicza gradient aktywacji warstwy </a:t>
-            </a:r>
-            <a:r>
-              <a:rPr kumimoji="0" lang="pl-PL" altLang="pl-PL" sz="1400" b="0" i="0" u="none" strike="noStrike" cap="none" normalizeH="0" baseline="0" dirty="0" err="1">
-                <a:ln>
-                  <a:noFill/>
-                </a:ln>
-                <a:solidFill>
-                  <a:schemeClr val="tx1"/>
-                </a:solidFill>
-                <a:effectLst/>
-              </a:rPr>
-              <a:t>pre-softmax</a:t>
-            </a:r>
-            <a:r>
-              <a:rPr kumimoji="0" lang="pl-PL" altLang="pl-PL" sz="1400" b="0" i="0" u="none" strike="noStrike" cap="none" normalizeH="0" baseline="0" dirty="0">
-                <a:ln>
-                  <a:noFill/>
-                </a:ln>
-                <a:solidFill>
-                  <a:schemeClr val="tx1"/>
-                </a:solidFill>
-                <a:effectLst/>
-              </a:rPr>
-              <a:t> w stosunku do pikseli wejściowych.</a:t>
-            </a:r>
-          </a:p>
-          <a:p>
-            <a:pPr lvl="1" eaLnBrk="0" fontAlgn="base" hangingPunct="0">
-              <a:lnSpc>
-                <a:spcPct val="100000"/>
-              </a:lnSpc>
-              <a:spcBef>
-                <a:spcPct val="0"/>
-              </a:spcBef>
-              <a:spcAft>
-                <a:spcPct val="0"/>
-              </a:spcAft>
-            </a:pPr>
-            <a:r>
-              <a:rPr kumimoji="0" lang="pl-PL" altLang="pl-PL" sz="1400" b="1" i="0" u="none" strike="noStrike" cap="none" normalizeH="0" baseline="0" dirty="0">
-                <a:ln>
-                  <a:noFill/>
-                </a:ln>
-                <a:solidFill>
-                  <a:schemeClr val="tx1"/>
-                </a:solidFill>
-                <a:effectLst/>
-              </a:rPr>
-              <a:t>Agregacja:</a:t>
-            </a:r>
-            <a:r>
-              <a:rPr kumimoji="0" lang="pl-PL" altLang="pl-PL" sz="1400" b="0" i="0" u="none" strike="noStrike" cap="none" normalizeH="0" baseline="0" dirty="0">
-                <a:ln>
-                  <a:noFill/>
-                </a:ln>
-                <a:solidFill>
-                  <a:schemeClr val="tx1"/>
-                </a:solidFill>
-                <a:effectLst/>
-              </a:rPr>
-              <a:t> Gradienty uśrednia się po kanałach kolorów. Następnie algorytm oblicza wariancję tych gradientów (ich zmienność) na przestrzeni wybranych punktów kontrolnych.</a:t>
-            </a:r>
-          </a:p>
-          <a:p>
-            <a:pPr lvl="1" eaLnBrk="0" fontAlgn="base" hangingPunct="0">
-              <a:lnSpc>
-                <a:spcPct val="100000"/>
-              </a:lnSpc>
-              <a:spcBef>
-                <a:spcPct val="0"/>
-              </a:spcBef>
-              <a:spcAft>
-                <a:spcPct val="0"/>
-              </a:spcAft>
-            </a:pPr>
-            <a:r>
-              <a:rPr kumimoji="0" lang="pl-PL" altLang="pl-PL" sz="1400" b="1" i="0" u="none" strike="noStrike" cap="none" normalizeH="0" baseline="0" dirty="0">
-                <a:ln>
-                  <a:noFill/>
-                </a:ln>
-                <a:solidFill>
-                  <a:schemeClr val="tx1"/>
-                </a:solidFill>
-                <a:effectLst/>
-              </a:rPr>
-              <a:t>Wynik końcowy:</a:t>
-            </a:r>
-            <a:r>
-              <a:rPr kumimoji="0" lang="pl-PL" altLang="pl-PL" sz="1400" b="0" i="0" u="none" strike="noStrike" cap="none" normalizeH="0" baseline="0" dirty="0">
-                <a:ln>
-                  <a:noFill/>
-                </a:ln>
-                <a:solidFill>
-                  <a:schemeClr val="tx1"/>
-                </a:solidFill>
-                <a:effectLst/>
-              </a:rPr>
-              <a:t> Wariancje wszystkich pikseli są uśredniane do jednej liczby dla całego obrazu. Wynik ten jest na koniec normalizowany względem średniej dla danej klasy.</a:t>
-            </a:r>
-          </a:p>
-          <a:p>
-            <a:pPr marL="342900" indent="-342900" eaLnBrk="0" fontAlgn="base" hangingPunct="0">
-              <a:lnSpc>
-                <a:spcPct val="100000"/>
-              </a:lnSpc>
-              <a:spcBef>
-                <a:spcPct val="0"/>
-              </a:spcBef>
-              <a:spcAft>
-                <a:spcPct val="0"/>
-              </a:spcAft>
-              <a:buFont typeface="+mj-lt"/>
-              <a:buAutoNum type="arabicPeriod"/>
-            </a:pPr>
-            <a:r>
-              <a:rPr kumimoji="0" lang="pl-PL" altLang="pl-PL" sz="1800" b="1" i="0" u="none" strike="noStrike" cap="none" normalizeH="0" baseline="0" dirty="0">
-                <a:ln>
-                  <a:noFill/>
-                </a:ln>
-                <a:solidFill>
-                  <a:schemeClr val="tx1"/>
-                </a:solidFill>
-                <a:effectLst/>
-              </a:rPr>
-              <a:t>Zastosowanie i ewaluacja</a:t>
-            </a:r>
-          </a:p>
-          <a:p>
-            <a:pPr lvl="1" eaLnBrk="0" fontAlgn="base" hangingPunct="0">
-              <a:lnSpc>
-                <a:spcPct val="100000"/>
-              </a:lnSpc>
-              <a:spcBef>
-                <a:spcPct val="0"/>
-              </a:spcBef>
-              <a:spcAft>
-                <a:spcPct val="0"/>
-              </a:spcAft>
-            </a:pPr>
-            <a:r>
-              <a:rPr kumimoji="0" lang="pl-PL" altLang="pl-PL" sz="1400" b="1" i="0" u="none" strike="noStrike" cap="none" normalizeH="0" baseline="0" dirty="0">
-                <a:ln>
-                  <a:noFill/>
-                </a:ln>
-                <a:solidFill>
-                  <a:schemeClr val="tx1"/>
-                </a:solidFill>
-                <a:effectLst/>
-              </a:rPr>
-              <a:t>Ranking:</a:t>
-            </a:r>
-            <a:r>
-              <a:rPr kumimoji="0" lang="pl-PL" altLang="pl-PL" sz="1400" b="0" i="0" u="none" strike="noStrike" cap="none" normalizeH="0" baseline="0" dirty="0">
-                <a:ln>
-                  <a:noFill/>
-                </a:ln>
-                <a:solidFill>
-                  <a:schemeClr val="tx1"/>
-                </a:solidFill>
-                <a:effectLst/>
-              </a:rPr>
-              <a:t> Posortowanie zbioru danych na podstawie obliczonego wyniku </a:t>
-            </a:r>
-            <a:r>
-              <a:rPr kumimoji="0" lang="pl-PL" altLang="pl-PL" sz="1400" b="0" i="0" u="none" strike="noStrike" cap="none" normalizeH="0" baseline="0" dirty="0" err="1">
-                <a:ln>
-                  <a:noFill/>
-                </a:ln>
-                <a:solidFill>
-                  <a:schemeClr val="tx1"/>
-                </a:solidFill>
-                <a:effectLst/>
-              </a:rPr>
+          </a:p>
+          <a:p>
+            <a:pPr lvl="1"/>
+            <a:r>
+              <a:rPr lang="pl-PL" dirty="0"/>
+              <a:t>Zanieczyszczone tło</a:t>
+            </a:r>
+          </a:p>
+          <a:p>
+            <a:pPr lvl="1"/>
+            <a:r>
+              <a:rPr lang="pl-PL" dirty="0"/>
+              <a:t>Mniej typowe ujęcie obiektu (np. z góry lub z profilu)</a:t>
+            </a:r>
+          </a:p>
+          <a:p>
+            <a:pPr lvl="1"/>
+            <a:r>
+              <a:rPr lang="pl-PL" dirty="0"/>
+              <a:t>Czasami nie cały obiekt jest w kadrze</a:t>
+            </a:r>
+          </a:p>
+          <a:p>
+            <a:pPr lvl="1"/>
+            <a:r>
+              <a:rPr lang="pl-PL" dirty="0"/>
+              <a:t>Mniejszy kontrast</a:t>
+            </a:r>
+          </a:p>
+          <a:p>
+            <a:r>
+              <a:rPr lang="pl-PL" dirty="0"/>
+              <a:t>Niskie </a:t>
+            </a:r>
+            <a:r>
+              <a:rPr lang="pl-PL" dirty="0" err="1"/>
               <a:t>VoG</a:t>
             </a:r>
             <a:r>
-              <a:rPr kumimoji="0" lang="pl-PL" altLang="pl-PL" sz="1400" b="0" i="0" u="none" strike="noStrike" cap="none" normalizeH="0" baseline="0" dirty="0">
-                <a:ln>
-                  <a:noFill/>
-                </a:ln>
-                <a:solidFill>
-                  <a:schemeClr val="tx1"/>
-                </a:solidFill>
-                <a:effectLst/>
-              </a:rPr>
-              <a:t>.</a:t>
-            </a:r>
-            <a:endParaRPr lang="pl-PL" altLang="pl-PL" sz="1400" dirty="0"/>
-          </a:p>
-          <a:p>
-            <a:pPr lvl="1" eaLnBrk="0" fontAlgn="base" hangingPunct="0">
-              <a:lnSpc>
-                <a:spcPct val="100000"/>
-              </a:lnSpc>
-              <a:spcBef>
-                <a:spcPct val="0"/>
-              </a:spcBef>
-              <a:spcAft>
-                <a:spcPct val="0"/>
-              </a:spcAft>
-            </a:pPr>
-            <a:r>
-              <a:rPr kumimoji="0" lang="pl-PL" altLang="pl-PL" sz="1400" b="1" i="0" u="none" strike="noStrike" cap="none" normalizeH="0" baseline="0" dirty="0">
-                <a:ln>
-                  <a:noFill/>
-                </a:ln>
-                <a:solidFill>
-                  <a:schemeClr val="tx1"/>
-                </a:solidFill>
-                <a:effectLst/>
-              </a:rPr>
-              <a:t>Audyt:</a:t>
-            </a:r>
-            <a:r>
-              <a:rPr kumimoji="0" lang="pl-PL" altLang="pl-PL" sz="1400" b="0" i="0" u="none" strike="noStrike" cap="none" normalizeH="0" baseline="0" dirty="0">
-                <a:ln>
-                  <a:noFill/>
-                </a:ln>
-                <a:solidFill>
-                  <a:schemeClr val="tx1"/>
-                </a:solidFill>
-                <a:effectLst/>
-              </a:rPr>
-              <a:t> Wykorzystanie rankingu do wykrywania trudnych próbek , odnajdywania danych spoza rozkładu (</a:t>
-            </a:r>
-            <a:r>
-              <a:rPr kumimoji="0" lang="pl-PL" altLang="pl-PL" sz="1400" b="0" i="0" u="none" strike="noStrike" cap="none" normalizeH="0" baseline="0" dirty="0" err="1">
-                <a:ln>
-                  <a:noFill/>
-                </a:ln>
-                <a:solidFill>
-                  <a:schemeClr val="tx1"/>
-                </a:solidFill>
-                <a:effectLst/>
-              </a:rPr>
-              <a:t>OoD</a:t>
-            </a:r>
-            <a:r>
-              <a:rPr kumimoji="0" lang="pl-PL" altLang="pl-PL" sz="1400" b="0" i="0" u="none" strike="noStrike" cap="none" normalizeH="0" baseline="0" dirty="0">
-                <a:ln>
-                  <a:noFill/>
-                </a:ln>
-                <a:solidFill>
-                  <a:schemeClr val="tx1"/>
-                </a:solidFill>
-                <a:effectLst/>
-              </a:rPr>
-              <a:t>) oraz identyfikacji przykładów, które model musiał "zapamiętać na siłę" (np. z celowo podmienionymi etykietami).</a:t>
-            </a:r>
-          </a:p>
-          <a:p>
-            <a:pPr marL="0" marR="0" lvl="0" indent="0" algn="l" defTabSz="914400" rtl="0" eaLnBrk="0" fontAlgn="base" latinLnBrk="0" hangingPunct="0">
-              <a:lnSpc>
-                <a:spcPct val="100000"/>
-              </a:lnSpc>
-              <a:spcBef>
-                <a:spcPct val="0"/>
-              </a:spcBef>
-              <a:spcAft>
-                <a:spcPct val="0"/>
-              </a:spcAft>
-              <a:buClrTx/>
-              <a:buSzTx/>
-              <a:buFontTx/>
-              <a:buNone/>
-              <a:tabLst/>
-            </a:pPr>
-            <a:endParaRPr kumimoji="0" lang="pl-PL" altLang="pl-PL" sz="1800" b="0" i="0" u="none" strike="noStrike" cap="none" normalizeH="0" baseline="0" dirty="0">
-              <a:ln>
-                <a:noFill/>
-              </a:ln>
-              <a:solidFill>
-                <a:schemeClr val="tx1"/>
-              </a:solidFill>
-              <a:effectLst/>
-              <a:latin typeface="Arial" panose="020B0604020202020204" pitchFamily="34" charset="0"/>
-            </a:endParaRPr>
+              <a:rPr lang="pl-PL" dirty="0"/>
+              <a:t>:</a:t>
+            </a:r>
+          </a:p>
+          <a:p>
+            <a:pPr lvl="1"/>
+            <a:r>
+              <a:rPr lang="pl-PL" dirty="0"/>
+              <a:t>Czyste tło</a:t>
+            </a:r>
+          </a:p>
+          <a:p>
+            <a:pPr lvl="1"/>
+            <a:r>
+              <a:rPr lang="pl-PL" dirty="0"/>
+              <a:t>Typowe ujęcie obiektu</a:t>
+            </a:r>
+          </a:p>
+          <a:p>
+            <a:pPr lvl="1"/>
+            <a:r>
+              <a:rPr lang="pl-PL" dirty="0"/>
+              <a:t>Cały obiekt  w kadrze</a:t>
+            </a:r>
+          </a:p>
+          <a:p>
+            <a:pPr lvl="1"/>
+            <a:r>
+              <a:rPr lang="pl-PL" dirty="0"/>
+              <a:t>Duży kontrast</a:t>
+            </a:r>
           </a:p>
         </p:txBody>
       </p:sp>
     </p:spTree>
     <p:extLst>
       <p:ext uri="{BB962C8B-B14F-4D97-AF65-F5344CB8AC3E}">
-        <p14:creationId xmlns:p14="http://schemas.microsoft.com/office/powerpoint/2010/main" val="4071234729"/>
+        <p14:creationId xmlns:p14="http://schemas.microsoft.com/office/powerpoint/2010/main" val="4177533144"/>
+      </p:ext>
+    </p:extLst>
+  </p:cSld>
+  <p:clrMapOvr>
+    <a:masterClrMapping/>
+  </p:clrMapOvr>
+</p:sld>
+</file>
+
+<file path=ppt/slides/slide7.xml><?xml version="1.0" encoding="utf-8"?>
+<p:sld xmlns:a="http://schemas.openxmlformats.org/drawingml/2006/main" xmlns:r="http://schemas.openxmlformats.org/officeDocument/2006/relationships" xmlns:p="http://schemas.openxmlformats.org/presentationml/2006/main">
+  <p:cSld>
+    <p:spTree>
+      <p:nvGrpSpPr>
+        <p:cNvPr id="1" name=""/>
+        <p:cNvGrpSpPr/>
+        <p:nvPr/>
+      </p:nvGrpSpPr>
+      <p:grpSpPr>
+        <a:xfrm>
+          <a:off x="0" y="0"/>
+          <a:ext cx="0" cy="0"/>
+          <a:chOff x="0" y="0"/>
+          <a:chExt cx="0" cy="0"/>
+        </a:xfrm>
+      </p:grpSpPr>
+      <p:sp>
+        <p:nvSpPr>
+          <p:cNvPr id="2" name="Tytuł 1">
+            <a:extLst>
+              <a:ext uri="{FF2B5EF4-FFF2-40B4-BE49-F238E27FC236}">
+                <a16:creationId xmlns:a16="http://schemas.microsoft.com/office/drawing/2014/main" id="{E94A17B2-C0EB-BBB0-BE71-552D511213D6}"/>
+              </a:ext>
+            </a:extLst>
+          </p:cNvPr>
+          <p:cNvSpPr>
+            <a:spLocks noGrp="1"/>
+          </p:cNvSpPr>
+          <p:nvPr>
+            <p:ph type="title"/>
+          </p:nvPr>
+        </p:nvSpPr>
+        <p:spPr/>
+        <p:txBody>
+          <a:bodyPr/>
+          <a:lstStyle/>
+          <a:p>
+            <a:pPr algn="ctr"/>
+            <a:r>
+              <a:rPr lang="pl-PL" dirty="0" err="1"/>
+              <a:t>VoG</a:t>
+            </a:r>
+            <a:r>
+              <a:rPr lang="pl-PL" dirty="0"/>
+              <a:t> kontra błąd modelu</a:t>
+            </a:r>
+          </a:p>
+        </p:txBody>
+      </p:sp>
+      <p:sp>
+        <p:nvSpPr>
+          <p:cNvPr id="3" name="Symbol zastępczy zawartości 2">
+            <a:extLst>
+              <a:ext uri="{FF2B5EF4-FFF2-40B4-BE49-F238E27FC236}">
+                <a16:creationId xmlns:a16="http://schemas.microsoft.com/office/drawing/2014/main" id="{C43415F0-1091-790D-04E0-A1ABFEDCEB89}"/>
+              </a:ext>
+            </a:extLst>
+          </p:cNvPr>
+          <p:cNvSpPr>
+            <a:spLocks noGrp="1"/>
+          </p:cNvSpPr>
+          <p:nvPr>
+            <p:ph idx="1"/>
+          </p:nvPr>
+        </p:nvSpPr>
+        <p:spPr>
+          <a:xfrm>
+            <a:off x="838200" y="2085390"/>
+            <a:ext cx="10515600" cy="3170657"/>
+          </a:xfrm>
+        </p:spPr>
+        <p:txBody>
+          <a:bodyPr>
+            <a:normAutofit fontScale="85000" lnSpcReduction="20000"/>
+          </a:bodyPr>
+          <a:lstStyle/>
+          <a:p>
+            <a:r>
+              <a:rPr lang="pl-PL" dirty="0"/>
+              <a:t>Dla przykładów o wysokim </a:t>
+            </a:r>
+            <a:r>
+              <a:rPr lang="pl-PL" dirty="0" err="1"/>
+              <a:t>VoG</a:t>
+            </a:r>
+            <a:r>
+              <a:rPr lang="pl-PL" dirty="0"/>
+              <a:t> błąd modelu z reguły był większy, a dla tych o niższym – większy.</a:t>
+            </a:r>
+          </a:p>
+          <a:p>
+            <a:r>
+              <a:rPr lang="pl-PL" dirty="0"/>
+              <a:t>Dla wszystkich zbiorów danych i modeli, które wzięli pod uwagę badacze, to się sprawdziło, a im wyższa złożoność modelu lub zbioru danych, tym ta tendencja była wyraźniejsza.</a:t>
+            </a:r>
+          </a:p>
+          <a:p>
+            <a:r>
+              <a:rPr lang="pl-PL" dirty="0"/>
+              <a:t>Ponadto badacze odkryli, że ten trend nie jest zależny od </a:t>
+            </a:r>
+            <a:r>
+              <a:rPr lang="pl-PL" dirty="0" err="1"/>
+              <a:t>hiperparamatrów</a:t>
+            </a:r>
+            <a:r>
+              <a:rPr lang="pl-PL" dirty="0"/>
+              <a:t> modelu lub metod inicjalizacji parametrów.</a:t>
+            </a:r>
+          </a:p>
+          <a:p>
+            <a:r>
+              <a:rPr lang="pl-PL" dirty="0" err="1"/>
+              <a:t>VoG</a:t>
+            </a:r>
+            <a:r>
+              <a:rPr lang="pl-PL" dirty="0"/>
+              <a:t> może być przydatny także jako narzędzie do nienadzorowanego kontrolowania zachowania modelu, ponieważ nie potrzebuje on prawdziwych etykiet, a jedynie dane dotyczące procesu treningu.</a:t>
+            </a:r>
+          </a:p>
+        </p:txBody>
+      </p:sp>
+    </p:spTree>
+    <p:extLst>
+      <p:ext uri="{BB962C8B-B14F-4D97-AF65-F5344CB8AC3E}">
+        <p14:creationId xmlns:p14="http://schemas.microsoft.com/office/powerpoint/2010/main" val="861038127"/>
+      </p:ext>
+    </p:extLst>
+  </p:cSld>
+  <p:clrMapOvr>
+    <a:masterClrMapping/>
+  </p:clrMapOvr>
+</p:sld>
+</file>
+
+<file path=ppt/slides/slide8.xml><?xml version="1.0" encoding="utf-8"?>
+<p:sld xmlns:a="http://schemas.openxmlformats.org/drawingml/2006/main" xmlns:r="http://schemas.openxmlformats.org/officeDocument/2006/relationships" xmlns:p="http://schemas.openxmlformats.org/presentationml/2006/main">
+  <p:cSld>
+    <p:spTree>
+      <p:nvGrpSpPr>
+        <p:cNvPr id="1" name=""/>
+        <p:cNvGrpSpPr/>
+        <p:nvPr/>
+      </p:nvGrpSpPr>
+      <p:grpSpPr>
+        <a:xfrm>
+          <a:off x="0" y="0"/>
+          <a:ext cx="0" cy="0"/>
+          <a:chOff x="0" y="0"/>
+          <a:chExt cx="0" cy="0"/>
+        </a:xfrm>
+      </p:grpSpPr>
+      <p:sp>
+        <p:nvSpPr>
+          <p:cNvPr id="2" name="Tytuł 1">
+            <a:extLst>
+              <a:ext uri="{FF2B5EF4-FFF2-40B4-BE49-F238E27FC236}">
+                <a16:creationId xmlns:a16="http://schemas.microsoft.com/office/drawing/2014/main" id="{3D9267BD-31BE-D196-E8F3-51C235004001}"/>
+              </a:ext>
+            </a:extLst>
+          </p:cNvPr>
+          <p:cNvSpPr>
+            <a:spLocks noGrp="1"/>
+          </p:cNvSpPr>
+          <p:nvPr>
+            <p:ph type="title"/>
+          </p:nvPr>
+        </p:nvSpPr>
+        <p:spPr/>
+        <p:txBody>
+          <a:bodyPr/>
+          <a:lstStyle/>
+          <a:p>
+            <a:pPr algn="ctr"/>
+            <a:r>
+              <a:rPr lang="pl-PL" dirty="0"/>
+              <a:t>Zachowanie </a:t>
+            </a:r>
+            <a:r>
+              <a:rPr lang="pl-PL" dirty="0" err="1"/>
+              <a:t>VoG</a:t>
+            </a:r>
+            <a:r>
+              <a:rPr lang="pl-PL" dirty="0"/>
+              <a:t> w zależności od etapu treningu</a:t>
+            </a:r>
+          </a:p>
+        </p:txBody>
+      </p:sp>
+      <p:sp>
+        <p:nvSpPr>
+          <p:cNvPr id="3" name="Symbol zastępczy zawartości 2">
+            <a:extLst>
+              <a:ext uri="{FF2B5EF4-FFF2-40B4-BE49-F238E27FC236}">
+                <a16:creationId xmlns:a16="http://schemas.microsoft.com/office/drawing/2014/main" id="{FBC7E2F2-F8D4-5A32-3F4D-0FADE83531CE}"/>
+              </a:ext>
+            </a:extLst>
+          </p:cNvPr>
+          <p:cNvSpPr>
+            <a:spLocks noGrp="1"/>
+          </p:cNvSpPr>
+          <p:nvPr>
+            <p:ph idx="1"/>
+          </p:nvPr>
+        </p:nvSpPr>
+        <p:spPr/>
+        <p:txBody>
+          <a:bodyPr>
+            <a:normAutofit lnSpcReduction="10000"/>
+          </a:bodyPr>
+          <a:lstStyle/>
+          <a:p>
+            <a:r>
+              <a:rPr lang="pl-PL" dirty="0"/>
+              <a:t>Co ciekawe, </a:t>
+            </a:r>
+            <a:r>
+              <a:rPr lang="pl-PL" dirty="0" err="1"/>
+              <a:t>VoG</a:t>
+            </a:r>
+            <a:r>
+              <a:rPr lang="pl-PL" dirty="0"/>
+              <a:t> nie jest jednorodne względem etapu treningu.</a:t>
+            </a:r>
+          </a:p>
+          <a:p>
+            <a:r>
+              <a:rPr lang="pl-PL" dirty="0"/>
+              <a:t>Na początkowym etapie treningu przykłady, dla których błąd modelu jest niski, wykazują wysokie </a:t>
+            </a:r>
+            <a:r>
+              <a:rPr lang="pl-PL" dirty="0" err="1"/>
+              <a:t>VoG</a:t>
+            </a:r>
+            <a:r>
+              <a:rPr lang="pl-PL" dirty="0"/>
+              <a:t>, natomiast w końcowej fazie jest odwrotnie.</a:t>
+            </a:r>
+          </a:p>
+          <a:p>
+            <a:r>
+              <a:rPr lang="pl-PL" dirty="0"/>
+              <a:t>Być może jest to spowodowane tym, że na początku, kiedy model próbuje dopasować się do łatwych przykładów, od razu „wie” jak ma to zrobić i w zdecydowany sposób zmienia dla nich gradienty, co przekłada się na duży wkład do </a:t>
+            </a:r>
+            <a:r>
+              <a:rPr lang="pl-PL" dirty="0" err="1"/>
+              <a:t>VoG</a:t>
+            </a:r>
+            <a:r>
+              <a:rPr lang="pl-PL" dirty="0"/>
+              <a:t>, natomiast później, kiedy łatwe przykłady są już ustabilizowane, skupia się na tych trudniejszych, zmieniając intensywnie dla nich gradienty, co dominuje wariancję.</a:t>
+            </a:r>
+          </a:p>
+        </p:txBody>
+      </p:sp>
+    </p:spTree>
+    <p:extLst>
+      <p:ext uri="{BB962C8B-B14F-4D97-AF65-F5344CB8AC3E}">
+        <p14:creationId xmlns:p14="http://schemas.microsoft.com/office/powerpoint/2010/main" val="4218909793"/>
+      </p:ext>
+    </p:extLst>
+  </p:cSld>
+  <p:clrMapOvr>
+    <a:masterClrMapping/>
+  </p:clrMapOvr>
+</p:sld>
+</file>
+
+<file path=ppt/slides/slide9.xml><?xml version="1.0" encoding="utf-8"?>
+<p:sld xmlns:a="http://schemas.openxmlformats.org/drawingml/2006/main" xmlns:r="http://schemas.openxmlformats.org/officeDocument/2006/relationships" xmlns:p="http://schemas.openxmlformats.org/presentationml/2006/main">
+  <p:cSld>
+    <p:spTree>
+      <p:nvGrpSpPr>
+        <p:cNvPr id="1" name=""/>
+        <p:cNvGrpSpPr/>
+        <p:nvPr/>
+      </p:nvGrpSpPr>
+      <p:grpSpPr>
+        <a:xfrm>
+          <a:off x="0" y="0"/>
+          <a:ext cx="0" cy="0"/>
+          <a:chOff x="0" y="0"/>
+          <a:chExt cx="0" cy="0"/>
+        </a:xfrm>
+      </p:grpSpPr>
+      <p:sp>
+        <p:nvSpPr>
+          <p:cNvPr id="2" name="Tytuł 1">
+            <a:extLst>
+              <a:ext uri="{FF2B5EF4-FFF2-40B4-BE49-F238E27FC236}">
+                <a16:creationId xmlns:a16="http://schemas.microsoft.com/office/drawing/2014/main" id="{2ED0D733-F979-7B9B-6A3B-C0D49D1BAEC1}"/>
+              </a:ext>
+            </a:extLst>
+          </p:cNvPr>
+          <p:cNvSpPr>
+            <a:spLocks noGrp="1"/>
+          </p:cNvSpPr>
+          <p:nvPr>
+            <p:ph type="title"/>
+          </p:nvPr>
+        </p:nvSpPr>
+        <p:spPr/>
+        <p:txBody>
+          <a:bodyPr/>
+          <a:lstStyle/>
+          <a:p>
+            <a:pPr algn="ctr"/>
+            <a:r>
+              <a:rPr lang="pl-PL" dirty="0"/>
+              <a:t>Wykrywanie przez </a:t>
+            </a:r>
+            <a:r>
+              <a:rPr lang="pl-PL" dirty="0" err="1"/>
+              <a:t>VoG</a:t>
+            </a:r>
+            <a:r>
+              <a:rPr lang="pl-PL" dirty="0"/>
+              <a:t> zapamiętanych przez model przykładów</a:t>
+            </a:r>
+          </a:p>
+        </p:txBody>
+      </p:sp>
+      <p:sp>
+        <p:nvSpPr>
+          <p:cNvPr id="3" name="Symbol zastępczy zawartości 2">
+            <a:extLst>
+              <a:ext uri="{FF2B5EF4-FFF2-40B4-BE49-F238E27FC236}">
+                <a16:creationId xmlns:a16="http://schemas.microsoft.com/office/drawing/2014/main" id="{2CE349CF-70E2-E771-854B-CA367F784CA9}"/>
+              </a:ext>
+            </a:extLst>
+          </p:cNvPr>
+          <p:cNvSpPr>
+            <a:spLocks noGrp="1"/>
+          </p:cNvSpPr>
+          <p:nvPr>
+            <p:ph idx="1"/>
+          </p:nvPr>
+        </p:nvSpPr>
+        <p:spPr>
+          <a:xfrm>
+            <a:off x="838200" y="2209748"/>
+            <a:ext cx="10515600" cy="3419373"/>
+          </a:xfrm>
+        </p:spPr>
+        <p:txBody>
+          <a:bodyPr>
+            <a:normAutofit lnSpcReduction="10000"/>
+          </a:bodyPr>
+          <a:lstStyle/>
+          <a:p>
+            <a:r>
+              <a:rPr lang="pl-PL" dirty="0"/>
+              <a:t>Badacze </a:t>
+            </a:r>
+            <a:r>
+              <a:rPr lang="pl-PL" dirty="0" err="1"/>
+              <a:t>przreprowadzili</a:t>
+            </a:r>
+            <a:r>
+              <a:rPr lang="pl-PL" dirty="0"/>
+              <a:t> również eksperyment, w którym niektórym obrazkom przypisali fałszywe etykiety, a następnie wytrenowali na nich model, który osiągnął na tych danych zerowy błąd, tzn. przeuczył się.</a:t>
+            </a:r>
+          </a:p>
+          <a:p>
+            <a:r>
+              <a:rPr lang="pl-PL" dirty="0"/>
+              <a:t>Okazało się, że rozkład </a:t>
+            </a:r>
+            <a:r>
+              <a:rPr lang="pl-PL" dirty="0" err="1"/>
+              <a:t>VoG</a:t>
+            </a:r>
+            <a:r>
+              <a:rPr lang="pl-PL" dirty="0"/>
+              <a:t> wśród tych fałszywych przykładów wyglądał inaczej niż wśród reszty (przykłady fałszywe miały średnio wyższe </a:t>
+            </a:r>
+            <a:r>
+              <a:rPr lang="pl-PL" dirty="0" err="1"/>
+              <a:t>VoG</a:t>
+            </a:r>
+            <a:r>
+              <a:rPr lang="pl-PL" dirty="0"/>
+              <a:t>), co oznacza, że za pomocą </a:t>
+            </a:r>
+            <a:r>
+              <a:rPr lang="pl-PL" dirty="0" err="1"/>
+              <a:t>VoG</a:t>
+            </a:r>
+            <a:r>
+              <a:rPr lang="pl-PL" dirty="0"/>
+              <a:t> można rozróżniać między sobą przykłady sklasyfikowane prawidłowo od tych sztucznie oszukanych.</a:t>
+            </a:r>
+          </a:p>
+        </p:txBody>
+      </p:sp>
+    </p:spTree>
+    <p:extLst>
+      <p:ext uri="{BB962C8B-B14F-4D97-AF65-F5344CB8AC3E}">
+        <p14:creationId xmlns:p14="http://schemas.microsoft.com/office/powerpoint/2010/main" val="804434129"/>
       </p:ext>
     </p:extLst>
   </p:cSld>
@@ -5784,4 +9808,319 @@
     </a:ext>
   </a:extLst>
 </a:theme>
+</file>
+
+<file path=ppt/theme/theme2.xml><?xml version="1.0" encoding="utf-8"?>
+<a:theme xmlns:a="http://schemas.openxmlformats.org/drawingml/2006/main" name="1_Motyw pakietu Office">
+  <a:themeElements>
+    <a:clrScheme name="Pakiet Office">
+      <a:dk1>
+        <a:sysClr val="windowText" lastClr="000000"/>
+      </a:dk1>
+      <a:lt1>
+        <a:sysClr val="window" lastClr="FFFFFF"/>
+      </a:lt1>
+      <a:dk2>
+        <a:srgbClr val="0E2841"/>
+      </a:dk2>
+      <a:lt2>
+        <a:srgbClr val="E8E8E8"/>
+      </a:lt2>
+      <a:accent1>
+        <a:srgbClr val="156082"/>
+      </a:accent1>
+      <a:accent2>
+        <a:srgbClr val="E97132"/>
+      </a:accent2>
+      <a:accent3>
+        <a:srgbClr val="196B24"/>
+      </a:accent3>
+      <a:accent4>
+        <a:srgbClr val="0F9ED5"/>
+      </a:accent4>
+      <a:accent5>
+        <a:srgbClr val="A02B93"/>
+      </a:accent5>
+      <a:accent6>
+        <a:srgbClr val="4EA72E"/>
+      </a:accent6>
+      <a:hlink>
+        <a:srgbClr val="467886"/>
+      </a:hlink>
+      <a:folHlink>
+        <a:srgbClr val="96607D"/>
+      </a:folHlink>
+    </a:clrScheme>
+    <a:fontScheme name="Pakiet Office">
+      <a:majorFont>
+        <a:latin typeface="Aptos Display" panose="02110004020202020204"/>
+        <a:ea typeface=""/>
+        <a:cs typeface=""/>
+        <a:font script="Jpan" typeface="游ゴシック Light"/>
+        <a:font script="Hang" typeface="맑은 고딕"/>
+        <a:font script="Hans" typeface="等线 Light"/>
+        <a:font script="Hant" typeface="新細明體"/>
+        <a:font script="Arab" typeface="Times New Roman"/>
+        <a:font script="Hebr" typeface="Times New Roman"/>
+        <a:font script="Thai" typeface="Angsana New"/>
+        <a:font script="Ethi" typeface="Nyala"/>
+        <a:font script="Beng" typeface="Vrinda"/>
+        <a:font script="Gujr" typeface="Shruti"/>
+        <a:font script="Khmr" typeface="MoolBoran"/>
+        <a:font script="Knda" typeface="Tunga"/>
+        <a:font script="Guru" typeface="Raavi"/>
+        <a:font script="Cans" typeface="Euphemia"/>
+        <a:font script="Cher" typeface="Plantagenet Cherokee"/>
+        <a:font script="Yiii" typeface="Microsoft Yi Baiti"/>
+        <a:font script="Tibt" typeface="Microsoft Himalaya"/>
+        <a:font script="Thaa" typeface="MV Boli"/>
+        <a:font script="Deva" typeface="Mangal"/>
+        <a:font script="Telu" typeface="Gautami"/>
+        <a:font script="Taml" typeface="Latha"/>
+        <a:font script="Syrc" typeface="Estrangelo Edessa"/>
+        <a:font script="Orya" typeface="Kalinga"/>
+        <a:font script="Mlym" typeface="Kartika"/>
+        <a:font script="Laoo" typeface="DokChampa"/>
+        <a:font script="Sinh" typeface="Iskoola Pota"/>
+        <a:font script="Mong" typeface="Mongolian Baiti"/>
+        <a:font script="Viet" typeface="Times New Roman"/>
+        <a:font script="Uigh" typeface="Microsoft Uighur"/>
+        <a:font script="Geor" typeface="Sylfaen"/>
+        <a:font script="Armn" typeface="Arial"/>
+        <a:font script="Bugi" typeface="Leelawadee UI"/>
+        <a:font script="Bopo" typeface="Microsoft JhengHei"/>
+        <a:font script="Java" typeface="Javanese Text"/>
+        <a:font script="Lisu" typeface="Segoe UI"/>
+        <a:font script="Mymr" typeface="Myanmar Text"/>
+        <a:font script="Nkoo" typeface="Ebrima"/>
+        <a:font script="Olck" typeface="Nirmala UI"/>
+        <a:font script="Osma" typeface="Ebrima"/>
+        <a:font script="Phag" typeface="Phagspa"/>
+        <a:font script="Syrn" typeface="Estrangelo Edessa"/>
+        <a:font script="Syrj" typeface="Estrangelo Edessa"/>
+        <a:font script="Syre" typeface="Estrangelo Edessa"/>
+        <a:font script="Sora" typeface="Nirmala UI"/>
+        <a:font script="Tale" typeface="Microsoft Tai Le"/>
+        <a:font script="Talu" typeface="Microsoft New Tai Lue"/>
+        <a:font script="Tfng" typeface="Ebrima"/>
+      </a:majorFont>
+      <a:minorFont>
+        <a:latin typeface="Aptos" panose="02110004020202020204"/>
+        <a:ea typeface=""/>
+        <a:cs typeface=""/>
+        <a:font script="Jpan" typeface="游ゴシック"/>
+        <a:font script="Hang" typeface="맑은 고딕"/>
+        <a:font script="Hans" typeface="等线"/>
+        <a:font script="Hant" typeface="新細明體"/>
+        <a:font script="Arab" typeface="Arial"/>
+        <a:font script="Hebr" typeface="Arial"/>
+        <a:font script="Thai" typeface="Cordia New"/>
+        <a:font script="Ethi" typeface="Nyala"/>
+        <a:font script="Beng" typeface="Vrinda"/>
+        <a:font script="Gujr" typeface="Shruti"/>
+        <a:font script="Khmr" typeface="DaunPenh"/>
+        <a:font script="Knda" typeface="Tunga"/>
+        <a:font script="Guru" typeface="Raavi"/>
+        <a:font script="Cans" typeface="Euphemia"/>
+        <a:font script="Cher" typeface="Plantagenet Cherokee"/>
+        <a:font script="Yiii" typeface="Microsoft Yi Baiti"/>
+        <a:font script="Tibt" typeface="Microsoft Himalaya"/>
+        <a:font script="Thaa" typeface="MV Boli"/>
+        <a:font script="Deva" typeface="Mangal"/>
+        <a:font script="Telu" typeface="Gautami"/>
+        <a:font script="Taml" typeface="Latha"/>
+        <a:font script="Syrc" typeface="Estrangelo Edessa"/>
+        <a:font script="Orya" typeface="Kalinga"/>
+        <a:font script="Mlym" typeface="Kartika"/>
+        <a:font script="Laoo" typeface="DokChampa"/>
+        <a:font script="Sinh" typeface="Iskoola Pota"/>
+        <a:font script="Mong" typeface="Mongolian Baiti"/>
+        <a:font script="Viet" typeface="Arial"/>
+        <a:font script="Uigh" typeface="Microsoft Uighur"/>
+        <a:font script="Geor" typeface="Sylfaen"/>
+        <a:font script="Armn" typeface="Arial"/>
+        <a:font script="Bugi" typeface="Leelawadee UI"/>
+        <a:font script="Bopo" typeface="Microsoft JhengHei"/>
+        <a:font script="Java" typeface="Javanese Text"/>
+        <a:font script="Lisu" typeface="Segoe UI"/>
+        <a:font script="Mymr" typeface="Myanmar Text"/>
+        <a:font script="Nkoo" typeface="Ebrima"/>
+        <a:font script="Olck" typeface="Nirmala UI"/>
+        <a:font script="Osma" typeface="Ebrima"/>
+        <a:font script="Phag" typeface="Phagspa"/>
+        <a:font script="Syrn" typeface="Estrangelo Edessa"/>
+        <a:font script="Syrj" typeface="Estrangelo Edessa"/>
+        <a:font script="Syre" typeface="Estrangelo Edessa"/>
+        <a:font script="Sora" typeface="Nirmala UI"/>
+        <a:font script="Tale" typeface="Microsoft Tai Le"/>
+        <a:font script="Talu" typeface="Microsoft New Tai Lue"/>
+        <a:font script="Tfng" typeface="Ebrima"/>
+      </a:minorFont>
+    </a:fontScheme>
+    <a:fmtScheme name="Pakiet Office">
+      <a:fillStyleLst>
+        <a:solidFill>
+          <a:schemeClr val="phClr"/>
+        </a:solidFill>
+        <a:gradFill rotWithShape="1">
+          <a:gsLst>
+            <a:gs pos="0">
+              <a:schemeClr val="phClr">
+                <a:lumMod val="110000"/>
+                <a:satMod val="105000"/>
+                <a:tint val="67000"/>
+              </a:schemeClr>
+            </a:gs>
+            <a:gs pos="50000">
+              <a:schemeClr val="phClr">
+                <a:lumMod val="105000"/>
+                <a:satMod val="103000"/>
+                <a:tint val="73000"/>
+              </a:schemeClr>
+            </a:gs>
+            <a:gs pos="100000">
+              <a:schemeClr val="phClr">
+                <a:lumMod val="105000"/>
+                <a:satMod val="109000"/>
+                <a:tint val="81000"/>
+              </a:schemeClr>
+            </a:gs>
+          </a:gsLst>
+          <a:lin ang="5400000" scaled="0"/>
+        </a:gradFill>
+        <a:gradFill rotWithShape="1">
+          <a:gsLst>
+            <a:gs pos="0">
+              <a:schemeClr val="phClr">
+                <a:satMod val="103000"/>
+                <a:lumMod val="102000"/>
+                <a:tint val="94000"/>
+              </a:schemeClr>
+            </a:gs>
+            <a:gs pos="50000">
+              <a:schemeClr val="phClr">
+                <a:satMod val="110000"/>
+                <a:lumMod val="100000"/>
+                <a:shade val="100000"/>
+              </a:schemeClr>
+            </a:gs>
+            <a:gs pos="100000">
+              <a:schemeClr val="phClr">
+                <a:lumMod val="99000"/>
+                <a:satMod val="120000"/>
+                <a:shade val="78000"/>
+              </a:schemeClr>
+            </a:gs>
+          </a:gsLst>
+          <a:lin ang="5400000" scaled="0"/>
+        </a:gradFill>
+      </a:fillStyleLst>
+      <a:lnStyleLst>
+        <a:ln w="12700" cap="flat" cmpd="sng" algn="ctr">
+          <a:solidFill>
+            <a:schemeClr val="phClr"/>
+          </a:solidFill>
+          <a:prstDash val="solid"/>
+          <a:miter lim="800000"/>
+        </a:ln>
+        <a:ln w="19050" cap="flat" cmpd="sng" algn="ctr">
+          <a:solidFill>
+            <a:schemeClr val="phClr"/>
+          </a:solidFill>
+          <a:prstDash val="solid"/>
+          <a:miter lim="800000"/>
+        </a:ln>
+        <a:ln w="25400" cap="flat" cmpd="sng" algn="ctr">
+          <a:solidFill>
+            <a:schemeClr val="phClr"/>
+          </a:solidFill>
+          <a:prstDash val="solid"/>
+          <a:miter lim="800000"/>
+        </a:ln>
+      </a:lnStyleLst>
+      <a:effectStyleLst>
+        <a:effectStyle>
+          <a:effectLst/>
+        </a:effectStyle>
+        <a:effectStyle>
+          <a:effectLst/>
+        </a:effectStyle>
+        <a:effectStyle>
+          <a:effectLst>
+            <a:outerShdw blurRad="57150" dist="19050" dir="5400000" algn="ctr" rotWithShape="0">
+              <a:srgbClr val="000000">
+                <a:alpha val="63000"/>
+              </a:srgbClr>
+            </a:outerShdw>
+          </a:effectLst>
+        </a:effectStyle>
+      </a:effectStyleLst>
+      <a:bgFillStyleLst>
+        <a:solidFill>
+          <a:schemeClr val="phClr"/>
+        </a:solidFill>
+        <a:solidFill>
+          <a:schemeClr val="phClr">
+            <a:tint val="95000"/>
+            <a:satMod val="170000"/>
+          </a:schemeClr>
+        </a:solidFill>
+        <a:gradFill rotWithShape="1">
+          <a:gsLst>
+            <a:gs pos="0">
+              <a:schemeClr val="phClr">
+                <a:tint val="93000"/>
+                <a:satMod val="150000"/>
+                <a:shade val="98000"/>
+                <a:lumMod val="102000"/>
+              </a:schemeClr>
+            </a:gs>
+            <a:gs pos="50000">
+              <a:schemeClr val="phClr">
+                <a:tint val="98000"/>
+                <a:satMod val="130000"/>
+                <a:shade val="90000"/>
+                <a:lumMod val="103000"/>
+              </a:schemeClr>
+            </a:gs>
+            <a:gs pos="100000">
+              <a:schemeClr val="phClr">
+                <a:shade val="63000"/>
+                <a:satMod val="120000"/>
+              </a:schemeClr>
+            </a:gs>
+          </a:gsLst>
+          <a:lin ang="5400000" scaled="0"/>
+        </a:gradFill>
+      </a:bgFillStyleLst>
+    </a:fmtScheme>
+  </a:themeElements>
+  <a:objectDefaults>
+    <a:lnDef>
+      <a:spPr/>
+      <a:bodyPr/>
+      <a:lstStyle/>
+      <a:style>
+        <a:lnRef idx="2">
+          <a:schemeClr val="accent1"/>
+        </a:lnRef>
+        <a:fillRef idx="0">
+          <a:schemeClr val="accent1"/>
+        </a:fillRef>
+        <a:effectRef idx="1">
+          <a:schemeClr val="accent1"/>
+        </a:effectRef>
+        <a:fontRef idx="minor">
+          <a:schemeClr val="tx1"/>
+        </a:fontRef>
+      </a:style>
+    </a:lnDef>
+  </a:objectDefaults>
+  <a:extraClrSchemeLst/>
+  <a:extLst>
+    <a:ext uri="{05A4C25C-085E-4340-85A3-A5531E510DB2}">
+      <thm15:themeFamily xmlns:thm15="http://schemas.microsoft.com/office/thememl/2012/main" name="Office Theme" id="{2E142A2C-CD16-42D6-873A-C26D2A0506FA}" vid="{1BDDFF52-6CD6-40A5-AB3C-68EB2F1E4D0A}"/>
+    </a:ext>
+  </a:extLst>
+</a:theme>
 </file>
--- a/Analiza Teoretyczna Metryki VoG.pptx
+++ b/Analiza Teoretyczna Metryki VoG.pptx
@@ -18,6 +18,7 @@
     <p:sldId id="265" r:id="rId12"/>
     <p:sldId id="260" r:id="rId13"/>
     <p:sldId id="261" r:id="rId14"/>
+    <p:sldId id="268" r:id="rId15"/>
   </p:sldIdLst>
   <p:sldSz cx="12192000" cy="6858000"/>
   <p:notesSz cx="6858000" cy="9144000"/>
@@ -1095,7 +1096,7 @@
           <a:p>
             <a:fld id="{E180F3EB-CED7-43F4-9E23-4BCBF0141284}" type="datetimeFigureOut">
               <a:rPr lang="pl-PL" smtClean="0"/>
-              <a:t>26.03.2026</a:t>
+              <a:t>27.03.2026</a:t>
             </a:fld>
             <a:endParaRPr lang="pl-PL"/>
           </a:p>
@@ -1293,7 +1294,7 @@
           <a:p>
             <a:fld id="{E180F3EB-CED7-43F4-9E23-4BCBF0141284}" type="datetimeFigureOut">
               <a:rPr lang="pl-PL" smtClean="0"/>
-              <a:t>26.03.2026</a:t>
+              <a:t>27.03.2026</a:t>
             </a:fld>
             <a:endParaRPr lang="pl-PL"/>
           </a:p>
@@ -1568,7 +1569,7 @@
           <a:p>
             <a:fld id="{E180F3EB-CED7-43F4-9E23-4BCBF0141284}" type="datetimeFigureOut">
               <a:rPr lang="pl-PL" smtClean="0"/>
-              <a:t>26.03.2026</a:t>
+              <a:t>27.03.2026</a:t>
             </a:fld>
             <a:endParaRPr lang="pl-PL"/>
           </a:p>
@@ -1833,7 +1834,7 @@
           <a:p>
             <a:fld id="{E180F3EB-CED7-43F4-9E23-4BCBF0141284}" type="datetimeFigureOut">
               <a:rPr lang="pl-PL" smtClean="0"/>
-              <a:t>26.03.2026</a:t>
+              <a:t>27.03.2026</a:t>
             </a:fld>
             <a:endParaRPr lang="pl-PL"/>
           </a:p>
@@ -2245,7 +2246,7 @@
           <a:p>
             <a:fld id="{E180F3EB-CED7-43F4-9E23-4BCBF0141284}" type="datetimeFigureOut">
               <a:rPr lang="pl-PL" smtClean="0"/>
-              <a:t>26.03.2026</a:t>
+              <a:t>27.03.2026</a:t>
             </a:fld>
             <a:endParaRPr lang="pl-PL"/>
           </a:p>
@@ -2386,7 +2387,7 @@
           <a:p>
             <a:fld id="{E180F3EB-CED7-43F4-9E23-4BCBF0141284}" type="datetimeFigureOut">
               <a:rPr lang="pl-PL" smtClean="0"/>
-              <a:t>26.03.2026</a:t>
+              <a:t>27.03.2026</a:t>
             </a:fld>
             <a:endParaRPr lang="pl-PL"/>
           </a:p>
@@ -2499,7 +2500,7 @@
           <a:p>
             <a:fld id="{E180F3EB-CED7-43F4-9E23-4BCBF0141284}" type="datetimeFigureOut">
               <a:rPr lang="pl-PL" smtClean="0"/>
-              <a:t>26.03.2026</a:t>
+              <a:t>27.03.2026</a:t>
             </a:fld>
             <a:endParaRPr lang="pl-PL"/>
           </a:p>
@@ -3008,7 +3009,7 @@
           <a:p>
             <a:fld id="{E180F3EB-CED7-43F4-9E23-4BCBF0141284}" type="datetimeFigureOut">
               <a:rPr lang="pl-PL" smtClean="0"/>
-              <a:t>26.03.2026</a:t>
+              <a:t>27.03.2026</a:t>
             </a:fld>
             <a:endParaRPr lang="pl-PL"/>
           </a:p>
@@ -3296,7 +3297,7 @@
           <a:p>
             <a:fld id="{E180F3EB-CED7-43F4-9E23-4BCBF0141284}" type="datetimeFigureOut">
               <a:rPr lang="pl-PL" smtClean="0"/>
-              <a:t>26.03.2026</a:t>
+              <a:t>27.03.2026</a:t>
             </a:fld>
             <a:endParaRPr lang="pl-PL"/>
           </a:p>
@@ -3494,7 +3495,7 @@
           <a:p>
             <a:fld id="{E180F3EB-CED7-43F4-9E23-4BCBF0141284}" type="datetimeFigureOut">
               <a:rPr lang="pl-PL" smtClean="0"/>
-              <a:t>26.03.2026</a:t>
+              <a:t>27.03.2026</a:t>
             </a:fld>
             <a:endParaRPr lang="pl-PL"/>
           </a:p>
@@ -3702,7 +3703,7 @@
           <a:p>
             <a:fld id="{E180F3EB-CED7-43F4-9E23-4BCBF0141284}" type="datetimeFigureOut">
               <a:rPr lang="pl-PL" smtClean="0"/>
-              <a:t>26.03.2026</a:t>
+              <a:t>27.03.2026</a:t>
             </a:fld>
             <a:endParaRPr lang="pl-PL"/>
           </a:p>
@@ -6317,7 +6318,7 @@
           <a:p>
             <a:fld id="{E180F3EB-CED7-43F4-9E23-4BCBF0141284}" type="datetimeFigureOut">
               <a:rPr lang="pl-PL" smtClean="0"/>
-              <a:t>26.03.2026</a:t>
+              <a:t>27.03.2026</a:t>
             </a:fld>
             <a:endParaRPr lang="pl-PL"/>
           </a:p>
@@ -6756,9 +6757,14 @@
           <a:lstStyle/>
           <a:p>
             <a:r>
-              <a:rPr lang="pl-PL"/>
-              <a:t>Analiza Teoretyczna Metryki VoG</a:t>
-            </a:r>
+              <a:rPr lang="pl-PL" dirty="0"/>
+              <a:t>Analiza Teoretyczna Metryki </a:t>
+            </a:r>
+            <a:r>
+              <a:rPr lang="pl-PL" dirty="0" err="1"/>
+              <a:t>VoG</a:t>
+            </a:r>
+            <a:endParaRPr lang="pl-PL" dirty="0"/>
           </a:p>
         </p:txBody>
       </p:sp>
@@ -6778,7 +6784,12 @@
             <p:ph type="subTitle" idx="1"/>
           </p:nvPr>
         </p:nvSpPr>
-        <p:spPr/>
+        <p:spPr>
+          <a:xfrm>
+            <a:off x="1524000" y="3602038"/>
+            <a:ext cx="9144000" cy="809028"/>
+          </a:xfrm>
+        </p:spPr>
         <p:txBody>
           <a:bodyPr/>
           <a:lstStyle/>
@@ -6786,6 +6797,122 @@
             <a:r>
               <a:rPr lang="pl-PL" dirty="0"/>
               <a:t>Matematyczna logika oceny trudności przykładów oraz oryginalny kod źródłowy</a:t>
+            </a:r>
+          </a:p>
+        </p:txBody>
+      </p:sp>
+      <p:sp>
+        <p:nvSpPr>
+          <p:cNvPr id="4" name="pole tekstowe 3">
+            <a:extLst>
+              <a:ext uri="{FF2B5EF4-FFF2-40B4-BE49-F238E27FC236}">
+                <a16:creationId xmlns:a16="http://schemas.microsoft.com/office/drawing/2014/main" id="{31A716BE-FDF7-A567-B5FD-37554978D64E}"/>
+              </a:ext>
+            </a:extLst>
+          </p:cNvPr>
+          <p:cNvSpPr txBox="1"/>
+          <p:nvPr/>
+        </p:nvSpPr>
+        <p:spPr>
+          <a:xfrm>
+            <a:off x="1524000" y="4498848"/>
+            <a:ext cx="9144000" cy="646331"/>
+          </a:xfrm>
+          <a:prstGeom prst="rect">
+            <a:avLst/>
+          </a:prstGeom>
+          <a:noFill/>
+        </p:spPr>
+        <p:txBody>
+          <a:bodyPr wrap="square" rtlCol="0">
+            <a:spAutoFit/>
+          </a:bodyPr>
+          <a:lstStyle/>
+          <a:p>
+            <a:pPr algn="ctr"/>
+            <a:r>
+              <a:rPr lang="pl-PL" dirty="0"/>
+              <a:t>Na podstawie artykułu </a:t>
+            </a:r>
+            <a:r>
+              <a:rPr lang="pl-PL" dirty="0" err="1"/>
+              <a:t>Chirag</a:t>
+            </a:r>
+            <a:r>
+              <a:rPr lang="pl-PL" dirty="0"/>
+              <a:t> </a:t>
+            </a:r>
+            <a:r>
+              <a:rPr lang="pl-PL" dirty="0" err="1"/>
+              <a:t>Agarwal</a:t>
+            </a:r>
+            <a:r>
+              <a:rPr lang="pl-PL" dirty="0"/>
+              <a:t>, Daniel </a:t>
+            </a:r>
+            <a:r>
+              <a:rPr lang="pl-PL" dirty="0" err="1"/>
+              <a:t>D’souza</a:t>
+            </a:r>
+            <a:r>
+              <a:rPr lang="pl-PL" dirty="0"/>
+              <a:t>, Sara Hooker. </a:t>
+            </a:r>
+            <a:r>
+              <a:rPr lang="pl-PL" dirty="0" err="1"/>
+              <a:t>Estimating</a:t>
+            </a:r>
+            <a:r>
+              <a:rPr lang="pl-PL" dirty="0"/>
+              <a:t> </a:t>
+            </a:r>
+            <a:r>
+              <a:rPr lang="pl-PL" dirty="0" err="1"/>
+              <a:t>Example</a:t>
+            </a:r>
+            <a:r>
+              <a:rPr lang="pl-PL" dirty="0"/>
+              <a:t> </a:t>
+            </a:r>
+            <a:r>
+              <a:rPr lang="pl-PL" dirty="0" err="1"/>
+              <a:t>Difficulty</a:t>
+            </a:r>
+            <a:r>
+              <a:rPr lang="pl-PL" dirty="0"/>
+              <a:t> </a:t>
+            </a:r>
+            <a:r>
+              <a:rPr lang="pl-PL" dirty="0" err="1"/>
+              <a:t>uding</a:t>
+            </a:r>
+            <a:r>
+              <a:rPr lang="pl-PL" dirty="0"/>
+              <a:t> </a:t>
+            </a:r>
+            <a:r>
+              <a:rPr lang="pl-PL" dirty="0" err="1"/>
+              <a:t>Variance</a:t>
+            </a:r>
+            <a:r>
+              <a:rPr lang="pl-PL" dirty="0"/>
+              <a:t> of </a:t>
+            </a:r>
+            <a:r>
+              <a:rPr lang="pl-PL" dirty="0" err="1"/>
+              <a:t>Gradients</a:t>
+            </a:r>
+            <a:r>
+              <a:rPr lang="pl-PL" dirty="0"/>
+              <a:t>. </a:t>
+            </a:r>
+            <a:r>
+              <a:rPr lang="pl-PL" i="1" dirty="0" err="1"/>
+              <a:t>arXiv</a:t>
+            </a:r>
+            <a:r>
+              <a:rPr lang="pl-PL" dirty="0"/>
+              <a:t>, 2022</a:t>
             </a:r>
           </a:p>
         </p:txBody>
@@ -7776,6 +7903,86 @@
     <p:extLst>
       <p:ext uri="{BB962C8B-B14F-4D97-AF65-F5344CB8AC3E}">
         <p14:creationId xmlns:p14="http://schemas.microsoft.com/office/powerpoint/2010/main" val="4071234729"/>
+      </p:ext>
+    </p:extLst>
+  </p:cSld>
+  <p:clrMapOvr>
+    <a:masterClrMapping/>
+  </p:clrMapOvr>
+</p:sld>
+</file>
+
+<file path=ppt/slides/slide13.xml><?xml version="1.0" encoding="utf-8"?>
+<p:sld xmlns:a="http://schemas.openxmlformats.org/drawingml/2006/main" xmlns:r="http://schemas.openxmlformats.org/officeDocument/2006/relationships" xmlns:p="http://schemas.openxmlformats.org/presentationml/2006/main">
+  <p:cSld>
+    <p:spTree>
+      <p:nvGrpSpPr>
+        <p:cNvPr id="1" name=""/>
+        <p:cNvGrpSpPr/>
+        <p:nvPr/>
+      </p:nvGrpSpPr>
+      <p:grpSpPr>
+        <a:xfrm>
+          <a:off x="0" y="0"/>
+          <a:ext cx="0" cy="0"/>
+          <a:chOff x="0" y="0"/>
+          <a:chExt cx="0" cy="0"/>
+        </a:xfrm>
+      </p:grpSpPr>
+      <p:sp>
+        <p:nvSpPr>
+          <p:cNvPr id="2" name="Tytuł 1">
+            <a:extLst>
+              <a:ext uri="{FF2B5EF4-FFF2-40B4-BE49-F238E27FC236}">
+                <a16:creationId xmlns:a16="http://schemas.microsoft.com/office/drawing/2014/main" id="{ABF6D0C4-2D0F-6670-98C9-0A2916B1761C}"/>
+              </a:ext>
+            </a:extLst>
+          </p:cNvPr>
+          <p:cNvSpPr>
+            <a:spLocks noGrp="1"/>
+          </p:cNvSpPr>
+          <p:nvPr>
+            <p:ph type="title"/>
+          </p:nvPr>
+        </p:nvSpPr>
+        <p:spPr/>
+        <p:txBody>
+          <a:bodyPr/>
+          <a:lstStyle/>
+          <a:p>
+            <a:endParaRPr lang="pl-PL" dirty="0"/>
+          </a:p>
+        </p:txBody>
+      </p:sp>
+      <p:sp>
+        <p:nvSpPr>
+          <p:cNvPr id="3" name="Symbol zastępczy tekstu 2">
+            <a:extLst>
+              <a:ext uri="{FF2B5EF4-FFF2-40B4-BE49-F238E27FC236}">
+                <a16:creationId xmlns:a16="http://schemas.microsoft.com/office/drawing/2014/main" id="{BF9FFE89-09B9-41D5-1B5B-5E78538ABD95}"/>
+              </a:ext>
+            </a:extLst>
+          </p:cNvPr>
+          <p:cNvSpPr>
+            <a:spLocks noGrp="1"/>
+          </p:cNvSpPr>
+          <p:nvPr>
+            <p:ph type="body" idx="1"/>
+          </p:nvPr>
+        </p:nvSpPr>
+        <p:spPr/>
+        <p:txBody>
+          <a:bodyPr/>
+          <a:lstStyle/>
+          <a:p>
+            <a:endParaRPr lang="pl-PL"/>
+          </a:p>
+        </p:txBody>
+      </p:sp>
+    </p:spTree>
+    <p:extLst>
+      <p:ext uri="{BB962C8B-B14F-4D97-AF65-F5344CB8AC3E}">
+        <p14:creationId xmlns:p14="http://schemas.microsoft.com/office/powerpoint/2010/main" val="1501502243"/>
       </p:ext>
     </p:extLst>
   </p:cSld>
